--- a/docs/defensa/presentacion_tfg.pptx
+++ b/docs/defensa/presentacion_tfg.pptx
@@ -5,7 +5,7 @@
     <p:sldMasterId id="2147483648" r:id="rId1"/>
   </p:sldMasterIdLst>
   <p:notesMasterIdLst>
-    <p:notesMasterId r:id="rId24"/>
+    <p:notesMasterId r:id="rId23"/>
   </p:notesMasterIdLst>
   <p:sldIdLst>
     <p:sldId id="256" r:id="rId2"/>
@@ -27,9 +27,8 @@
     <p:sldId id="272" r:id="rId18"/>
     <p:sldId id="273" r:id="rId19"/>
     <p:sldId id="274" r:id="rId20"/>
-    <p:sldId id="275" r:id="rId21"/>
-    <p:sldId id="276" r:id="rId22"/>
-    <p:sldId id="277" r:id="rId23"/>
+    <p:sldId id="276" r:id="rId21"/>
+    <p:sldId id="277" r:id="rId22"/>
   </p:sldIdLst>
   <p:sldSz cx="12192000" cy="6858000"/>
   <p:notesSz cx="6858000" cy="9144000"/>
@@ -895,13 +894,17 @@
               <a:t>Tiempo orientativo: 0:25 (acumulado 0:25 sobre los 25 minutos de exposición; la diapositiva de cierre, la 22, queda fuera de este reparto porque marca el final y abre el turno de preguntas).</a:t>
             </a:r>
           </a:p>
-          <a:p/>
+          <a:p>
+            <a:endParaRPr/>
+          </a:p>
           <a:p>
             <a:r>
               <a:t>Buenos días/tardes. Mi nombre es Carlos Martínez Jaén y voy a presentar mi Trabajo Fin de Grado: especificación de formato y desarrollo de herramientas para el procesamiento de currículum vítae en el ámbito académico universitario. Lo denomino Open CVN: una arquitectura computacional abierta para representar, validar, transformar y exportar currículos académicos, dirigido por Luis De la Ossa Jiménez y codirigido por José Antonio Gámez Martín.</a:t>
             </a:r>
           </a:p>
-          <a:p/>
+          <a:p>
+            <a:endParaRPr/>
+          </a:p>
           <a:p>
             <a:r>
               <a:t>Transición: tras el saludo se presenta el índice de la exposición.</a:t>
@@ -1018,8 +1021,8 @@
         </p:nvSpPr>
         <p:spPr>
           <a:xfrm>
-            <a:off x="1143000" y="685800"/>
-            <a:ext cx="4571640" cy="3428640"/>
+            <a:off x="381000" y="685800"/>
+            <a:ext cx="6096000" cy="3429000"/>
           </a:xfrm>
           <a:prstGeom prst="rect">
             <a:avLst/>
@@ -1062,19 +1065,25 @@
               <a:t>Tiempo orientativo: 1:25 (acumulado 11:30).</a:t>
             </a:r>
           </a:p>
-          <a:p/>
+          <a:p>
+            <a:endParaRPr/>
+          </a:p>
           <a:p>
             <a:r>
               <a:t>El segundo bloque de la arquitectura se implementa en cuatro etapas. La generación estructural emplea xsdata para producir automáticamente las estructuras de datos a partir de los esquemas XSD oficiales, de forma fiel al XML de CVN y sin ninguna interpretación semántica todavía. La normalización unifica el manual funcional y el modelo en árbol en una única estructura, indexada por código CVN. La resolución auxiliar resuelve las referencias del manual hacia entidades, tablas y tesauro, dejando constancia de la evidencia empleada. Y la política semántica decide, campo a campo, su forma semántica: texto, fecha, enumeración cerrada, catálogo abierto, referencia, y así sucesivamente.</a:t>
             </a:r>
           </a:p>
-          <a:p/>
+          <a:p>
+            <a:endParaRPr/>
+          </a:p>
           <a:p>
             <a:r>
               <a:t>Estas etapas se mantienen y revisan manualmente en el módulo de pipeline, separadas de las estructuras que se generan de forma automática: el código generado no se edita nunca a mano, y la interpretación semántica se realiza siempre en capas posteriores.</a:t>
             </a:r>
           </a:p>
-          <a:p/>
+          <a:p>
+            <a:endParaRPr/>
+          </a:p>
           <a:p>
             <a:r>
               <a:t>Transición: se muestran a continuación las cifras reales que produce esta normalización.</a:t>
@@ -1191,8 +1200,8 @@
         </p:nvSpPr>
         <p:spPr>
           <a:xfrm>
-            <a:off x="1143000" y="685800"/>
-            <a:ext cx="4571640" cy="3428640"/>
+            <a:off x="381000" y="685800"/>
+            <a:ext cx="6096000" cy="3429000"/>
           </a:xfrm>
           <a:prstGeom prst="rect">
             <a:avLst/>
@@ -1235,19 +1244,25 @@
               <a:t>Tiempo orientativo: 1:10 (acumulado 12:40).</a:t>
             </a:r>
           </a:p>
-          <a:p/>
+          <a:p>
+            <a:endParaRPr/>
+          </a:p>
           <a:p>
             <a:r>
               <a:t>Sobre el paquete oficial vigente, la normalización produce 1457 entradas, de las cuales 1429 están presentes tanto en el manual como en el modelo en árbol, con 33 discrepancias registradas de forma explícita. De esas 1457 entradas, 557 declaran una tabla de referencia en el manual, y su resolución se apoya en evidencia concreta del paquete: solo una queda sin resolver.</a:t>
             </a:r>
           </a:p>
-          <a:p/>
+          <a:p>
+            <a:endParaRPr/>
+          </a:p>
           <a:p>
             <a:r>
               <a:t>Ese caso corresponde a CVN_AGENCY_C: el manual cita una tabla que no tiene equivalente localizable en el resto del paquete, por lo que se conserva como referencia no resuelta en lugar de forzar una interpretación no justificada.</a:t>
             </a:r>
           </a:p>
-          <a:p/>
+          <a:p>
+            <a:endParaRPr/>
+          </a:p>
           <a:p>
             <a:r>
               <a:t>Transición: sobre estos metadatos normalizados se aplica a continuación la política semántica que determina su significado.</a:t>
@@ -1364,8 +1379,8 @@
         </p:nvSpPr>
         <p:spPr>
           <a:xfrm>
-            <a:off x="1143000" y="685800"/>
-            <a:ext cx="4571640" cy="3428640"/>
+            <a:off x="381000" y="685800"/>
+            <a:ext cx="6096000" cy="3429000"/>
           </a:xfrm>
           <a:prstGeom prst="rect">
             <a:avLst/>
@@ -1408,25 +1423,33 @@
               <a:t>Tiempo orientativo: 1:20 (acumulado 14:00).</a:t>
             </a:r>
           </a:p>
-          <a:p/>
+          <a:p>
+            <a:endParaRPr/>
+          </a:p>
           <a:p>
             <a:r>
               <a:t>La política semántica reconoce nueve formas semánticas base: texto, fecha, número, enumeración cerrada, catálogo abierto, referencia a entidad, término de tesauro, subtipo y referencia no resuelta.</a:t>
             </a:r>
           </a:p>
-          <a:p/>
+          <a:p>
+            <a:endParaRPr/>
+          </a:p>
           <a:p>
             <a:r>
               <a:t>El ejemplo empleado como hilo conductor en toda la memoria es el campo de sexo. Conviene distinguir aquí dos códigos que aparecen juntos y que no deben confundirse. El código 000.010.000.030 identifica el campo dentro de la estructura de CVN: es la posición exacta que ocupa "sexo" en la jerarquía de códigos del manual y del modelo en árbol. El código "000" que aparece en el fragmento JSON, en cambio, no identifica el campo, sino el valor concreto elegido dentro de ese campo: es el código del valor seleccionado en la tabla de referencia CVN_SEX_A, que en este caso tiene solo dos valores posibles. Son, por tanto, dos códigos de naturaleza distinta: uno señala dónde está el campo dentro de CVN, y el otro señala qué valor tiene, tomado de su tabla de referencia.</a:t>
             </a:r>
           </a:p>
-          <a:p/>
+          <a:p>
+            <a:endParaRPr/>
+          </a:p>
           <a:p>
             <a:r>
               <a:t>Este mismo campo se reencuentra más adelante, ya en su definición final dentro del JSON Schema.</a:t>
             </a:r>
           </a:p>
-          <a:p/>
+          <a:p>
+            <a:endParaRPr/>
+          </a:p>
           <a:p>
             <a:r>
               <a:t>Transición: sobre esa misma política semántica se generan los modelos de dominio y el modelo conceptual.</a:t>
@@ -1543,8 +1566,8 @@
         </p:nvSpPr>
         <p:spPr>
           <a:xfrm>
-            <a:off x="1143000" y="685800"/>
-            <a:ext cx="4571640" cy="3428640"/>
+            <a:off x="381000" y="685800"/>
+            <a:ext cx="6096000" cy="3429000"/>
           </a:xfrm>
           <a:prstGeom prst="rect">
             <a:avLst/>
@@ -1587,19 +1610,25 @@
               <a:t>Tiempo orientativo: 1:10 (acumulado 15:10).</a:t>
             </a:r>
           </a:p>
-          <a:p/>
+          <a:p>
+            <a:endParaRPr/>
+          </a:p>
           <a:p>
             <a:r>
               <a:t>Esta etapa produce dos artefactos con propósitos distintos. Por un lado, los modelos de dominio en Pydantic: 105 archivos en total, de los cuales 101 corresponden a módulos por concepto curricular, uno agrupa los campos exclusivos del manual, otro los nodos del árbol sin ítem asociado, y el último reúne las trece enumeraciones detectadas.</a:t>
             </a:r>
           </a:p>
-          <a:p/>
+          <a:p>
+            <a:endParaRPr/>
+          </a:p>
           <a:p>
             <a:r>
               <a:t>Por otro lado, y de forma independiente, el modelo conceptual agnóstico reutiliza esa misma información sin necesidad de volver a leer el XML ni el XSD originales. Este modelo conceptual es el que alimenta la vista UML mostrada en la figura, y es también el que se emplea directamente para generar el JSON Schema final: 182 definiciones, de las cuales 74 son vocabularios controlados.</a:t>
             </a:r>
           </a:p>
-          <a:p/>
+          <a:p>
+            <a:endParaRPr/>
+          </a:p>
           <a:p>
             <a:r>
               <a:t>Transición: con esto concluye el pipeline interno; se presenta a continuación el resultado, el formato Open CVN JSON.</a:t>
@@ -1716,8 +1745,8 @@
         </p:nvSpPr>
         <p:spPr>
           <a:xfrm>
-            <a:off x="1143000" y="685800"/>
-            <a:ext cx="4571640" cy="3428640"/>
+            <a:off x="381000" y="685800"/>
+            <a:ext cx="6096000" cy="3429000"/>
           </a:xfrm>
           <a:prstGeom prst="rect">
             <a:avLst/>
@@ -1760,19 +1789,25 @@
               <a:t>Tiempo orientativo: 1:15 (acumulado 16:25).</a:t>
             </a:r>
           </a:p>
-          <a:p/>
+          <a:p>
+            <a:endParaRPr/>
+          </a:p>
           <a:p>
             <a:r>
               <a:t>El formato de salida es Open CVN JSON. Su raíz tiene cuatro campos: schema_version identifica la versión del formato, no la del JSON Schema; metadata describe el documento, no su contenido curricular; curriculum es la información propiamente dicha, organizada por área conceptual del dominio académico -identidad, educación, investigación, experiencia profesional, logros y otros- en lugar de por la estructura XML original; y extensions es opcional, reservado para metadatos de una herramienta concreta.</a:t>
             </a:r>
           </a:p>
-          <a:p/>
+          <a:p>
+            <a:endParaRPr/>
+          </a:p>
           <a:p>
             <a:r>
               <a:t>Los valores controlados, como el campo de sexo ya presentado, comparten siempre la misma forma, con elementos que cumplen funciones distintas: code es el código del valor dentro de su tabla de origen; label es el texto legible correspondiente a ese código; source identifica la tabla o el vocabulario de procedencia, y es lo que permite trazar el valor hasta CVN; y, de forma opcional, raw_value conserva el valor original cuando no ha podido resolverse contra un vocabulario cerrado, o uri enlaza con un registro externo cuando el valor procede de un catálogo o un tesauro. Esta forma común es la que permite validar y tratar de manera uniforme cualquier referencia controlada del documento, sea cual sea su origen.</a:t>
             </a:r>
           </a:p>
-          <a:p/>
+          <a:p>
+            <a:endParaRPr/>
+          </a:p>
           <a:p>
             <a:r>
               <a:t>Transición: ese formato necesita un contrato de validación claro: el parser y el validador.</a:t>
@@ -1889,8 +1924,8 @@
         </p:nvSpPr>
         <p:spPr>
           <a:xfrm>
-            <a:off x="1143000" y="685800"/>
-            <a:ext cx="4571640" cy="3428640"/>
+            <a:off x="381000" y="685800"/>
+            <a:ext cx="6096000" cy="3429000"/>
           </a:xfrm>
           <a:prstGeom prst="rect">
             <a:avLst/>
@@ -1933,25 +1968,33 @@
               <a:t>Tiempo orientativo: 1:10 (acumulado 17:35).</a:t>
             </a:r>
           </a:p>
-          <a:p/>
+          <a:p>
+            <a:endParaRPr/>
+          </a:p>
           <a:p>
             <a:r>
               <a:t>El contrato público de parser y validador expone cuatro funciones -leer el documento, validarlo, importar desde XML e importar desde PDF-, representadas en la parte superior de la diapositiva. Se denomina "contrato" porque, con independencia del formato de entrada, las cuatro funciones devuelven siempre el mismo tipo de resultado, con la misma estructura de información, lo que permite tratarlas de manera uniforme desde el resto del sistema.</a:t>
             </a:r>
           </a:p>
-          <a:p/>
+          <a:p>
+            <a:endParaRPr/>
+          </a:p>
           <a:p>
             <a:r>
               <a:t>Ese resultado admite cinco estados posibles: sin ejecutar, válido, válido con avisos, inválido y fallido. El estado "válido con avisos" existe porque un aviso nunca convierte un documento válido en inválido: señala un caso semánticamente atípico, como un tipo inconsistente con la sección o una referencia sin código ni etiqueta, para que pueda revisarse sin bloquear el documento.</a:t>
             </a:r>
           </a:p>
-          <a:p/>
+          <a:p>
+            <a:endParaRPr/>
+          </a:p>
           <a:p>
             <a:r>
               <a:t>El diagrama de la derecha resume el flujo completo de importación y validación.</a:t>
             </a:r>
           </a:p>
-          <a:p/>
+          <a:p>
+            <a:endParaRPr/>
+          </a:p>
           <a:p>
             <a:r>
               <a:t>Transición: se presentan a continuación las vías de importación concretas y la herramienta local que las emplea.</a:t>
@@ -2112,19 +2155,25 @@
               <a:t>Tiempo orientativo: 1:20 (acumulado 18:55).</a:t>
             </a:r>
           </a:p>
-          <a:p/>
+          <a:p>
+            <a:endParaRPr/>
+          </a:p>
           <a:p>
             <a:r>
               <a:t>Existen tres vías de entrada, según el grado de conformidad del documento con la norma CVN. La primera es el caso directo: un documento ya en Open CVN JSON, que se analiza y valida sin transformación adicional. La segunda agrupa los documentos CVN propiamente dichos, ya sea en XML o en un PDF que sigue la norma: en ambos casos se extrae y mapea el XML de forma determinista, y solo si esa extracción no es posible, pese a que el PDF cumple la norma, se recurre a un modelo de lenguaje como respaldo. La tercera vía corresponde a un PDF que no sigue la norma CVN o que no contiene XML embebido: al no existir ninguna vía determinista disponible, el documento completo se procesa mediante un modelo de lenguaje.</a:t>
             </a:r>
           </a:p>
-          <a:p/>
+          <a:p>
+            <a:endParaRPr/>
+          </a:p>
           <a:p>
             <a:r>
               <a:t>Todo esto se opera desde una herramienta local de línea de órdenes: store init inicializa el almacenamiento en SQLite; json import y pdf import importan un documento; versions derive crea una versión derivada a partir del currículo maestro; versions include y exclude seleccionan o excluyen secciones y entradas; y latex export junto con pdf generate exportan y compilan el resultado.</a:t>
             </a:r>
           </a:p>
-          <a:p/>
+          <a:p>
+            <a:endParaRPr/>
+          </a:p>
           <a:p>
             <a:r>
               <a:t>Transición: y ahora la pregunta central: cómo se verifica que todo esto funciona.</a:t>
@@ -2285,19 +2334,25 @@
               <a:t>Tiempo orientativo: 1:25 (acumulado 20:20).</a:t>
             </a:r>
           </a:p>
-          <a:p/>
+          <a:p>
+            <a:endParaRPr/>
+          </a:p>
           <a:p>
             <a:r>
               <a:t>El sistema se evalúa con 488 pruebas automatizadas, organizadas en ocho niveles alineados con las mismas capas de la arquitectura, ejecutadas en 692,80 segundos gracias a la paralelización, sin ningún fallo en la última ejecución. El gráfico muestra la distribución por nivel: desde los artefactos generados, el nivel con más pruebas, hasta la exportación, el más reducido.</a:t>
             </a:r>
           </a:p>
-          <a:p/>
+          <a:p>
+            <a:endParaRPr/>
+          </a:p>
           <a:p>
             <a:r>
               <a:t>Todo el conjunto se lanza con un único comando, tanto en local como en integración continua, de modo que el resultado no depende del entorno de quien lo ejecuta. Este es el dato que sostiene el resto de afirmaciones técnicas de la exposición.</a:t>
             </a:r>
           </a:p>
-          <a:p/>
+          <a:p>
+            <a:endParaRPr/>
+          </a:p>
           <a:p>
             <a:r>
               <a:t>Transición: no todas las partes del sistema ofrecen, sin embargo, el mismo nivel de garantía.</a:t>
@@ -2414,8 +2469,8 @@
         </p:nvSpPr>
         <p:spPr>
           <a:xfrm>
-            <a:off x="1143000" y="685800"/>
-            <a:ext cx="4571640" cy="3428640"/>
+            <a:off x="381000" y="685800"/>
+            <a:ext cx="6096000" cy="3429000"/>
           </a:xfrm>
           <a:prstGeom prst="rect">
             <a:avLst/>
@@ -2458,25 +2513,33 @@
               <a:t>Tiempo orientativo: 1:15 (acumulado 21:35).</a:t>
             </a:r>
           </a:p>
-          <a:p/>
+          <a:p>
+            <a:endParaRPr/>
+          </a:p>
           <a:p>
             <a:r>
               <a:t>Conviene distinguir con precisión dos niveles de garantía. Son fuertes y deterministas: la generación estructural desde los esquemas XSD oficiales, la normalización y resolución de referencias con evidencia trazable, la política semántica evaluada a partir de evidencia concreta, y la validación estructural y en tiempo de ejecución del formato Open CVN JSON.</a:t>
             </a:r>
           </a:p>
-          <a:p/>
+          <a:p>
+            <a:endParaRPr/>
+          </a:p>
           <a:p>
             <a:r>
               <a:t>Son parciales y están documentadas, no ocultas: la importación de CVN XML, que constituye un mapeo semántico parcial y creciente; la importación asistida por un modelo de lenguaje, que es opcional y nunca autoritativa sin revisión posterior; y la generación de PDF, que depende de un motor LaTeX disponible en el entorno.</a:t>
             </a:r>
           </a:p>
-          <a:p/>
+          <a:p>
+            <a:endParaRPr/>
+          </a:p>
           <a:p>
             <a:r>
               <a:t>Esto no debe interpretarse como una conversión completa del ecosistema CVN ni como una validación semántica total del dominio.</a:t>
             </a:r>
           </a:p>
-          <a:p/>
+          <a:p>
+            <a:endParaRPr/>
+          </a:p>
           <a:p>
             <a:r>
               <a:t>Transición: con esto se entra en las conclusiones, comenzando por el cumplimiento de los diez objetivos.</a:t>
@@ -2637,19 +2700,25 @@
               <a:t>Tiempo orientativo: 1:15 (acumulado 22:50).</a:t>
             </a:r>
           </a:p>
-          <a:p/>
+          <a:p>
+            <a:endParaRPr/>
+          </a:p>
           <a:p>
             <a:r>
               <a:t>Se retoman los diez objetivos específicos del capítulo de introducción, en el mismo orden en que se plantearon. Nueve se dan por cumplidos de forma determinista: el análisis del ecosistema, el estudio de alternativas, la generación estructural, la normalización, las reglas semánticas trazables, los modelos de dominio y conceptuales, el formato Open CVN JSON, el contrato de parser, validador, almacenamiento y exportación, y la verificación automatizada.</a:t>
             </a:r>
           </a:p>
-          <a:p/>
+          <a:p>
+            <a:endParaRPr/>
+          </a:p>
           <a:p>
             <a:r>
               <a:t>Solo el objetivo OE9, la importación determinista y asistida por modelo de lenguaje, se cumple con garantías parciales, de forma deliberada: la importación asistida por LLM es opcional y no autoritativa sin revisión, una decisión de diseño y no una carencia. El objetivo general se considera, en consecuencia, cumplido: la única salvedad es intencionada.</a:t>
             </a:r>
           </a:p>
-          <a:p/>
+          <a:p>
+            <a:endParaRPr/>
+          </a:p>
           <a:p>
             <a:r>
               <a:t>Transición: ese cumplimiento se apoya en siete contribuciones concretas.</a:t>
@@ -2766,8 +2835,8 @@
         </p:nvSpPr>
         <p:spPr>
           <a:xfrm>
-            <a:off x="1143000" y="685800"/>
-            <a:ext cx="4571640" cy="3428640"/>
+            <a:off x="381000" y="685800"/>
+            <a:ext cx="6096000" cy="3429000"/>
           </a:xfrm>
           <a:prstGeom prst="rect">
             <a:avLst/>
@@ -2810,13 +2879,17 @@
               <a:t>Tiempo orientativo: 0:35 (acumulado 1:00).</a:t>
             </a:r>
           </a:p>
-          <a:p/>
+          <a:p>
+            <a:endParaRPr/>
+          </a:p>
           <a:p>
             <a:r>
               <a:t>La exposición sigue la estructura habitual de una defensa de Trabajo Fin de Grado: motivación y contexto, objetivos, análisis del ecosistema CVN, metodología y arquitectura, implementación del pipeline, el formato Open CVN y la herramienta que lo demuestra, evaluación de resultados y, por último, conclusiones y trabajo futuro. La exposición dura veinticinco minutos; a continuación tendrá lugar el turno de preguntas del tribunal.</a:t>
             </a:r>
           </a:p>
-          <a:p/>
+          <a:p>
+            <a:endParaRPr/>
+          </a:p>
           <a:p>
             <a:r>
               <a:t>Transición: se inicia el primer bloque, motivación y contexto.</a:t>
@@ -2923,7 +2996,7 @@
       </p:grpSpPr>
       <p:sp>
         <p:nvSpPr>
-          <p:cNvPr id="502" name="PlaceHolder 1"/>
+          <p:cNvPr id="505" name="PlaceHolder 1"/>
           <p:cNvSpPr>
             <a:spLocks noGrp="1" noRot="1" noChangeAspect="1"/>
           </p:cNvSpPr>
@@ -2933,8 +3006,8 @@
         </p:nvSpPr>
         <p:spPr>
           <a:xfrm>
-            <a:off x="1143000" y="685800"/>
-            <a:ext cx="4571640" cy="3428640"/>
+            <a:off x="381000" y="685800"/>
+            <a:ext cx="6096000" cy="3429000"/>
           </a:xfrm>
           <a:prstGeom prst="rect">
             <a:avLst/>
@@ -2946,7 +3019,7 @@
       </p:sp>
       <p:sp>
         <p:nvSpPr>
-          <p:cNvPr id="503" name="PlaceHolder 2"/>
+          <p:cNvPr id="506" name="PlaceHolder 2"/>
           <p:cNvSpPr>
             <a:spLocks noGrp="1"/>
           </p:cNvSpPr>
@@ -2974,31 +3047,43 @@
           <a:lstStyle/>
           <a:p>
             <a:r>
-              <a:t>Tiempo orientativo: 0:55 (acumulado 23:45).</a:t>
-            </a:r>
-          </a:p>
-          <a:p/>
-          <a:p>
-            <a:r>
-              <a:t>Se enumeran a continuación siete contribuciones, ya demostradas a lo largo de la exposición: el análisis computacional del ecosistema CVN, la arquitectura reproducible por capas, la trazabilidad entre CVN y Open CVN, el formato Open CVN JSON, las herramientas de validación y uso, la importación determinista y asistida por modelo de lenguaje, y la verificación automatizada. Ninguna de ellas sustituye al ecosistema CVN oficial: todas lo complementan.</a:t>
-            </a:r>
-          </a:p>
-          <a:p/>
-          <a:p>
-            <a:r>
-              <a:t>Transición: se cierra la exposición con la conclusión general y las líneas de trabajo futuro.</a:t>
-            </a:r>
-          </a:p>
-        </p:txBody>
-      </p:sp>
-      <p:sp>
-        <p:nvSpPr>
-          <p:cNvPr id="504" name="PlaceHolder 3"/>
+              <a:t>Tiempo orientativo: 1:15 (acumulado 25:00 - fin del tiempo de exposición).</a:t>
+            </a:r>
+          </a:p>
+          <a:p>
+            <a:endParaRPr/>
+          </a:p>
+          <a:p>
+            <a:r>
+              <a:t>Este trabajo demuestra que es posible construir, a partir de CVN, una arquitectura computacional abierta que separa la interoperabilidad estructural del significado curricular, con trazabilidad verificable y garantías reproducibles allí donde el proceso es determinista. Esa arquitectura por capas -más que el formato JSON o la herramienta que la demuestran- constituye la aportación principal de este Trabajo Fin de Grado. Las limitaciones descritas no comprometen esta conclusión: unas proceden del propio paquete CVN, y otras son decisiones deliberadas de alcance.</a:t>
+            </a:r>
+          </a:p>
+          <a:p>
+            <a:endParaRPr/>
+          </a:p>
+          <a:p>
+            <a:r>
+              <a:t>Como trabajo futuro se plantean cinco líneas: completar el mapeo semántico de la importación XML con currículos reales; ampliar las validaciones de dominio fuera de la capa estructural generada; estudiar la incorporación de restricciones OCL sobre el modelo conceptual; reducir la dependencia de un motor LaTeX en la generación de PDF; y explorar extensiones semánticas, como JSON-LD, y la integración institucional.</a:t>
+            </a:r>
+          </a:p>
+          <a:p>
+            <a:endParaRPr/>
+          </a:p>
+          <a:p>
+            <a:r>
+              <a:t>Transición: con esto concluye la exposición.</a:t>
+            </a:r>
+          </a:p>
+        </p:txBody>
+      </p:sp>
+      <p:sp>
+        <p:nvSpPr>
+          <p:cNvPr id="507" name="PlaceHolder 3"/>
           <p:cNvSpPr>
             <a:spLocks noGrp="1"/>
           </p:cNvSpPr>
           <p:nvPr>
-            <p:ph type="sldNum" idx="56"/>
+            <p:ph type="sldNum" idx="57"/>
           </p:nvPr>
         </p:nvSpPr>
         <p:spPr>
@@ -3041,7 +3126,7 @@
               </a:lnSpc>
               <a:buNone/>
             </a:pPr>
-            <a:fld id="{E50946C0-BA9C-4653-9C21-15C5DC7239DA}" type="slidenum">
+            <a:fld id="{05AA53DF-AEEC-4BE5-97FF-59FBB69F0764}" type="slidenum">
               <a:rPr lang="en-US" sz="1200" b="0" u="none" strike="noStrike">
                 <a:solidFill>
                   <a:srgbClr val="000000"/>
@@ -3090,179 +3175,6 @@
       </p:grpSpPr>
       <p:sp>
         <p:nvSpPr>
-          <p:cNvPr id="505" name="PlaceHolder 1"/>
-          <p:cNvSpPr>
-            <a:spLocks noGrp="1" noRot="1" noChangeAspect="1"/>
-          </p:cNvSpPr>
-          <p:nvPr>
-            <p:ph type="sldImg"/>
-          </p:nvPr>
-        </p:nvSpPr>
-        <p:spPr>
-          <a:xfrm>
-            <a:off x="1143000" y="685800"/>
-            <a:ext cx="4571640" cy="3428640"/>
-          </a:xfrm>
-          <a:prstGeom prst="rect">
-            <a:avLst/>
-          </a:prstGeom>
-          <a:ln w="0">
-            <a:noFill/>
-          </a:ln>
-        </p:spPr>
-      </p:sp>
-      <p:sp>
-        <p:nvSpPr>
-          <p:cNvPr id="506" name="PlaceHolder 2"/>
-          <p:cNvSpPr>
-            <a:spLocks noGrp="1"/>
-          </p:cNvSpPr>
-          <p:nvPr>
-            <p:ph type="body"/>
-          </p:nvPr>
-        </p:nvSpPr>
-        <p:spPr>
-          <a:xfrm>
-            <a:off x="685800" y="4343400"/>
-            <a:ext cx="5486040" cy="4114440"/>
-          </a:xfrm>
-          <a:prstGeom prst="rect">
-            <a:avLst/>
-          </a:prstGeom>
-          <a:noFill/>
-          <a:ln w="0">
-            <a:noFill/>
-          </a:ln>
-        </p:spPr>
-        <p:txBody>
-          <a:bodyPr lIns="91440" tIns="45720" rIns="91440" bIns="45720" anchor="t">
-            <a:noAutofit/>
-          </a:bodyPr>
-          <a:lstStyle/>
-          <a:p>
-            <a:r>
-              <a:t>Tiempo orientativo: 1:15 (acumulado 25:00 - fin del tiempo de exposición).</a:t>
-            </a:r>
-          </a:p>
-          <a:p/>
-          <a:p>
-            <a:r>
-              <a:t>Este trabajo demuestra que es posible construir, a partir de CVN, una arquitectura computacional abierta que separa la interoperabilidad estructural del significado curricular, con trazabilidad verificable y garantías reproducibles allí donde el proceso es determinista. Esa arquitectura por capas -más que el formato JSON o la herramienta que la demuestran- constituye la aportación principal de este Trabajo Fin de Grado. Las limitaciones descritas no comprometen esta conclusión: unas proceden del propio paquete CVN, y otras son decisiones deliberadas de alcance.</a:t>
-            </a:r>
-          </a:p>
-          <a:p/>
-          <a:p>
-            <a:r>
-              <a:t>Como trabajo futuro se plantean cinco líneas: completar el mapeo semántico de la importación XML con currículos reales; ampliar las validaciones de dominio fuera de la capa estructural generada; estudiar la incorporación de restricciones OCL sobre el modelo conceptual; reducir la dependencia de un motor LaTeX en la generación de PDF; y explorar extensiones semánticas, como JSON-LD, y la integración institucional.</a:t>
-            </a:r>
-          </a:p>
-          <a:p/>
-          <a:p>
-            <a:r>
-              <a:t>Transición: con esto concluye la exposición.</a:t>
-            </a:r>
-          </a:p>
-        </p:txBody>
-      </p:sp>
-      <p:sp>
-        <p:nvSpPr>
-          <p:cNvPr id="507" name="PlaceHolder 3"/>
-          <p:cNvSpPr>
-            <a:spLocks noGrp="1"/>
-          </p:cNvSpPr>
-          <p:nvPr>
-            <p:ph type="sldNum" idx="57"/>
-          </p:nvPr>
-        </p:nvSpPr>
-        <p:spPr>
-          <a:xfrm>
-            <a:off x="3884760" y="8685360"/>
-            <a:ext cx="2971440" cy="456840"/>
-          </a:xfrm>
-          <a:prstGeom prst="rect">
-            <a:avLst/>
-          </a:prstGeom>
-          <a:noFill/>
-          <a:ln w="0">
-            <a:noFill/>
-          </a:ln>
-        </p:spPr>
-        <p:txBody>
-          <a:bodyPr lIns="91440" tIns="45720" rIns="91440" bIns="45720" anchor="b">
-            <a:noAutofit/>
-          </a:bodyPr>
-          <a:lstStyle>
-            <a:lvl1pPr indent="0" algn="r">
-              <a:lnSpc>
-                <a:spcPct val="100000"/>
-              </a:lnSpc>
-              <a:buNone/>
-              <a:defRPr lang="en-US" sz="1200" b="0" u="none" strike="noStrike">
-                <a:solidFill>
-                  <a:srgbClr val="000000"/>
-                </a:solidFill>
-                <a:effectLst/>
-                <a:uFillTx/>
-                <a:latin typeface="Times New Roman"/>
-              </a:defRPr>
-            </a:lvl1pPr>
-          </a:lstStyle>
-          <a:p>
-            <a:pPr indent="0" algn="r">
-              <a:lnSpc>
-                <a:spcPct val="100000"/>
-              </a:lnSpc>
-              <a:buNone/>
-            </a:pPr>
-            <a:fld id="{05AA53DF-AEEC-4BE5-97FF-59FBB69F0764}" type="slidenum">
-              <a:rPr lang="en-US" sz="1200" b="0" u="none" strike="noStrike">
-                <a:solidFill>
-                  <a:srgbClr val="000000"/>
-                </a:solidFill>
-                <a:effectLst/>
-                <a:uFillTx/>
-                <a:latin typeface="Times New Roman"/>
-              </a:rPr>
-              <a:t>21</a:t>
-            </a:fld>
-            <a:endParaRPr lang="es-ES" sz="1200" b="0" u="none" strike="noStrike">
-              <a:solidFill>
-                <a:srgbClr val="000000"/>
-              </a:solidFill>
-              <a:effectLst/>
-              <a:uFillTx/>
-              <a:latin typeface="Times New Roman"/>
-            </a:endParaRPr>
-          </a:p>
-        </p:txBody>
-      </p:sp>
-    </p:spTree>
-  </p:cSld>
-  <p:clrMapOvr>
-    <a:masterClrMapping/>
-  </p:clrMapOvr>
-</p:notes>
-</file>
-
-<file path=ppt/notesSlides/notesSlide22.xml><?xml version="1.0" encoding="utf-8"?>
-<p:notes xmlns:a="http://schemas.openxmlformats.org/drawingml/2006/main" xmlns:r="http://schemas.openxmlformats.org/officeDocument/2006/relationships" xmlns:p="http://schemas.openxmlformats.org/presentationml/2006/main">
-  <p:cSld>
-    <p:spTree>
-      <p:nvGrpSpPr>
-        <p:cNvPr id="1" name=""/>
-        <p:cNvGrpSpPr/>
-        <p:nvPr/>
-      </p:nvGrpSpPr>
-      <p:grpSpPr>
-        <a:xfrm>
-          <a:off x="0" y="0"/>
-          <a:ext cx="0" cy="0"/>
-          <a:chOff x="0" y="0"/>
-          <a:chExt cx="0" cy="0"/>
-        </a:xfrm>
-      </p:grpSpPr>
-      <p:sp>
-        <p:nvSpPr>
           <p:cNvPr id="508" name="PlaceHolder 1"/>
           <p:cNvSpPr>
             <a:spLocks noGrp="1" noRot="1" noChangeAspect="1"/>
@@ -3273,8 +3185,8 @@
         </p:nvSpPr>
         <p:spPr>
           <a:xfrm>
-            <a:off x="1143000" y="685800"/>
-            <a:ext cx="4571640" cy="3428640"/>
+            <a:off x="381000" y="685800"/>
+            <a:ext cx="6096000" cy="3429000"/>
           </a:xfrm>
           <a:prstGeom prst="rect">
             <a:avLst/>
@@ -3317,13 +3229,17 @@
               <a:t>Fuera del reparto de 25 minutos: esta diapositiva marca el final de la exposición y abre el turno de preguntas.</a:t>
             </a:r>
           </a:p>
-          <a:p/>
+          <a:p>
+            <a:endParaRPr/>
+          </a:p>
           <a:p>
             <a:r>
               <a:t>Muchas gracias por su atención. Quedo a su disposición para las preguntas del tribunal.</a:t>
             </a:r>
           </a:p>
-          <a:p/>
+          <a:p>
+            <a:endParaRPr/>
+          </a:p>
           <a:p>
             <a:r>
               <a:t>Conviene escuchar la pregunta completa antes de responder y, si no queda clara, pedir que se repita o se precise. Ante una pregunta sobre un objetivo, una cifra o un apartado concreto, el índice y los encabezados de cada diapositiva ("1 · Motivación...", "5 · Implementación...", etc.) permiten localizar rápidamente el punto correspondiente.</a:t>
@@ -3390,7 +3306,7 @@
                 <a:uFillTx/>
                 <a:latin typeface="Times New Roman"/>
               </a:rPr>
-              <a:t>22</a:t>
+              <a:t>21</a:t>
             </a:fld>
             <a:endParaRPr lang="es-ES" sz="1200" b="0" u="none" strike="noStrike">
               <a:solidFill>
@@ -3440,8 +3356,8 @@
         </p:nvSpPr>
         <p:spPr>
           <a:xfrm>
-            <a:off x="1143000" y="685800"/>
-            <a:ext cx="4571640" cy="3428640"/>
+            <a:off x="381000" y="685800"/>
+            <a:ext cx="6096000" cy="3429000"/>
           </a:xfrm>
           <a:prstGeom prst="rect">
             <a:avLst/>
@@ -3484,19 +3400,25 @@
               <a:t>Tiempo orientativo: 1:15 (acumulado 2:15).</a:t>
             </a:r>
           </a:p>
-          <a:p/>
+          <a:p>
+            <a:endParaRPr/>
+          </a:p>
           <a:p>
             <a:r>
               <a:t>FECYT define CVN como el formato común de presentación de datos curriculares de investigadores en España, concebido para ser interoperable con las bases de datos institucionales. Su uso, sin embargo, va más allá de la presentación: el currículo se emplea como entrada en evaluaciones, convocatorias, solicitudes de ayudas, acreditaciones y sistemas de gestión de la investigación.</a:t>
             </a:r>
           </a:p>
-          <a:p/>
+          <a:p>
+            <a:endParaRPr/>
+          </a:p>
           <a:p>
             <a:r>
               <a:t>Disponer de una norma común no elimina, no obstante, el coste de elaborar, mantener y adaptar un currículo a distintos contextos: pequeñas variaciones en la estructura o en el formato de salida obligan a tareas manuales repetitivas cada vez que un currículo se reutiliza. El uso automatizado de CVN sigue siendo costoso, y esa es la motivación de partida de este trabajo.</a:t>
             </a:r>
           </a:p>
-          <a:p/>
+          <a:p>
+            <a:endParaRPr/>
+          </a:p>
           <a:p>
             <a:r>
               <a:t>Transición: antes de continuar, conviene precisar en qué consiste realmente CVN.</a:t>
@@ -3613,8 +3535,8 @@
         </p:nvSpPr>
         <p:spPr>
           <a:xfrm>
-            <a:off x="1143000" y="685800"/>
-            <a:ext cx="4571640" cy="3428640"/>
+            <a:off x="381000" y="685800"/>
+            <a:ext cx="6096000" cy="3429000"/>
           </a:xfrm>
           <a:prstGeom prst="rect">
             <a:avLst/>
@@ -3657,25 +3579,33 @@
               <a:t>Tiempo orientativo: 1:25 (acumulado 3:40).</a:t>
             </a:r>
           </a:p>
-          <a:p/>
+          <a:p>
+            <a:endParaRPr/>
+          </a:p>
           <a:p>
             <a:r>
               <a:t>CVN no debe entenderse como un único documento, sino como un ecosistema de artefactos oficiales relacionados entre sí. El manual de especificaciones, en PDF, describe el significado funcional de cada campo para su lectura por personas; ese mismo contenido existe también en un manual estructurado en XML, ya pensado para ser procesado por software. Junto a él, un modelo en árbol, también en XML, enlaza cada código funcional con la posición real que ocupa dentro de un currículo.</a:t>
             </a:r>
           </a:p>
-          <a:p/>
+          <a:p>
+            <a:endParaRPr/>
+          </a:p>
           <a:p>
             <a:r>
               <a:t>El papel de XML y de XSD conviene precisarlo, porque no cumplen la misma función. XML es el formato en el que se serializan los datos: tanto el manual estructurado como el modelo en árbol están escritos en XML, y es el mecanismo que CVN emplea para representar e intercambiar la información. XSD, en cambio, no contiene datos: define la gramática formal que ese XML debe cumplir para considerarse válido, es decir, qué elementos son legales, en qué orden y con qué tipo de contenido, además del vocabulario de las tablas auxiliares. Dicho de otro modo, el manual y el modelo en árbol explican qué significa cada campo, mientras que XSD determina si un documento XML concreto tiene una forma correcta.</a:t>
             </a:r>
           </a:p>
-          <a:p/>
+          <a:p>
+            <a:endParaRPr/>
+          </a:p>
           <a:p>
             <a:r>
               <a:t>A estas cuatro capas se suman tres familias auxiliares: el catálogo de entidades, las tablas de referencia con sus subtipos, y el tesauro multilingüe. Todo el trabajo parte de esta fuente única y oficial, y XML es el mecanismo de representación de CVN, no el objeto conceptual del trabajo.</a:t>
             </a:r>
           </a:p>
-          <a:p/>
+          <a:p>
+            <a:endParaRPr/>
+          </a:p>
           <a:p>
             <a:r>
               <a:t>Transición: con esta base se presentan a continuación los objetivos concretos del trabajo.</a:t>
@@ -3836,19 +3766,25 @@
               <a:t>Tiempo orientativo: 1:30 (acumulado 5:10).</a:t>
             </a:r>
           </a:p>
-          <a:p/>
+          <a:p>
+            <a:endParaRPr/>
+          </a:p>
           <a:p>
             <a:r>
               <a:t>El objetivo general consiste en diseñar e implementar una arquitectura computacional abierta para representar, validar, transformar, almacenar y exportar currículos académicos e investigadores tomando CVN como norma de referencia, sin que su representación XML ni la herramienta oficial condicionen por completo el modelo interno del sistema. Este objetivo se retomará en las conclusiones para valorar su grado de cumplimiento.</a:t>
             </a:r>
           </a:p>
-          <a:p/>
+          <a:p>
+            <a:endParaRPr/>
+          </a:p>
           <a:p>
             <a:r>
               <a:t>De él se derivan diez objetivos específicos, organizados en cuatro bloques. Los objetivos OE1 y OE2 son de análisis: comprender el ecosistema CVN y estudiar alternativas de representación y validación de datos curriculares. Los objetivos OE3 a OE6 cubren la generación y la normalización: la obtención automática de las estructuras de datos a partir de los esquemas oficiales, y su posterior normalización en modelos de dominio. Los objetivos OE7 a OE9 cubren el formato y la herramienta: la definición de Open CVN JSON y la implementación del parseo, la validación, el almacenamiento, la exportación y la importación. Y el objetivo OE10 corresponde a la verificación, mediante pruebas automatizadas y flujos reproducibles de extremo a extremo.</a:t>
             </a:r>
           </a:p>
-          <a:p/>
+          <a:p>
+            <a:endParaRPr/>
+          </a:p>
           <a:p>
             <a:r>
               <a:t>Transición: antes de entrar en la arquitectura propuesta, se presentan las limitaciones detectadas en ese ecosistema.</a:t>
@@ -4009,43 +3945,57 @@
               <a:t>Tiempo orientativo: 1:15 (acumulado 6:25).</a:t>
             </a:r>
           </a:p>
-          <a:p/>
+          <a:p>
+            <a:endParaRPr/>
+          </a:p>
           <a:p>
             <a:r>
               <a:t>El análisis en profundidad de este ecosistema reveló cuatro tipos de limitación técnica, cada una con una respuesta de diseño ya incorporada en Open CVN.</a:t>
             </a:r>
           </a:p>
-          <a:p/>
+          <a:p>
+            <a:endParaRPr/>
+          </a:p>
           <a:p>
             <a:r>
               <a:t>La primera son discrepancias puntuales entre el XML canónico del modelo en árbol y su propio esquema de validación XSD; es decir, casos en los que el propio paquete oficial no es del todo consistente consigo mismo. Estas discrepancias se tratan como evidencia de origen y quedan registradas de forma explícita, sin ocultarse.</a:t>
             </a:r>
           </a:p>
-          <a:p/>
+          <a:p>
+            <a:endParaRPr/>
+          </a:p>
           <a:p>
             <a:r>
               <a:t>La segunda son construcciones del lenguaje XSD que no se trasladan de forma perfecta a estructuras ejecutables. Es el caso, por ejemplo, del mecanismo "choice", que en XSD permite declarar varias alternativas posibles para un mismo campo sin garantizar que sean mutuamente excluyentes al generar código; ocurre también con ciertas cardinalidades y con atributos que se generan con un tipo demasiado genérico. Estas limitaciones quedan confinadas a la capa estructural generada, sin exponerse en el formato final.</a:t>
             </a:r>
           </a:p>
-          <a:p/>
+          <a:p>
+            <a:endParaRPr/>
+          </a:p>
           <a:p>
             <a:r>
               <a:t>La tercera son tablas auxiliares que no siempre constituyen enumeraciones cerradas: su elegibilidad como enumeración se evalúa a partir de evidencia concreta de cada tabla, no se asume por defecto.</a:t>
             </a:r>
           </a:p>
-          <a:p/>
+          <a:p>
+            <a:endParaRPr/>
+          </a:p>
           <a:p>
             <a:r>
               <a:t>Y la cuarta son referencias sin tabla equivalente localizable, junto con una deriva de empaquetado entre las familias auxiliares a lo largo de distintas versiones del paquete oficial. Estos casos se conservan como no resueltos o parcialmente trazables, en lugar de forzarse una conversión con pérdida de información.</a:t>
             </a:r>
           </a:p>
-          <a:p/>
+          <a:p>
+            <a:endParaRPr/>
+          </a:p>
           <a:p>
             <a:r>
               <a:t>Ninguna de estas limitaciones invalida la norma CVN: condicionan su uso directo como modelo interno de una herramienta, que es precisamente el problema que Open CVN aborda.</a:t>
             </a:r>
           </a:p>
-          <a:p/>
+          <a:p>
+            <a:endParaRPr/>
+          </a:p>
           <a:p>
             <a:r>
               <a:t>Transición: frente a estas limitaciones, se presenta a continuación la propuesta de Open CVN.</a:t>
@@ -4206,19 +4156,25 @@
               <a:t>Tiempo orientativo: 1:10 (acumulado 7:35).</a:t>
             </a:r>
           </a:p>
-          <a:p/>
+          <a:p>
+            <a:endParaRPr/>
+          </a:p>
           <a:p>
             <a:r>
               <a:t>Open CVN no reproduce el paquete oficial como modelo interno: lo transforma de forma trazable, capa a capa. Como muestra la figura, el paquete CVN se convierte primero en metadatos normalizados; sobre ellos se aplica una política semántica; de ahí se deriva un modelo conceptual; y, finalmente, se obtiene el formato Open CVN JSON.</a:t>
             </a:r>
           </a:p>
-          <a:p/>
+          <a:p>
+            <a:endParaRPr/>
+          </a:p>
           <a:p>
             <a:r>
               <a:t>Cada capa añade una interpretación adicional sin descartar la relación con el paquete oficial: todo elemento del modelo final conserva evidencia verificable de la fuente CVN de la que procede.</a:t>
             </a:r>
           </a:p>
-          <a:p/>
+          <a:p>
+            <a:endParaRPr/>
+          </a:p>
           <a:p>
             <a:r>
               <a:t>Transición: a continuación se presenta la metodología y la arquitectura que hacen posible esta transformación.</a:t>
@@ -4335,8 +4291,8 @@
         </p:nvSpPr>
         <p:spPr>
           <a:xfrm>
-            <a:off x="1143000" y="685800"/>
-            <a:ext cx="4571640" cy="3428640"/>
+            <a:off x="381000" y="685800"/>
+            <a:ext cx="6096000" cy="3429000"/>
           </a:xfrm>
           <a:prstGeom prst="rect">
             <a:avLst/>
@@ -4379,25 +4335,33 @@
               <a:t>Tiempo orientativo: 1:15 (acumulado 8:50).</a:t>
             </a:r>
           </a:p>
-          <a:p/>
+          <a:p>
+            <a:endParaRPr/>
+          </a:p>
           <a:p>
             <a:r>
               <a:t>El desarrollo no se planteó como un proyecto de producto con iteraciones cortas, sino en cinco fases sucesivas, con documentación continua de decisiones y limitaciones como criterio transversal a todas ellas.</a:t>
             </a:r>
           </a:p>
-          <a:p/>
+          <a:p>
+            <a:endParaRPr/>
+          </a:p>
           <a:p>
             <a:r>
               <a:t>El análisis inicial consistió en delimitar el problema y estudiar la norma CVN junto con alternativas de representación y validación de datos curriculares, antes de tomar ninguna decisión de diseño. La exploración de artefactos supuso examinar en detalle cada documento del paquete oficial -manuales, modelo en árbol, esquemas y familias auxiliares- para identificar su contenido real y sus limitaciones. El diseño incremental por capas definió la arquitectura general antes de implementar ningún componente, capa a capa, de manera que cada una pudiera verificarse por separado. La implementación reproducible tradujo ese diseño en código: cada artefacto se genera mediante comandos deterministas, ejecutables por cualquier persona sobre el mismo paquete oficial. Y la verificación automatizada acompañó cada etapa con pruebas, en lugar de dejarse para el final del desarrollo.</a:t>
             </a:r>
           </a:p>
-          <a:p/>
+          <a:p>
+            <a:endParaRPr/>
+          </a:p>
           <a:p>
             <a:r>
               <a:t>Cada herramienta empleada se eligió porque permite generar o validar artefactos de forma reproducible: Python con uv para el entorno; xsdata para generar automáticamente las estructuras de datos a partir de los esquemas oficiales; Pydantic para los modelos; JSON Schema para la validación; SQLite para el almacenamiento local; Jinja y LaTeX para la exportación; pytest con xdist para las pruebas en paralelo; y Git con GitHub Actions para el control de versiones y la integración continua.</a:t>
             </a:r>
           </a:p>
-          <a:p/>
+          <a:p>
+            <a:endParaRPr/>
+          </a:p>
           <a:p>
             <a:r>
               <a:t>Transición: con esta metodología, la arquitectura general queda organizada en cuatro bloques.</a:t>
@@ -4558,13 +4522,17 @@
               <a:t>Tiempo orientativo: 1:15 (acumulado 10:05).</a:t>
             </a:r>
           </a:p>
-          <a:p/>
+          <a:p>
+            <a:endParaRPr/>
+          </a:p>
           <a:p>
             <a:r>
               <a:t>La arquitectura general se organiza en cuatro bloques, alineados con módulos reales del repositorio. La fuente oficial CVN constituye la frontera externa: la única fuente formal del sistema. El bloque de generación y normalización agrupa las estructuras de datos generadas automáticamente, los metadatos normalizados y la política semántica. El bloque de dominio, conceptual y formato agrupa los modelos de dominio, el modelo conceptual y el JSON Schema. Y la herramienta local constituye el uso operativo: importación, gestión de versiones y exportación.</a:t>
             </a:r>
           </a:p>
-          <a:p/>
+          <a:p>
+            <a:endParaRPr/>
+          </a:p>
           <a:p>
             <a:r>
               <a:t>Transición: se detalla a continuación la implementación de estas etapas, comenzando por la generación y la normalización.</a:t>
@@ -11315,6 +11283,7 @@
     <p:sldLayoutId id="2147483658" r:id="rId10"/>
     <p:sldLayoutId id="2147483659" r:id="rId11"/>
   </p:sldLayoutIdLst>
+  <p:hf hdr="0" ftr="0" dt="0"/>
   <p:txStyles>
     <p:titleStyle>
       <a:lvl1pPr algn="l" defTabSz="914400" rtl="0" eaLnBrk="1" latinLnBrk="0" hangingPunct="1">
@@ -12302,6 +12271,57 @@
           </a:p>
         </p:txBody>
       </p:sp>
+      <p:sp>
+        <p:nvSpPr>
+          <p:cNvPr id="2" name="Marcador de número de diapositiva 1">
+            <a:extLst>
+              <a:ext uri="{FF2B5EF4-FFF2-40B4-BE49-F238E27FC236}">
+                <a16:creationId xmlns:a16="http://schemas.microsoft.com/office/drawing/2014/main" id="{2F99FDF3-76BB-18B2-2025-272302AEB7A3}"/>
+              </a:ext>
+            </a:extLst>
+          </p:cNvPr>
+          <p:cNvSpPr>
+            <a:spLocks noGrp="1"/>
+          </p:cNvSpPr>
+          <p:nvPr>
+            <p:ph type="sldNum" idx="27"/>
+          </p:nvPr>
+        </p:nvSpPr>
+        <p:spPr/>
+        <p:txBody>
+          <a:bodyPr/>
+          <a:lstStyle/>
+          <a:p>
+            <a:pPr indent="0" algn="r" defTabSz="457200">
+              <a:lnSpc>
+                <a:spcPct val="100000"/>
+              </a:lnSpc>
+              <a:buNone/>
+            </a:pPr>
+            <a:fld id="{E96B40A6-A46F-4A85-AE2F-4CA2D3C05104}" type="slidenum">
+              <a:rPr lang="en-US" sz="1200" b="0" u="none" strike="noStrike" smtClean="0">
+                <a:solidFill>
+                  <a:schemeClr val="dk1">
+                    <a:tint val="75000"/>
+                  </a:schemeClr>
+                </a:solidFill>
+                <a:effectLst/>
+                <a:uFillTx/>
+                <a:latin typeface="Calibri"/>
+              </a:rPr>
+              <a:t>1</a:t>
+            </a:fld>
+            <a:endParaRPr lang="es-ES" sz="1200" b="0" u="none" strike="noStrike">
+              <a:solidFill>
+                <a:srgbClr val="000000"/>
+              </a:solidFill>
+              <a:effectLst/>
+              <a:uFillTx/>
+              <a:latin typeface="Times New Roman"/>
+            </a:endParaRPr>
+          </a:p>
+        </p:txBody>
+      </p:sp>
     </p:spTree>
   </p:cSld>
   <p:clrMapOvr>
@@ -13617,6 +13637,57 @@
           </a:p>
         </p:txBody>
       </p:sp>
+      <p:sp>
+        <p:nvSpPr>
+          <p:cNvPr id="2" name="Marcador de número de diapositiva 1">
+            <a:extLst>
+              <a:ext uri="{FF2B5EF4-FFF2-40B4-BE49-F238E27FC236}">
+                <a16:creationId xmlns:a16="http://schemas.microsoft.com/office/drawing/2014/main" id="{D3BD2D67-8884-DB14-D873-210ECA0233FA}"/>
+              </a:ext>
+            </a:extLst>
+          </p:cNvPr>
+          <p:cNvSpPr>
+            <a:spLocks noGrp="1"/>
+          </p:cNvSpPr>
+          <p:nvPr>
+            <p:ph type="sldNum" idx="27"/>
+          </p:nvPr>
+        </p:nvSpPr>
+        <p:spPr/>
+        <p:txBody>
+          <a:bodyPr/>
+          <a:lstStyle/>
+          <a:p>
+            <a:pPr indent="0" algn="r" defTabSz="457200">
+              <a:lnSpc>
+                <a:spcPct val="100000"/>
+              </a:lnSpc>
+              <a:buNone/>
+            </a:pPr>
+            <a:fld id="{E96B40A6-A46F-4A85-AE2F-4CA2D3C05104}" type="slidenum">
+              <a:rPr lang="en-US" sz="1200" b="0" u="none" strike="noStrike" smtClean="0">
+                <a:solidFill>
+                  <a:schemeClr val="dk1">
+                    <a:tint val="75000"/>
+                  </a:schemeClr>
+                </a:solidFill>
+                <a:effectLst/>
+                <a:uFillTx/>
+                <a:latin typeface="Calibri"/>
+              </a:rPr>
+              <a:t>10</a:t>
+            </a:fld>
+            <a:endParaRPr lang="es-ES" sz="1200" b="0" u="none" strike="noStrike">
+              <a:solidFill>
+                <a:srgbClr val="000000"/>
+              </a:solidFill>
+              <a:effectLst/>
+              <a:uFillTx/>
+              <a:latin typeface="Times New Roman"/>
+            </a:endParaRPr>
+          </a:p>
+        </p:txBody>
+      </p:sp>
     </p:spTree>
   </p:cSld>
   <p:clrMapOvr>
@@ -14951,6 +15022,57 @@
           </a:p>
         </p:txBody>
       </p:sp>
+      <p:sp>
+        <p:nvSpPr>
+          <p:cNvPr id="2" name="Marcador de número de diapositiva 1">
+            <a:extLst>
+              <a:ext uri="{FF2B5EF4-FFF2-40B4-BE49-F238E27FC236}">
+                <a16:creationId xmlns:a16="http://schemas.microsoft.com/office/drawing/2014/main" id="{8E873A05-30E9-38A0-3EB6-008FCFD1D8A2}"/>
+              </a:ext>
+            </a:extLst>
+          </p:cNvPr>
+          <p:cNvSpPr>
+            <a:spLocks noGrp="1"/>
+          </p:cNvSpPr>
+          <p:nvPr>
+            <p:ph type="sldNum" idx="27"/>
+          </p:nvPr>
+        </p:nvSpPr>
+        <p:spPr/>
+        <p:txBody>
+          <a:bodyPr/>
+          <a:lstStyle/>
+          <a:p>
+            <a:pPr indent="0" algn="r" defTabSz="457200">
+              <a:lnSpc>
+                <a:spcPct val="100000"/>
+              </a:lnSpc>
+              <a:buNone/>
+            </a:pPr>
+            <a:fld id="{E96B40A6-A46F-4A85-AE2F-4CA2D3C05104}" type="slidenum">
+              <a:rPr lang="en-US" sz="1200" b="0" u="none" strike="noStrike" smtClean="0">
+                <a:solidFill>
+                  <a:schemeClr val="dk1">
+                    <a:tint val="75000"/>
+                  </a:schemeClr>
+                </a:solidFill>
+                <a:effectLst/>
+                <a:uFillTx/>
+                <a:latin typeface="Calibri"/>
+              </a:rPr>
+              <a:t>11</a:t>
+            </a:fld>
+            <a:endParaRPr lang="es-ES" sz="1200" b="0" u="none" strike="noStrike">
+              <a:solidFill>
+                <a:srgbClr val="000000"/>
+              </a:solidFill>
+              <a:effectLst/>
+              <a:uFillTx/>
+              <a:latin typeface="Times New Roman"/>
+            </a:endParaRPr>
+          </a:p>
+        </p:txBody>
+      </p:sp>
     </p:spTree>
   </p:cSld>
   <p:clrMapOvr>
@@ -16597,6 +16719,57 @@
           </a:p>
         </p:txBody>
       </p:sp>
+      <p:sp>
+        <p:nvSpPr>
+          <p:cNvPr id="2" name="Marcador de número de diapositiva 1">
+            <a:extLst>
+              <a:ext uri="{FF2B5EF4-FFF2-40B4-BE49-F238E27FC236}">
+                <a16:creationId xmlns:a16="http://schemas.microsoft.com/office/drawing/2014/main" id="{040AD8AD-47F5-2E7B-E351-066EC3468657}"/>
+              </a:ext>
+            </a:extLst>
+          </p:cNvPr>
+          <p:cNvSpPr>
+            <a:spLocks noGrp="1"/>
+          </p:cNvSpPr>
+          <p:nvPr>
+            <p:ph type="sldNum" idx="27"/>
+          </p:nvPr>
+        </p:nvSpPr>
+        <p:spPr/>
+        <p:txBody>
+          <a:bodyPr/>
+          <a:lstStyle/>
+          <a:p>
+            <a:pPr indent="0" algn="r" defTabSz="457200">
+              <a:lnSpc>
+                <a:spcPct val="100000"/>
+              </a:lnSpc>
+              <a:buNone/>
+            </a:pPr>
+            <a:fld id="{E96B40A6-A46F-4A85-AE2F-4CA2D3C05104}" type="slidenum">
+              <a:rPr lang="en-US" sz="1200" b="0" u="none" strike="noStrike" smtClean="0">
+                <a:solidFill>
+                  <a:schemeClr val="dk1">
+                    <a:tint val="75000"/>
+                  </a:schemeClr>
+                </a:solidFill>
+                <a:effectLst/>
+                <a:uFillTx/>
+                <a:latin typeface="Calibri"/>
+              </a:rPr>
+              <a:t>12</a:t>
+            </a:fld>
+            <a:endParaRPr lang="es-ES" sz="1200" b="0" u="none" strike="noStrike">
+              <a:solidFill>
+                <a:srgbClr val="000000"/>
+              </a:solidFill>
+              <a:effectLst/>
+              <a:uFillTx/>
+              <a:latin typeface="Times New Roman"/>
+            </a:endParaRPr>
+          </a:p>
+        </p:txBody>
+      </p:sp>
     </p:spTree>
   </p:cSld>
   <p:clrMapOvr>
@@ -17456,6 +17629,57 @@
           </a:ln>
         </p:spPr>
       </p:pic>
+      <p:sp>
+        <p:nvSpPr>
+          <p:cNvPr id="2" name="Marcador de número de diapositiva 1">
+            <a:extLst>
+              <a:ext uri="{FF2B5EF4-FFF2-40B4-BE49-F238E27FC236}">
+                <a16:creationId xmlns:a16="http://schemas.microsoft.com/office/drawing/2014/main" id="{3BA24BC2-1A49-E6D4-8F4D-A8E724B337EF}"/>
+              </a:ext>
+            </a:extLst>
+          </p:cNvPr>
+          <p:cNvSpPr>
+            <a:spLocks noGrp="1"/>
+          </p:cNvSpPr>
+          <p:nvPr>
+            <p:ph type="sldNum" idx="27"/>
+          </p:nvPr>
+        </p:nvSpPr>
+        <p:spPr/>
+        <p:txBody>
+          <a:bodyPr/>
+          <a:lstStyle/>
+          <a:p>
+            <a:pPr indent="0" algn="r" defTabSz="457200">
+              <a:lnSpc>
+                <a:spcPct val="100000"/>
+              </a:lnSpc>
+              <a:buNone/>
+            </a:pPr>
+            <a:fld id="{E96B40A6-A46F-4A85-AE2F-4CA2D3C05104}" type="slidenum">
+              <a:rPr lang="en-US" sz="1200" b="0" u="none" strike="noStrike" smtClean="0">
+                <a:solidFill>
+                  <a:schemeClr val="dk1">
+                    <a:tint val="75000"/>
+                  </a:schemeClr>
+                </a:solidFill>
+                <a:effectLst/>
+                <a:uFillTx/>
+                <a:latin typeface="Calibri"/>
+              </a:rPr>
+              <a:t>13</a:t>
+            </a:fld>
+            <a:endParaRPr lang="es-ES" sz="1200" b="0" u="none" strike="noStrike">
+              <a:solidFill>
+                <a:srgbClr val="000000"/>
+              </a:solidFill>
+              <a:effectLst/>
+              <a:uFillTx/>
+              <a:latin typeface="Times New Roman"/>
+            </a:endParaRPr>
+          </a:p>
+        </p:txBody>
+      </p:sp>
     </p:spTree>
   </p:cSld>
   <p:clrMapOvr>
@@ -18387,6 +18611,57 @@
           </a:p>
         </p:txBody>
       </p:sp>
+      <p:sp>
+        <p:nvSpPr>
+          <p:cNvPr id="2" name="Marcador de número de diapositiva 1">
+            <a:extLst>
+              <a:ext uri="{FF2B5EF4-FFF2-40B4-BE49-F238E27FC236}">
+                <a16:creationId xmlns:a16="http://schemas.microsoft.com/office/drawing/2014/main" id="{3CA845D7-E81C-36C8-078C-19BCC07C2224}"/>
+              </a:ext>
+            </a:extLst>
+          </p:cNvPr>
+          <p:cNvSpPr>
+            <a:spLocks noGrp="1"/>
+          </p:cNvSpPr>
+          <p:nvPr>
+            <p:ph type="sldNum" idx="27"/>
+          </p:nvPr>
+        </p:nvSpPr>
+        <p:spPr/>
+        <p:txBody>
+          <a:bodyPr/>
+          <a:lstStyle/>
+          <a:p>
+            <a:pPr indent="0" algn="r" defTabSz="457200">
+              <a:lnSpc>
+                <a:spcPct val="100000"/>
+              </a:lnSpc>
+              <a:buNone/>
+            </a:pPr>
+            <a:fld id="{E96B40A6-A46F-4A85-AE2F-4CA2D3C05104}" type="slidenum">
+              <a:rPr lang="en-US" sz="1200" b="0" u="none" strike="noStrike" smtClean="0">
+                <a:solidFill>
+                  <a:schemeClr val="dk1">
+                    <a:tint val="75000"/>
+                  </a:schemeClr>
+                </a:solidFill>
+                <a:effectLst/>
+                <a:uFillTx/>
+                <a:latin typeface="Calibri"/>
+              </a:rPr>
+              <a:t>14</a:t>
+            </a:fld>
+            <a:endParaRPr lang="es-ES" sz="1200" b="0" u="none" strike="noStrike">
+              <a:solidFill>
+                <a:srgbClr val="000000"/>
+              </a:solidFill>
+              <a:effectLst/>
+              <a:uFillTx/>
+              <a:latin typeface="Times New Roman"/>
+            </a:endParaRPr>
+          </a:p>
+        </p:txBody>
+      </p:sp>
     </p:spTree>
   </p:cSld>
   <p:clrMapOvr>
@@ -18605,7 +18880,7 @@
         </p:nvSpPr>
         <p:spPr>
           <a:xfrm>
-            <a:off x="640080" y="2606040"/>
+            <a:off x="548640" y="1929204"/>
             <a:ext cx="5074560" cy="512064"/>
           </a:xfrm>
           <a:prstGeom prst="roundRect">
@@ -18664,7 +18939,7 @@
         </p:nvSpPr>
         <p:spPr>
           <a:xfrm>
-            <a:off x="822960" y="2606040"/>
+            <a:off x="731520" y="1929204"/>
             <a:ext cx="4708800" cy="512064"/>
           </a:xfrm>
           <a:prstGeom prst="rect">
@@ -18728,7 +19003,7 @@
         </p:nvSpPr>
         <p:spPr>
           <a:xfrm>
-            <a:off x="640080" y="3227832"/>
+            <a:off x="548640" y="2550996"/>
             <a:ext cx="5074560" cy="512064"/>
           </a:xfrm>
           <a:prstGeom prst="roundRect">
@@ -18787,7 +19062,7 @@
         </p:nvSpPr>
         <p:spPr>
           <a:xfrm>
-            <a:off x="822960" y="3227832"/>
+            <a:off x="731520" y="2550996"/>
             <a:ext cx="4708800" cy="512064"/>
           </a:xfrm>
           <a:prstGeom prst="rect">
@@ -18851,7 +19126,7 @@
         </p:nvSpPr>
         <p:spPr>
           <a:xfrm>
-            <a:off x="640080" y="3849624"/>
+            <a:off x="548640" y="3172788"/>
             <a:ext cx="5074560" cy="512064"/>
           </a:xfrm>
           <a:prstGeom prst="roundRect">
@@ -18910,7 +19185,7 @@
         </p:nvSpPr>
         <p:spPr>
           <a:xfrm>
-            <a:off x="822960" y="3849624"/>
+            <a:off x="731520" y="3172788"/>
             <a:ext cx="4708800" cy="512064"/>
           </a:xfrm>
           <a:prstGeom prst="rect">
@@ -18974,7 +19249,7 @@
         </p:nvSpPr>
         <p:spPr>
           <a:xfrm>
-            <a:off x="640080" y="4471416"/>
+            <a:off x="548640" y="3794580"/>
             <a:ext cx="5074560" cy="512064"/>
           </a:xfrm>
           <a:prstGeom prst="roundRect">
@@ -19033,7 +19308,7 @@
         </p:nvSpPr>
         <p:spPr>
           <a:xfrm>
-            <a:off x="822960" y="4471416"/>
+            <a:off x="731520" y="3794580"/>
             <a:ext cx="4708800" cy="512064"/>
           </a:xfrm>
           <a:prstGeom prst="rect">
@@ -19097,7 +19372,7 @@
         </p:nvSpPr>
         <p:spPr>
           <a:xfrm>
-            <a:off x="640080" y="5093208"/>
+            <a:off x="548640" y="4416372"/>
             <a:ext cx="5074560" cy="512064"/>
           </a:xfrm>
           <a:prstGeom prst="roundRect">
@@ -19156,7 +19431,7 @@
         </p:nvSpPr>
         <p:spPr>
           <a:xfrm>
-            <a:off x="822960" y="5093208"/>
+            <a:off x="731520" y="4416372"/>
             <a:ext cx="4708800" cy="512064"/>
           </a:xfrm>
           <a:prstGeom prst="rect">
@@ -19220,7 +19495,7 @@
         </p:nvSpPr>
         <p:spPr>
           <a:xfrm>
-            <a:off x="640080" y="5660136"/>
+            <a:off x="548640" y="4983300"/>
             <a:ext cx="5074560" cy="822960"/>
           </a:xfrm>
           <a:prstGeom prst="rect">
@@ -19302,376 +19577,52 @@
       </p:pic>
       <p:sp>
         <p:nvSpPr>
-          <p:cNvPr id="342" name="Rounded Rectangle 341"/>
-          <p:cNvSpPr/>
-          <p:nvPr/>
-        </p:nvSpPr>
-        <p:spPr>
-          <a:xfrm>
-            <a:off x="640080" y="1783080"/>
-            <a:ext cx="1172718" cy="420624"/>
-          </a:xfrm>
-          <a:prstGeom prst="roundRect">
-            <a:avLst>
-              <a:gd name="adj" fmla="val 50000"/>
-            </a:avLst>
-          </a:prstGeom>
-          <a:solidFill>
-            <a:srgbClr val="E4ECF3"/>
-          </a:solidFill>
-          <a:ln>
-            <a:noFill/>
-          </a:ln>
-          <a:effectLst/>
-        </p:spPr>
-        <p:style>
-          <a:lnRef idx="1">
-            <a:schemeClr val="accent1"/>
-          </a:lnRef>
-          <a:fillRef idx="3">
-            <a:schemeClr val="accent1"/>
-          </a:fillRef>
-          <a:effectRef idx="2">
-            <a:schemeClr val="accent1"/>
-          </a:effectRef>
-          <a:fontRef idx="minor">
-            <a:schemeClr val="lt1"/>
-          </a:fontRef>
-        </p:style>
-        <p:txBody>
-          <a:bodyPr rtlCol="0" anchor="ctr"/>
+          <p:cNvPr id="2" name="Marcador de número de diapositiva 1">
+            <a:extLst>
+              <a:ext uri="{FF2B5EF4-FFF2-40B4-BE49-F238E27FC236}">
+                <a16:creationId xmlns:a16="http://schemas.microsoft.com/office/drawing/2014/main" id="{2CD38987-169C-ED61-2909-17F2D601BE90}"/>
+              </a:ext>
+            </a:extLst>
+          </p:cNvPr>
+          <p:cNvSpPr>
+            <a:spLocks noGrp="1"/>
+          </p:cNvSpPr>
+          <p:nvPr>
+            <p:ph type="sldNum" idx="27"/>
+          </p:nvPr>
+        </p:nvSpPr>
+        <p:spPr/>
+        <p:txBody>
+          <a:bodyPr/>
           <a:lstStyle/>
           <a:p>
-            <a:pPr algn="ctr"/>
-          </a:p>
-        </p:txBody>
-      </p:sp>
-      <p:sp>
-        <p:nvSpPr>
-          <p:cNvPr id="343" name="TextBox 342"/>
-          <p:cNvSpPr txBox="1"/>
-          <p:nvPr/>
-        </p:nvSpPr>
-        <p:spPr>
-          <a:xfrm>
-            <a:off x="640080" y="1783080"/>
-            <a:ext cx="1172718" cy="420624"/>
-          </a:xfrm>
-          <a:prstGeom prst="rect">
-            <a:avLst/>
-          </a:prstGeom>
-          <a:noFill/>
-        </p:spPr>
-        <p:txBody>
-          <a:bodyPr wrap="square" lIns="0" rIns="0" tIns="0" bIns="0" anchor="ctr">
-            <a:spAutoFit/>
-          </a:bodyPr>
-          <a:lstStyle/>
-          <a:p>
-            <a:pPr algn="ctr">
-              <a:lnSpc>
-                <a:spcPct val="95000"/>
-              </a:lnSpc>
-            </a:pPr>
-            <a:r>
-              <a:rPr sz="1000" b="1" i="0">
-                <a:solidFill>
-                  <a:srgbClr val="065A82"/>
-                </a:solidFill>
-                <a:latin typeface="Calibri"/>
-              </a:rPr>
-              <a:t>Leer documento</a:t>
-            </a:r>
-          </a:p>
-        </p:txBody>
-      </p:sp>
-      <p:sp>
-        <p:nvSpPr>
-          <p:cNvPr id="344" name="Rounded Rectangle 343"/>
-          <p:cNvSpPr/>
-          <p:nvPr/>
-        </p:nvSpPr>
-        <p:spPr>
-          <a:xfrm>
-            <a:off x="1940813" y="1783080"/>
-            <a:ext cx="1172718" cy="420624"/>
-          </a:xfrm>
-          <a:prstGeom prst="roundRect">
-            <a:avLst>
-              <a:gd name="adj" fmla="val 50000"/>
-            </a:avLst>
-          </a:prstGeom>
-          <a:solidFill>
-            <a:srgbClr val="E4ECF3"/>
-          </a:solidFill>
-          <a:ln>
-            <a:noFill/>
-          </a:ln>
-          <a:effectLst/>
-        </p:spPr>
-        <p:style>
-          <a:lnRef idx="1">
-            <a:schemeClr val="accent1"/>
-          </a:lnRef>
-          <a:fillRef idx="3">
-            <a:schemeClr val="accent1"/>
-          </a:fillRef>
-          <a:effectRef idx="2">
-            <a:schemeClr val="accent1"/>
-          </a:effectRef>
-          <a:fontRef idx="minor">
-            <a:schemeClr val="lt1"/>
-          </a:fontRef>
-        </p:style>
-        <p:txBody>
-          <a:bodyPr rtlCol="0" anchor="ctr"/>
-          <a:lstStyle/>
-          <a:p>
-            <a:pPr algn="ctr"/>
-          </a:p>
-        </p:txBody>
-      </p:sp>
-      <p:sp>
-        <p:nvSpPr>
-          <p:cNvPr id="345" name="TextBox 344"/>
-          <p:cNvSpPr txBox="1"/>
-          <p:nvPr/>
-        </p:nvSpPr>
-        <p:spPr>
-          <a:xfrm>
-            <a:off x="1940813" y="1783080"/>
-            <a:ext cx="1172718" cy="420624"/>
-          </a:xfrm>
-          <a:prstGeom prst="rect">
-            <a:avLst/>
-          </a:prstGeom>
-          <a:noFill/>
-        </p:spPr>
-        <p:txBody>
-          <a:bodyPr wrap="square" lIns="0" rIns="0" tIns="0" bIns="0" anchor="ctr">
-            <a:spAutoFit/>
-          </a:bodyPr>
-          <a:lstStyle/>
-          <a:p>
-            <a:pPr algn="ctr">
-              <a:lnSpc>
-                <a:spcPct val="95000"/>
-              </a:lnSpc>
-            </a:pPr>
-            <a:r>
-              <a:rPr sz="1000" b="1" i="0">
-                <a:solidFill>
-                  <a:srgbClr val="065A82"/>
-                </a:solidFill>
-                <a:latin typeface="Calibri"/>
-              </a:rPr>
-              <a:t>Validar</a:t>
-            </a:r>
-          </a:p>
-        </p:txBody>
-      </p:sp>
-      <p:sp>
-        <p:nvSpPr>
-          <p:cNvPr id="346" name="Rounded Rectangle 345"/>
-          <p:cNvSpPr/>
-          <p:nvPr/>
-        </p:nvSpPr>
-        <p:spPr>
-          <a:xfrm>
-            <a:off x="3241547" y="1783080"/>
-            <a:ext cx="1172718" cy="420624"/>
-          </a:xfrm>
-          <a:prstGeom prst="roundRect">
-            <a:avLst>
-              <a:gd name="adj" fmla="val 50000"/>
-            </a:avLst>
-          </a:prstGeom>
-          <a:solidFill>
-            <a:srgbClr val="E4ECF3"/>
-          </a:solidFill>
-          <a:ln>
-            <a:noFill/>
-          </a:ln>
-          <a:effectLst/>
-        </p:spPr>
-        <p:style>
-          <a:lnRef idx="1">
-            <a:schemeClr val="accent1"/>
-          </a:lnRef>
-          <a:fillRef idx="3">
-            <a:schemeClr val="accent1"/>
-          </a:fillRef>
-          <a:effectRef idx="2">
-            <a:schemeClr val="accent1"/>
-          </a:effectRef>
-          <a:fontRef idx="minor">
-            <a:schemeClr val="lt1"/>
-          </a:fontRef>
-        </p:style>
-        <p:txBody>
-          <a:bodyPr rtlCol="0" anchor="ctr"/>
-          <a:lstStyle/>
-          <a:p>
-            <a:pPr algn="ctr"/>
-          </a:p>
-        </p:txBody>
-      </p:sp>
-      <p:sp>
-        <p:nvSpPr>
-          <p:cNvPr id="347" name="TextBox 346"/>
-          <p:cNvSpPr txBox="1"/>
-          <p:nvPr/>
-        </p:nvSpPr>
-        <p:spPr>
-          <a:xfrm>
-            <a:off x="3241547" y="1783080"/>
-            <a:ext cx="1172718" cy="420624"/>
-          </a:xfrm>
-          <a:prstGeom prst="rect">
-            <a:avLst/>
-          </a:prstGeom>
-          <a:noFill/>
-        </p:spPr>
-        <p:txBody>
-          <a:bodyPr wrap="square" lIns="0" rIns="0" tIns="0" bIns="0" anchor="ctr">
-            <a:spAutoFit/>
-          </a:bodyPr>
-          <a:lstStyle/>
-          <a:p>
-            <a:pPr algn="ctr">
-              <a:lnSpc>
-                <a:spcPct val="95000"/>
-              </a:lnSpc>
-            </a:pPr>
-            <a:r>
-              <a:rPr sz="1000" b="1" i="0">
-                <a:solidFill>
-                  <a:srgbClr val="065A82"/>
-                </a:solidFill>
-                <a:latin typeface="Calibri"/>
-              </a:rPr>
-              <a:t>Importar XML</a:t>
-            </a:r>
-          </a:p>
-        </p:txBody>
-      </p:sp>
-      <p:sp>
-        <p:nvSpPr>
-          <p:cNvPr id="348" name="Rounded Rectangle 347"/>
-          <p:cNvSpPr/>
-          <p:nvPr/>
-        </p:nvSpPr>
-        <p:spPr>
-          <a:xfrm>
-            <a:off x="4542281" y="1783080"/>
-            <a:ext cx="1172718" cy="420624"/>
-          </a:xfrm>
-          <a:prstGeom prst="roundRect">
-            <a:avLst>
-              <a:gd name="adj" fmla="val 50000"/>
-            </a:avLst>
-          </a:prstGeom>
-          <a:solidFill>
-            <a:srgbClr val="E4ECF3"/>
-          </a:solidFill>
-          <a:ln>
-            <a:noFill/>
-          </a:ln>
-          <a:effectLst/>
-        </p:spPr>
-        <p:style>
-          <a:lnRef idx="1">
-            <a:schemeClr val="accent1"/>
-          </a:lnRef>
-          <a:fillRef idx="3">
-            <a:schemeClr val="accent1"/>
-          </a:fillRef>
-          <a:effectRef idx="2">
-            <a:schemeClr val="accent1"/>
-          </a:effectRef>
-          <a:fontRef idx="minor">
-            <a:schemeClr val="lt1"/>
-          </a:fontRef>
-        </p:style>
-        <p:txBody>
-          <a:bodyPr rtlCol="0" anchor="ctr"/>
-          <a:lstStyle/>
-          <a:p>
-            <a:pPr algn="ctr"/>
-          </a:p>
-        </p:txBody>
-      </p:sp>
-      <p:sp>
-        <p:nvSpPr>
-          <p:cNvPr id="349" name="TextBox 348"/>
-          <p:cNvSpPr txBox="1"/>
-          <p:nvPr/>
-        </p:nvSpPr>
-        <p:spPr>
-          <a:xfrm>
-            <a:off x="4542281" y="1783080"/>
-            <a:ext cx="1172718" cy="420624"/>
-          </a:xfrm>
-          <a:prstGeom prst="rect">
-            <a:avLst/>
-          </a:prstGeom>
-          <a:noFill/>
-        </p:spPr>
-        <p:txBody>
-          <a:bodyPr wrap="square" lIns="0" rIns="0" tIns="0" bIns="0" anchor="ctr">
-            <a:spAutoFit/>
-          </a:bodyPr>
-          <a:lstStyle/>
-          <a:p>
-            <a:pPr algn="ctr">
-              <a:lnSpc>
-                <a:spcPct val="95000"/>
-              </a:lnSpc>
-            </a:pPr>
-            <a:r>
-              <a:rPr sz="1000" b="1" i="0">
-                <a:solidFill>
-                  <a:srgbClr val="065A82"/>
-                </a:solidFill>
-                <a:latin typeface="Calibri"/>
-              </a:rPr>
-              <a:t>Importar PDF</a:t>
-            </a:r>
-          </a:p>
-        </p:txBody>
-      </p:sp>
-      <p:sp>
-        <p:nvSpPr>
-          <p:cNvPr id="350" name="TextBox 349"/>
-          <p:cNvSpPr txBox="1"/>
-          <p:nvPr/>
-        </p:nvSpPr>
-        <p:spPr>
-          <a:xfrm>
-            <a:off x="640080" y="2240280"/>
-            <a:ext cx="5074920" cy="256032"/>
-          </a:xfrm>
-          <a:prstGeom prst="rect">
-            <a:avLst/>
-          </a:prstGeom>
-          <a:noFill/>
-        </p:spPr>
-        <p:txBody>
-          <a:bodyPr wrap="square" lIns="0" rIns="0" tIns="0" bIns="0" anchor="t">
-            <a:spAutoFit/>
-          </a:bodyPr>
-          <a:lstStyle/>
-          <a:p>
-            <a:pPr algn="l"/>
-            <a:r>
-              <a:rPr sz="1000" b="0" i="1">
-                <a:solidFill>
-                  <a:srgbClr val="5B6B7A"/>
-                </a:solidFill>
-                <a:latin typeface="Calibri"/>
-              </a:rPr>
-              <a:t>Cuatro funciones públicas del contrato, un mismo tipo de resultado</a:t>
-            </a:r>
+            <a:pPr indent="0" algn="r" defTabSz="457200">
+              <a:lnSpc>
+                <a:spcPct val="100000"/>
+              </a:lnSpc>
+              <a:buNone/>
+            </a:pPr>
+            <a:fld id="{E96B40A6-A46F-4A85-AE2F-4CA2D3C05104}" type="slidenum">
+              <a:rPr lang="en-US" sz="1200" b="0" u="none" strike="noStrike" smtClean="0">
+                <a:solidFill>
+                  <a:schemeClr val="dk1">
+                    <a:tint val="75000"/>
+                  </a:schemeClr>
+                </a:solidFill>
+                <a:effectLst/>
+                <a:uFillTx/>
+                <a:latin typeface="Calibri"/>
+              </a:rPr>
+              <a:t>15</a:t>
+            </a:fld>
+            <a:endParaRPr lang="es-ES" sz="1200" b="0" u="none" strike="noStrike">
+              <a:solidFill>
+                <a:srgbClr val="000000"/>
+              </a:solidFill>
+              <a:effectLst/>
+              <a:uFillTx/>
+              <a:latin typeface="Times New Roman"/>
+            </a:endParaRPr>
           </a:p>
         </p:txBody>
       </p:sp>
@@ -21418,6 +21369,57 @@
           </a:graphicData>
         </a:graphic>
       </p:graphicFrame>
+      <p:sp>
+        <p:nvSpPr>
+          <p:cNvPr id="2" name="Marcador de número de diapositiva 1">
+            <a:extLst>
+              <a:ext uri="{FF2B5EF4-FFF2-40B4-BE49-F238E27FC236}">
+                <a16:creationId xmlns:a16="http://schemas.microsoft.com/office/drawing/2014/main" id="{F9498F3C-BA21-1205-ED3B-5033D5ADBF74}"/>
+              </a:ext>
+            </a:extLst>
+          </p:cNvPr>
+          <p:cNvSpPr>
+            <a:spLocks noGrp="1"/>
+          </p:cNvSpPr>
+          <p:nvPr>
+            <p:ph type="sldNum" idx="27"/>
+          </p:nvPr>
+        </p:nvSpPr>
+        <p:spPr/>
+        <p:txBody>
+          <a:bodyPr/>
+          <a:lstStyle/>
+          <a:p>
+            <a:pPr indent="0" algn="r" defTabSz="457200">
+              <a:lnSpc>
+                <a:spcPct val="100000"/>
+              </a:lnSpc>
+              <a:buNone/>
+            </a:pPr>
+            <a:fld id="{E96B40A6-A46F-4A85-AE2F-4CA2D3C05104}" type="slidenum">
+              <a:rPr lang="en-US" sz="1200" b="0" u="none" strike="noStrike" smtClean="0">
+                <a:solidFill>
+                  <a:schemeClr val="dk1">
+                    <a:tint val="75000"/>
+                  </a:schemeClr>
+                </a:solidFill>
+                <a:effectLst/>
+                <a:uFillTx/>
+                <a:latin typeface="Calibri"/>
+              </a:rPr>
+              <a:t>16</a:t>
+            </a:fld>
+            <a:endParaRPr lang="es-ES" sz="1200" b="0" u="none" strike="noStrike">
+              <a:solidFill>
+                <a:srgbClr val="000000"/>
+              </a:solidFill>
+              <a:effectLst/>
+              <a:uFillTx/>
+              <a:latin typeface="Times New Roman"/>
+            </a:endParaRPr>
+          </a:p>
+        </p:txBody>
+      </p:sp>
     </p:spTree>
   </p:cSld>
   <p:clrMapOvr>
@@ -22658,6 +22660,57 @@
           </a:p>
         </p:txBody>
       </p:sp>
+      <p:sp>
+        <p:nvSpPr>
+          <p:cNvPr id="2" name="Marcador de número de diapositiva 1">
+            <a:extLst>
+              <a:ext uri="{FF2B5EF4-FFF2-40B4-BE49-F238E27FC236}">
+                <a16:creationId xmlns:a16="http://schemas.microsoft.com/office/drawing/2014/main" id="{137B3929-EBB5-94DF-29BA-7F9F11A5D9A7}"/>
+              </a:ext>
+            </a:extLst>
+          </p:cNvPr>
+          <p:cNvSpPr>
+            <a:spLocks noGrp="1"/>
+          </p:cNvSpPr>
+          <p:nvPr>
+            <p:ph type="sldNum" idx="27"/>
+          </p:nvPr>
+        </p:nvSpPr>
+        <p:spPr/>
+        <p:txBody>
+          <a:bodyPr/>
+          <a:lstStyle/>
+          <a:p>
+            <a:pPr indent="0" algn="r" defTabSz="457200">
+              <a:lnSpc>
+                <a:spcPct val="100000"/>
+              </a:lnSpc>
+              <a:buNone/>
+            </a:pPr>
+            <a:fld id="{E96B40A6-A46F-4A85-AE2F-4CA2D3C05104}" type="slidenum">
+              <a:rPr lang="en-US" sz="1200" b="0" u="none" strike="noStrike" smtClean="0">
+                <a:solidFill>
+                  <a:schemeClr val="dk1">
+                    <a:tint val="75000"/>
+                  </a:schemeClr>
+                </a:solidFill>
+                <a:effectLst/>
+                <a:uFillTx/>
+                <a:latin typeface="Calibri"/>
+              </a:rPr>
+              <a:t>17</a:t>
+            </a:fld>
+            <a:endParaRPr lang="es-ES" sz="1200" b="0" u="none" strike="noStrike">
+              <a:solidFill>
+                <a:srgbClr val="000000"/>
+              </a:solidFill>
+              <a:effectLst/>
+              <a:uFillTx/>
+              <a:latin typeface="Times New Roman"/>
+            </a:endParaRPr>
+          </a:p>
+        </p:txBody>
+      </p:sp>
     </p:spTree>
   </p:cSld>
   <p:clrMapOvr>
@@ -23495,6 +23548,57 @@
               <a:effectLst/>
               <a:uFillTx/>
               <a:latin typeface="Arial"/>
+            </a:endParaRPr>
+          </a:p>
+        </p:txBody>
+      </p:sp>
+      <p:sp>
+        <p:nvSpPr>
+          <p:cNvPr id="2" name="Marcador de número de diapositiva 1">
+            <a:extLst>
+              <a:ext uri="{FF2B5EF4-FFF2-40B4-BE49-F238E27FC236}">
+                <a16:creationId xmlns:a16="http://schemas.microsoft.com/office/drawing/2014/main" id="{B3742CF2-1E6B-6C55-2310-BC94A49D622A}"/>
+              </a:ext>
+            </a:extLst>
+          </p:cNvPr>
+          <p:cNvSpPr>
+            <a:spLocks noGrp="1"/>
+          </p:cNvSpPr>
+          <p:nvPr>
+            <p:ph type="sldNum" idx="27"/>
+          </p:nvPr>
+        </p:nvSpPr>
+        <p:spPr/>
+        <p:txBody>
+          <a:bodyPr/>
+          <a:lstStyle/>
+          <a:p>
+            <a:pPr indent="0" algn="r" defTabSz="457200">
+              <a:lnSpc>
+                <a:spcPct val="100000"/>
+              </a:lnSpc>
+              <a:buNone/>
+            </a:pPr>
+            <a:fld id="{E96B40A6-A46F-4A85-AE2F-4CA2D3C05104}" type="slidenum">
+              <a:rPr lang="en-US" sz="1200" b="0" u="none" strike="noStrike" smtClean="0">
+                <a:solidFill>
+                  <a:schemeClr val="dk1">
+                    <a:tint val="75000"/>
+                  </a:schemeClr>
+                </a:solidFill>
+                <a:effectLst/>
+                <a:uFillTx/>
+                <a:latin typeface="Calibri"/>
+              </a:rPr>
+              <a:t>18</a:t>
+            </a:fld>
+            <a:endParaRPr lang="es-ES" sz="1200" b="0" u="none" strike="noStrike">
+              <a:solidFill>
+                <a:srgbClr val="000000"/>
+              </a:solidFill>
+              <a:effectLst/>
+              <a:uFillTx/>
+              <a:latin typeface="Times New Roman"/>
             </a:endParaRPr>
           </a:p>
         </p:txBody>
@@ -25904,6 +26008,57 @@
           </a:p>
         </p:txBody>
       </p:sp>
+      <p:sp>
+        <p:nvSpPr>
+          <p:cNvPr id="2" name="Marcador de número de diapositiva 1">
+            <a:extLst>
+              <a:ext uri="{FF2B5EF4-FFF2-40B4-BE49-F238E27FC236}">
+                <a16:creationId xmlns:a16="http://schemas.microsoft.com/office/drawing/2014/main" id="{CA516338-34E9-07E8-7454-D9A9386AB681}"/>
+              </a:ext>
+            </a:extLst>
+          </p:cNvPr>
+          <p:cNvSpPr>
+            <a:spLocks noGrp="1"/>
+          </p:cNvSpPr>
+          <p:nvPr>
+            <p:ph type="sldNum" idx="27"/>
+          </p:nvPr>
+        </p:nvSpPr>
+        <p:spPr/>
+        <p:txBody>
+          <a:bodyPr/>
+          <a:lstStyle/>
+          <a:p>
+            <a:pPr indent="0" algn="r" defTabSz="457200">
+              <a:lnSpc>
+                <a:spcPct val="100000"/>
+              </a:lnSpc>
+              <a:buNone/>
+            </a:pPr>
+            <a:fld id="{E96B40A6-A46F-4A85-AE2F-4CA2D3C05104}" type="slidenum">
+              <a:rPr lang="en-US" sz="1200" b="0" u="none" strike="noStrike" smtClean="0">
+                <a:solidFill>
+                  <a:schemeClr val="dk1">
+                    <a:tint val="75000"/>
+                  </a:schemeClr>
+                </a:solidFill>
+                <a:effectLst/>
+                <a:uFillTx/>
+                <a:latin typeface="Calibri"/>
+              </a:rPr>
+              <a:t>19</a:t>
+            </a:fld>
+            <a:endParaRPr lang="es-ES" sz="1200" b="0" u="none" strike="noStrike">
+              <a:solidFill>
+                <a:srgbClr val="000000"/>
+              </a:solidFill>
+              <a:effectLst/>
+              <a:uFillTx/>
+              <a:latin typeface="Times New Roman"/>
+            </a:endParaRPr>
+          </a:p>
+        </p:txBody>
+      </p:sp>
     </p:spTree>
   </p:cSld>
   <p:clrMapOvr>
@@ -27146,6 +27301,57 @@
           </a:p>
         </p:txBody>
       </p:sp>
+      <p:sp>
+        <p:nvSpPr>
+          <p:cNvPr id="2" name="Marcador de número de diapositiva 1">
+            <a:extLst>
+              <a:ext uri="{FF2B5EF4-FFF2-40B4-BE49-F238E27FC236}">
+                <a16:creationId xmlns:a16="http://schemas.microsoft.com/office/drawing/2014/main" id="{700B1A44-5887-77CD-2790-24379F56A30F}"/>
+              </a:ext>
+            </a:extLst>
+          </p:cNvPr>
+          <p:cNvSpPr>
+            <a:spLocks noGrp="1"/>
+          </p:cNvSpPr>
+          <p:nvPr>
+            <p:ph type="sldNum" idx="27"/>
+          </p:nvPr>
+        </p:nvSpPr>
+        <p:spPr/>
+        <p:txBody>
+          <a:bodyPr/>
+          <a:lstStyle/>
+          <a:p>
+            <a:pPr indent="0" algn="r" defTabSz="457200">
+              <a:lnSpc>
+                <a:spcPct val="100000"/>
+              </a:lnSpc>
+              <a:buNone/>
+            </a:pPr>
+            <a:fld id="{E96B40A6-A46F-4A85-AE2F-4CA2D3C05104}" type="slidenum">
+              <a:rPr lang="en-US" sz="1200" b="0" u="none" strike="noStrike" smtClean="0">
+                <a:solidFill>
+                  <a:schemeClr val="dk1">
+                    <a:tint val="75000"/>
+                  </a:schemeClr>
+                </a:solidFill>
+                <a:effectLst/>
+                <a:uFillTx/>
+                <a:latin typeface="Calibri"/>
+              </a:rPr>
+              <a:t>2</a:t>
+            </a:fld>
+            <a:endParaRPr lang="es-ES" sz="1200" b="0" u="none" strike="noStrike">
+              <a:solidFill>
+                <a:srgbClr val="000000"/>
+              </a:solidFill>
+              <a:effectLst/>
+              <a:uFillTx/>
+              <a:latin typeface="Times New Roman"/>
+            </a:endParaRPr>
+          </a:p>
+        </p:txBody>
+      </p:sp>
     </p:spTree>
   </p:cSld>
   <p:clrMapOvr>
@@ -27173,7 +27379,7 @@
       </p:grpSpPr>
       <p:sp>
         <p:nvSpPr>
-          <p:cNvPr id="392" name="Rectangle 1"/>
+          <p:cNvPr id="416" name="Rectangle 1"/>
           <p:cNvSpPr/>
           <p:nvPr/>
         </p:nvSpPr>
@@ -27230,7 +27436,7 @@
       </p:sp>
       <p:sp>
         <p:nvSpPr>
-          <p:cNvPr id="393" name="TextBox 2"/>
+          <p:cNvPr id="417" name="TextBox 2"/>
           <p:cNvSpPr/>
           <p:nvPr/>
         </p:nvSpPr>
@@ -27294,7 +27500,7 @@
       </p:sp>
       <p:sp>
         <p:nvSpPr>
-          <p:cNvPr id="394" name="TextBox 3"/>
+          <p:cNvPr id="418" name="TextBox 3"/>
           <p:cNvSpPr/>
           <p:nvPr/>
         </p:nvSpPr>
@@ -27343,7 +27549,7 @@
                 <a:uFillTx/>
                 <a:latin typeface="Cambria"/>
               </a:rPr>
-              <a:t>Siete contribuciones, demostradas capítulo a capítulo</a:t>
+              <a:t>Conclusión y líneas de trabajo futuro</a:t>
             </a:r>
             <a:endParaRPr lang="es-ES" sz="3000" b="0" u="none" strike="noStrike">
               <a:solidFill>
@@ -27358,22 +27564,22 @@
       </p:sp>
       <p:sp>
         <p:nvSpPr>
-          <p:cNvPr id="395" name="Rounded Rectangle 4"/>
+          <p:cNvPr id="419" name="Rounded Rectangle 4"/>
           <p:cNvSpPr/>
           <p:nvPr/>
         </p:nvSpPr>
         <p:spPr>
           <a:xfrm>
-            <a:off x="640080" y="1874520"/>
-            <a:ext cx="2610360" cy="1691280"/>
+            <a:off x="640080" y="1783080"/>
+            <a:ext cx="5211720" cy="4205880"/>
           </a:xfrm>
           <a:prstGeom prst="roundRect">
             <a:avLst>
-              <a:gd name="adj" fmla="val 10000"/>
+              <a:gd name="adj" fmla="val 9000"/>
             </a:avLst>
           </a:prstGeom>
           <a:solidFill>
-            <a:srgbClr val="F0F4F8"/>
+            <a:srgbClr val="11243A"/>
           </a:solidFill>
           <a:ln>
             <a:noFill/>
@@ -27417,20 +27623,264 @@
       </p:sp>
       <p:sp>
         <p:nvSpPr>
-          <p:cNvPr id="396" name="Oval 5"/>
+          <p:cNvPr id="420" name="TextBox 5"/>
           <p:cNvSpPr/>
           <p:nvPr/>
         </p:nvSpPr>
         <p:spPr>
           <a:xfrm>
-            <a:off x="804600" y="2039040"/>
-            <a:ext cx="438480" cy="438480"/>
-          </a:xfrm>
-          <a:prstGeom prst="ellipse">
-            <a:avLst/>
+            <a:off x="896040" y="2011680"/>
+            <a:ext cx="4708800" cy="365400"/>
+          </a:xfrm>
+          <a:prstGeom prst="rect">
+            <a:avLst/>
+          </a:prstGeom>
+          <a:noFill/>
+          <a:ln w="0">
+            <a:noFill/>
+          </a:ln>
+        </p:spPr>
+        <p:style>
+          <a:lnRef idx="0">
+            <a:scrgbClr r="0" g="0" b="0"/>
+          </a:lnRef>
+          <a:fillRef idx="0">
+            <a:scrgbClr r="0" g="0" b="0"/>
+          </a:fillRef>
+          <a:effectRef idx="0">
+            <a:scrgbClr r="0" g="0" b="0"/>
+          </a:effectRef>
+          <a:fontRef idx="minor"/>
+        </p:style>
+        <p:txBody>
+          <a:bodyPr lIns="0" tIns="0" rIns="0" bIns="0" anchor="t">
+            <a:spAutoFit/>
+          </a:bodyPr>
+          <a:lstStyle/>
+          <a:p>
+            <a:pPr defTabSz="457200">
+              <a:lnSpc>
+                <a:spcPct val="100000"/>
+              </a:lnSpc>
+            </a:pPr>
+            <a:r>
+              <a:rPr lang="en-US" sz="1200" b="1" u="none" strike="noStrike">
+                <a:solidFill>
+                  <a:srgbClr val="E09A3E"/>
+                </a:solidFill>
+                <a:effectLst/>
+                <a:uFillTx/>
+                <a:latin typeface="Calibri"/>
+              </a:rPr>
+              <a:t>CONCLUSIÓN</a:t>
+            </a:r>
+            <a:endParaRPr lang="es-ES" sz="1200" b="0" u="none" strike="noStrike">
+              <a:solidFill>
+                <a:srgbClr val="000000"/>
+              </a:solidFill>
+              <a:effectLst/>
+              <a:uFillTx/>
+              <a:latin typeface="Arial"/>
+            </a:endParaRPr>
+          </a:p>
+        </p:txBody>
+      </p:sp>
+      <p:sp>
+        <p:nvSpPr>
+          <p:cNvPr id="421" name="TextBox 6"/>
+          <p:cNvSpPr/>
+          <p:nvPr/>
+        </p:nvSpPr>
+        <p:spPr>
+          <a:xfrm>
+            <a:off x="896040" y="2423160"/>
+            <a:ext cx="4708800" cy="3291480"/>
+          </a:xfrm>
+          <a:prstGeom prst="rect">
+            <a:avLst/>
+          </a:prstGeom>
+          <a:noFill/>
+          <a:ln w="0">
+            <a:noFill/>
+          </a:ln>
+        </p:spPr>
+        <p:style>
+          <a:lnRef idx="0">
+            <a:scrgbClr r="0" g="0" b="0"/>
+          </a:lnRef>
+          <a:fillRef idx="0">
+            <a:scrgbClr r="0" g="0" b="0"/>
+          </a:fillRef>
+          <a:effectRef idx="0">
+            <a:scrgbClr r="0" g="0" b="0"/>
+          </a:effectRef>
+          <a:fontRef idx="minor"/>
+        </p:style>
+        <p:txBody>
+          <a:bodyPr lIns="0" tIns="0" rIns="0" bIns="0" anchor="t">
+            <a:spAutoFit/>
+          </a:bodyPr>
+          <a:lstStyle/>
+          <a:p>
+            <a:pPr defTabSz="457200">
+              <a:lnSpc>
+                <a:spcPct val="122000"/>
+              </a:lnSpc>
+              <a:spcAft>
+                <a:spcPts val="601"/>
+              </a:spcAft>
+            </a:pPr>
+            <a:r>
+              <a:rPr lang="en-US" sz="1450" b="0" i="1" u="none" strike="noStrike">
+                <a:solidFill>
+                  <a:srgbClr val="E9F1F7"/>
+                </a:solidFill>
+                <a:effectLst/>
+                <a:uFillTx/>
+                <a:latin typeface="Cambria"/>
+              </a:rPr>
+              <a:t>Este trabajo demuestra que es posible construir, a partir de CVN, una arquitectura computacional abierta que separa la interoperabilidad estructural del significado curricular, con trazabilidad verificable y garantías reproducibles allí donde el proceso es determinista.</a:t>
+            </a:r>
+            <a:endParaRPr lang="es-ES" sz="1450" b="0" u="none" strike="noStrike">
+              <a:solidFill>
+                <a:srgbClr val="000000"/>
+              </a:solidFill>
+              <a:effectLst/>
+              <a:uFillTx/>
+              <a:latin typeface="Arial"/>
+            </a:endParaRPr>
+          </a:p>
+          <a:p>
+            <a:pPr defTabSz="457200">
+              <a:lnSpc>
+                <a:spcPct val="122000"/>
+              </a:lnSpc>
+              <a:spcAft>
+                <a:spcPts val="601"/>
+              </a:spcAft>
+            </a:pPr>
+            <a:endParaRPr lang="es-ES" sz="1450" b="0" u="none" strike="noStrike">
+              <a:solidFill>
+                <a:srgbClr val="000000"/>
+              </a:solidFill>
+              <a:effectLst/>
+              <a:uFillTx/>
+              <a:latin typeface="Arial"/>
+            </a:endParaRPr>
+          </a:p>
+          <a:p>
+            <a:pPr defTabSz="457200">
+              <a:lnSpc>
+                <a:spcPct val="122000"/>
+              </a:lnSpc>
+              <a:spcAft>
+                <a:spcPts val="601"/>
+              </a:spcAft>
+            </a:pPr>
+            <a:r>
+              <a:rPr lang="en-US" sz="1450" b="0" i="1" u="none" strike="noStrike">
+                <a:solidFill>
+                  <a:srgbClr val="E9F1F7"/>
+                </a:solidFill>
+                <a:effectLst/>
+                <a:uFillTx/>
+                <a:latin typeface="Cambria"/>
+              </a:rPr>
+              <a:t>Esa arquitectura por capas —más que el formato JSON o la herramienta que la demuestran— es la aportación principal de este Trabajo Fin de Grado.</a:t>
+            </a:r>
+            <a:endParaRPr lang="es-ES" sz="1450" b="0" u="none" strike="noStrike">
+              <a:solidFill>
+                <a:srgbClr val="000000"/>
+              </a:solidFill>
+              <a:effectLst/>
+              <a:uFillTx/>
+              <a:latin typeface="Arial"/>
+            </a:endParaRPr>
+          </a:p>
+        </p:txBody>
+      </p:sp>
+      <p:sp>
+        <p:nvSpPr>
+          <p:cNvPr id="422" name="TextBox 7"/>
+          <p:cNvSpPr/>
+          <p:nvPr/>
+        </p:nvSpPr>
+        <p:spPr>
+          <a:xfrm>
+            <a:off x="6172200" y="1783080"/>
+            <a:ext cx="5348880" cy="319680"/>
+          </a:xfrm>
+          <a:prstGeom prst="rect">
+            <a:avLst/>
+          </a:prstGeom>
+          <a:noFill/>
+          <a:ln w="0">
+            <a:noFill/>
+          </a:ln>
+        </p:spPr>
+        <p:style>
+          <a:lnRef idx="0">
+            <a:scrgbClr r="0" g="0" b="0"/>
+          </a:lnRef>
+          <a:fillRef idx="0">
+            <a:scrgbClr r="0" g="0" b="0"/>
+          </a:fillRef>
+          <a:effectRef idx="0">
+            <a:scrgbClr r="0" g="0" b="0"/>
+          </a:effectRef>
+          <a:fontRef idx="minor"/>
+        </p:style>
+        <p:txBody>
+          <a:bodyPr lIns="0" tIns="0" rIns="0" bIns="0" anchor="t">
+            <a:spAutoFit/>
+          </a:bodyPr>
+          <a:lstStyle/>
+          <a:p>
+            <a:pPr defTabSz="457200">
+              <a:lnSpc>
+                <a:spcPct val="100000"/>
+              </a:lnSpc>
+            </a:pPr>
+            <a:r>
+              <a:rPr lang="en-US" sz="1200" b="1" u="none" strike="noStrike">
+                <a:solidFill>
+                  <a:srgbClr val="1C7293"/>
+                </a:solidFill>
+                <a:effectLst/>
+                <a:uFillTx/>
+                <a:latin typeface="Calibri"/>
+              </a:rPr>
+              <a:t>TRABAJO FUTURO</a:t>
+            </a:r>
+            <a:endParaRPr lang="es-ES" sz="1200" b="0" u="none" strike="noStrike">
+              <a:solidFill>
+                <a:srgbClr val="000000"/>
+              </a:solidFill>
+              <a:effectLst/>
+              <a:uFillTx/>
+              <a:latin typeface="Arial"/>
+            </a:endParaRPr>
+          </a:p>
+        </p:txBody>
+      </p:sp>
+      <p:sp>
+        <p:nvSpPr>
+          <p:cNvPr id="423" name="Rounded Rectangle 8"/>
+          <p:cNvSpPr/>
+          <p:nvPr/>
+        </p:nvSpPr>
+        <p:spPr>
+          <a:xfrm>
+            <a:off x="6172200" y="2167200"/>
+            <a:ext cx="5348880" cy="685440"/>
+          </a:xfrm>
+          <a:prstGeom prst="roundRect">
+            <a:avLst>
+              <a:gd name="adj" fmla="val 14000"/>
+            </a:avLst>
           </a:prstGeom>
           <a:solidFill>
-            <a:srgbClr val="065A82"/>
+            <a:srgbClr val="F0F4F8"/>
           </a:solidFill>
           <a:ln>
             <a:noFill/>
@@ -27456,120 +27906,38 @@
           <a:fontRef idx="minor"/>
         </p:style>
         <p:txBody>
-          <a:bodyPr lIns="18360" tIns="0" rIns="18360" bIns="0" anchor="ctr">
+          <a:bodyPr lIns="90000" tIns="45000" rIns="90000" bIns="45000" anchor="ctr">
             <a:noAutofit/>
           </a:bodyPr>
           <a:lstStyle/>
           <a:p>
-            <a:pPr algn="ctr" defTabSz="457200">
-              <a:lnSpc>
-                <a:spcPct val="100000"/>
-              </a:lnSpc>
-            </a:pPr>
-            <a:r>
-              <a:rPr lang="en-US" sz="1500" b="1" u="none" strike="noStrike">
-                <a:solidFill>
-                  <a:srgbClr val="FFFFFF"/>
-                </a:solidFill>
-                <a:effectLst/>
-                <a:uFillTx/>
-                <a:latin typeface="Calibri"/>
-              </a:rPr>
-              <a:t>1</a:t>
-            </a:r>
-            <a:endParaRPr lang="es-ES" sz="1500" b="0" u="none" strike="noStrike">
-              <a:solidFill>
-                <a:srgbClr val="FFFFFF"/>
-              </a:solidFill>
-              <a:effectLst/>
-              <a:uFillTx/>
-              <a:latin typeface="Arial"/>
-            </a:endParaRPr>
-          </a:p>
-        </p:txBody>
-      </p:sp>
-      <p:sp>
-        <p:nvSpPr>
-          <p:cNvPr id="397" name="TextBox 6"/>
+            <a:endParaRPr lang="en-US" sz="1800" b="0" u="none" strike="noStrike">
+              <a:solidFill>
+                <a:schemeClr val="lt1"/>
+              </a:solidFill>
+              <a:effectLst/>
+              <a:uFillTx/>
+              <a:latin typeface="Calibri"/>
+            </a:endParaRPr>
+          </a:p>
+        </p:txBody>
+      </p:sp>
+      <p:sp>
+        <p:nvSpPr>
+          <p:cNvPr id="424" name="Oval 9"/>
           <p:cNvSpPr/>
           <p:nvPr/>
         </p:nvSpPr>
         <p:spPr>
           <a:xfrm>
-            <a:off x="804600" y="2624400"/>
-            <a:ext cx="2280960" cy="822600"/>
-          </a:xfrm>
-          <a:prstGeom prst="rect">
-            <a:avLst/>
-          </a:prstGeom>
-          <a:noFill/>
-          <a:ln w="0">
-            <a:noFill/>
-          </a:ln>
-        </p:spPr>
-        <p:style>
-          <a:lnRef idx="0">
-            <a:scrgbClr r="0" g="0" b="0"/>
-          </a:lnRef>
-          <a:fillRef idx="0">
-            <a:scrgbClr r="0" g="0" b="0"/>
-          </a:fillRef>
-          <a:effectRef idx="0">
-            <a:scrgbClr r="0" g="0" b="0"/>
-          </a:effectRef>
-          <a:fontRef idx="minor"/>
-        </p:style>
-        <p:txBody>
-          <a:bodyPr lIns="0" tIns="0" rIns="0" bIns="0" anchor="t">
-            <a:spAutoFit/>
-          </a:bodyPr>
-          <a:lstStyle/>
-          <a:p>
-            <a:pPr defTabSz="457200">
-              <a:lnSpc>
-                <a:spcPct val="110000"/>
-              </a:lnSpc>
-            </a:pPr>
-            <a:r>
-              <a:rPr lang="en-US" sz="1250" b="1" u="none" strike="noStrike">
-                <a:solidFill>
-                  <a:srgbClr val="11243A"/>
-                </a:solidFill>
-                <a:effectLst/>
-                <a:uFillTx/>
-                <a:latin typeface="Calibri"/>
-              </a:rPr>
-              <a:t>Análisis computacional del ecosistema CVN</a:t>
-            </a:r>
-            <a:endParaRPr lang="es-ES" sz="1250" b="0" u="none" strike="noStrike">
-              <a:solidFill>
-                <a:srgbClr val="000000"/>
-              </a:solidFill>
-              <a:effectLst/>
-              <a:uFillTx/>
-              <a:latin typeface="Arial"/>
-            </a:endParaRPr>
-          </a:p>
-        </p:txBody>
-      </p:sp>
-      <p:sp>
-        <p:nvSpPr>
-          <p:cNvPr id="398" name="Rounded Rectangle 7"/>
-          <p:cNvSpPr/>
-          <p:nvPr/>
-        </p:nvSpPr>
-        <p:spPr>
-          <a:xfrm>
-            <a:off x="3396960" y="1874520"/>
-            <a:ext cx="2610360" cy="1691280"/>
-          </a:xfrm>
-          <a:prstGeom prst="roundRect">
-            <a:avLst>
-              <a:gd name="adj" fmla="val 10000"/>
-            </a:avLst>
+            <a:off x="6309360" y="2295000"/>
+            <a:ext cx="420120" cy="420120"/>
+          </a:xfrm>
+          <a:prstGeom prst="ellipse">
+            <a:avLst/>
           </a:prstGeom>
           <a:solidFill>
-            <a:srgbClr val="F0F4F8"/>
+            <a:srgbClr val="1C7293"/>
           </a:solidFill>
           <a:ln>
             <a:noFill/>
@@ -27595,38 +27963,120 @@
           <a:fontRef idx="minor"/>
         </p:style>
         <p:txBody>
-          <a:bodyPr lIns="90000" tIns="45000" rIns="90000" bIns="45000" anchor="ctr">
+          <a:bodyPr lIns="18360" tIns="0" rIns="18360" bIns="0" anchor="ctr">
             <a:noAutofit/>
           </a:bodyPr>
           <a:lstStyle/>
           <a:p>
-            <a:endParaRPr lang="en-US" sz="1800" b="0" u="none" strike="noStrike">
-              <a:solidFill>
-                <a:schemeClr val="lt1"/>
-              </a:solidFill>
-              <a:effectLst/>
-              <a:uFillTx/>
-              <a:latin typeface="Calibri"/>
-            </a:endParaRPr>
-          </a:p>
-        </p:txBody>
-      </p:sp>
-      <p:sp>
-        <p:nvSpPr>
-          <p:cNvPr id="399" name="Oval 8"/>
+            <a:pPr algn="ctr" defTabSz="457200">
+              <a:lnSpc>
+                <a:spcPct val="100000"/>
+              </a:lnSpc>
+            </a:pPr>
+            <a:r>
+              <a:rPr lang="en-US" sz="1300" b="1" u="none" strike="noStrike">
+                <a:solidFill>
+                  <a:srgbClr val="FFFFFF"/>
+                </a:solidFill>
+                <a:effectLst/>
+                <a:uFillTx/>
+                <a:latin typeface="Calibri"/>
+              </a:rPr>
+              <a:t>1</a:t>
+            </a:r>
+            <a:endParaRPr lang="es-ES" sz="1300" b="0" u="none" strike="noStrike">
+              <a:solidFill>
+                <a:srgbClr val="FFFFFF"/>
+              </a:solidFill>
+              <a:effectLst/>
+              <a:uFillTx/>
+              <a:latin typeface="Arial"/>
+            </a:endParaRPr>
+          </a:p>
+        </p:txBody>
+      </p:sp>
+      <p:sp>
+        <p:nvSpPr>
+          <p:cNvPr id="425" name="TextBox 10"/>
           <p:cNvSpPr/>
           <p:nvPr/>
         </p:nvSpPr>
         <p:spPr>
           <a:xfrm>
-            <a:off x="3561480" y="2039040"/>
-            <a:ext cx="438480" cy="438480"/>
-          </a:xfrm>
-          <a:prstGeom prst="ellipse">
-            <a:avLst/>
+            <a:off x="6830640" y="2167200"/>
+            <a:ext cx="4525920" cy="685440"/>
+          </a:xfrm>
+          <a:prstGeom prst="rect">
+            <a:avLst/>
+          </a:prstGeom>
+          <a:noFill/>
+          <a:ln w="0">
+            <a:noFill/>
+          </a:ln>
+        </p:spPr>
+        <p:style>
+          <a:lnRef idx="0">
+            <a:scrgbClr r="0" g="0" b="0"/>
+          </a:lnRef>
+          <a:fillRef idx="0">
+            <a:scrgbClr r="0" g="0" b="0"/>
+          </a:fillRef>
+          <a:effectRef idx="0">
+            <a:scrgbClr r="0" g="0" b="0"/>
+          </a:effectRef>
+          <a:fontRef idx="minor"/>
+        </p:style>
+        <p:txBody>
+          <a:bodyPr lIns="0" tIns="0" rIns="0" bIns="0" anchor="ctr">
+            <a:spAutoFit/>
+          </a:bodyPr>
+          <a:lstStyle/>
+          <a:p>
+            <a:pPr defTabSz="457200">
+              <a:lnSpc>
+                <a:spcPct val="105000"/>
+              </a:lnSpc>
+            </a:pPr>
+            <a:r>
+              <a:rPr lang="en-US" sz="1180" b="0" u="none" strike="noStrike">
+                <a:solidFill>
+                  <a:srgbClr val="162230"/>
+                </a:solidFill>
+                <a:effectLst/>
+                <a:uFillTx/>
+                <a:latin typeface="Calibri"/>
+              </a:rPr>
+              <a:t>Completar el mapeo semántico de importación XML con currículos reales</a:t>
+            </a:r>
+            <a:endParaRPr lang="es-ES" sz="1180" b="0" u="none" strike="noStrike">
+              <a:solidFill>
+                <a:srgbClr val="000000"/>
+              </a:solidFill>
+              <a:effectLst/>
+              <a:uFillTx/>
+              <a:latin typeface="Arial"/>
+            </a:endParaRPr>
+          </a:p>
+        </p:txBody>
+      </p:sp>
+      <p:sp>
+        <p:nvSpPr>
+          <p:cNvPr id="429" name="Rounded Rectangle 14"/>
+          <p:cNvSpPr/>
+          <p:nvPr/>
+        </p:nvSpPr>
+        <p:spPr>
+          <a:xfrm>
+            <a:off x="6172200" y="3021840"/>
+            <a:ext cx="5348880" cy="685440"/>
+          </a:xfrm>
+          <a:prstGeom prst="roundRect">
+            <a:avLst>
+              <a:gd name="adj" fmla="val 14000"/>
+            </a:avLst>
           </a:prstGeom>
           <a:solidFill>
-            <a:srgbClr val="065A82"/>
+            <a:srgbClr val="F0F4F8"/>
           </a:solidFill>
           <a:ln>
             <a:noFill/>
@@ -27652,120 +28102,38 @@
           <a:fontRef idx="minor"/>
         </p:style>
         <p:txBody>
-          <a:bodyPr lIns="18360" tIns="0" rIns="18360" bIns="0" anchor="ctr">
+          <a:bodyPr lIns="90000" tIns="45000" rIns="90000" bIns="45000" anchor="ctr">
             <a:noAutofit/>
           </a:bodyPr>
           <a:lstStyle/>
           <a:p>
-            <a:pPr algn="ctr" defTabSz="457200">
-              <a:lnSpc>
-                <a:spcPct val="100000"/>
-              </a:lnSpc>
-            </a:pPr>
-            <a:r>
-              <a:rPr lang="en-US" sz="1500" b="1" u="none" strike="noStrike">
-                <a:solidFill>
-                  <a:srgbClr val="FFFFFF"/>
-                </a:solidFill>
-                <a:effectLst/>
-                <a:uFillTx/>
-                <a:latin typeface="Calibri"/>
-              </a:rPr>
-              <a:t>2</a:t>
-            </a:r>
-            <a:endParaRPr lang="es-ES" sz="1500" b="0" u="none" strike="noStrike">
-              <a:solidFill>
-                <a:srgbClr val="FFFFFF"/>
-              </a:solidFill>
-              <a:effectLst/>
-              <a:uFillTx/>
-              <a:latin typeface="Arial"/>
-            </a:endParaRPr>
-          </a:p>
-        </p:txBody>
-      </p:sp>
-      <p:sp>
-        <p:nvSpPr>
-          <p:cNvPr id="400" name="TextBox 9"/>
+            <a:endParaRPr lang="en-US" sz="1800" b="0" u="none" strike="noStrike">
+              <a:solidFill>
+                <a:schemeClr val="lt1"/>
+              </a:solidFill>
+              <a:effectLst/>
+              <a:uFillTx/>
+              <a:latin typeface="Calibri"/>
+            </a:endParaRPr>
+          </a:p>
+        </p:txBody>
+      </p:sp>
+      <p:sp>
+        <p:nvSpPr>
+          <p:cNvPr id="430" name="Oval 15"/>
           <p:cNvSpPr/>
           <p:nvPr/>
         </p:nvSpPr>
         <p:spPr>
           <a:xfrm>
-            <a:off x="3561480" y="2624400"/>
-            <a:ext cx="2280960" cy="822600"/>
-          </a:xfrm>
-          <a:prstGeom prst="rect">
-            <a:avLst/>
-          </a:prstGeom>
-          <a:noFill/>
-          <a:ln w="0">
-            <a:noFill/>
-          </a:ln>
-        </p:spPr>
-        <p:style>
-          <a:lnRef idx="0">
-            <a:scrgbClr r="0" g="0" b="0"/>
-          </a:lnRef>
-          <a:fillRef idx="0">
-            <a:scrgbClr r="0" g="0" b="0"/>
-          </a:fillRef>
-          <a:effectRef idx="0">
-            <a:scrgbClr r="0" g="0" b="0"/>
-          </a:effectRef>
-          <a:fontRef idx="minor"/>
-        </p:style>
-        <p:txBody>
-          <a:bodyPr lIns="0" tIns="0" rIns="0" bIns="0" anchor="t">
-            <a:spAutoFit/>
-          </a:bodyPr>
-          <a:lstStyle/>
-          <a:p>
-            <a:pPr defTabSz="457200">
-              <a:lnSpc>
-                <a:spcPct val="110000"/>
-              </a:lnSpc>
-            </a:pPr>
-            <a:r>
-              <a:rPr lang="en-US" sz="1250" b="1" u="none" strike="noStrike">
-                <a:solidFill>
-                  <a:srgbClr val="11243A"/>
-                </a:solidFill>
-                <a:effectLst/>
-                <a:uFillTx/>
-                <a:latin typeface="Calibri"/>
-              </a:rPr>
-              <a:t>Arquitectura reproducible por capas</a:t>
-            </a:r>
-            <a:endParaRPr lang="es-ES" sz="1250" b="0" u="none" strike="noStrike">
-              <a:solidFill>
-                <a:srgbClr val="000000"/>
-              </a:solidFill>
-              <a:effectLst/>
-              <a:uFillTx/>
-              <a:latin typeface="Arial"/>
-            </a:endParaRPr>
-          </a:p>
-        </p:txBody>
-      </p:sp>
-      <p:sp>
-        <p:nvSpPr>
-          <p:cNvPr id="401" name="Rounded Rectangle 10"/>
-          <p:cNvSpPr/>
-          <p:nvPr/>
-        </p:nvSpPr>
-        <p:spPr>
-          <a:xfrm>
-            <a:off x="6153840" y="1874520"/>
-            <a:ext cx="2610360" cy="1691280"/>
-          </a:xfrm>
-          <a:prstGeom prst="roundRect">
-            <a:avLst>
-              <a:gd name="adj" fmla="val 10000"/>
-            </a:avLst>
+            <a:off x="6309360" y="3150000"/>
+            <a:ext cx="420120" cy="420120"/>
+          </a:xfrm>
+          <a:prstGeom prst="ellipse">
+            <a:avLst/>
           </a:prstGeom>
           <a:solidFill>
-            <a:srgbClr val="F0F4F8"/>
+            <a:srgbClr val="1C7293"/>
           </a:solidFill>
           <a:ln>
             <a:noFill/>
@@ -27791,38 +28159,118 @@
           <a:fontRef idx="minor"/>
         </p:style>
         <p:txBody>
-          <a:bodyPr lIns="90000" tIns="45000" rIns="90000" bIns="45000" anchor="ctr">
+          <a:bodyPr lIns="18360" tIns="0" rIns="18360" bIns="0" anchor="ctr">
             <a:noAutofit/>
           </a:bodyPr>
           <a:lstStyle/>
           <a:p>
-            <a:endParaRPr lang="en-US" sz="1800" b="0" u="none" strike="noStrike">
-              <a:solidFill>
-                <a:schemeClr val="lt1"/>
-              </a:solidFill>
-              <a:effectLst/>
-              <a:uFillTx/>
-              <a:latin typeface="Calibri"/>
-            </a:endParaRPr>
-          </a:p>
-        </p:txBody>
-      </p:sp>
-      <p:sp>
-        <p:nvSpPr>
-          <p:cNvPr id="402" name="Oval 11"/>
+            <a:pPr algn="ctr" defTabSz="457200">
+              <a:lnSpc>
+                <a:spcPct val="100000"/>
+              </a:lnSpc>
+            </a:pPr>
+            <a:r>
+              <a:rPr lang="en-US" sz="1300" b="1" dirty="0">
+                <a:solidFill>
+                  <a:srgbClr val="FFFFFF"/>
+                </a:solidFill>
+                <a:latin typeface="Calibri"/>
+              </a:rPr>
+              <a:t>2</a:t>
+            </a:r>
+            <a:endParaRPr lang="es-ES" sz="1300" b="0" u="none" strike="noStrike" dirty="0">
+              <a:solidFill>
+                <a:srgbClr val="FFFFFF"/>
+              </a:solidFill>
+              <a:effectLst/>
+              <a:uFillTx/>
+              <a:latin typeface="Arial"/>
+            </a:endParaRPr>
+          </a:p>
+        </p:txBody>
+      </p:sp>
+      <p:sp>
+        <p:nvSpPr>
+          <p:cNvPr id="431" name="TextBox 16"/>
           <p:cNvSpPr/>
           <p:nvPr/>
         </p:nvSpPr>
         <p:spPr>
           <a:xfrm>
-            <a:off x="6318360" y="2039040"/>
-            <a:ext cx="438480" cy="438480"/>
-          </a:xfrm>
-          <a:prstGeom prst="ellipse">
-            <a:avLst/>
+            <a:off x="6830640" y="3021840"/>
+            <a:ext cx="4525920" cy="685440"/>
+          </a:xfrm>
+          <a:prstGeom prst="rect">
+            <a:avLst/>
+          </a:prstGeom>
+          <a:noFill/>
+          <a:ln w="0">
+            <a:noFill/>
+          </a:ln>
+        </p:spPr>
+        <p:style>
+          <a:lnRef idx="0">
+            <a:scrgbClr r="0" g="0" b="0"/>
+          </a:lnRef>
+          <a:fillRef idx="0">
+            <a:scrgbClr r="0" g="0" b="0"/>
+          </a:fillRef>
+          <a:effectRef idx="0">
+            <a:scrgbClr r="0" g="0" b="0"/>
+          </a:effectRef>
+          <a:fontRef idx="minor"/>
+        </p:style>
+        <p:txBody>
+          <a:bodyPr lIns="0" tIns="0" rIns="0" bIns="0" anchor="ctr">
+            <a:spAutoFit/>
+          </a:bodyPr>
+          <a:lstStyle/>
+          <a:p>
+            <a:pPr defTabSz="457200">
+              <a:lnSpc>
+                <a:spcPct val="105000"/>
+              </a:lnSpc>
+            </a:pPr>
+            <a:r>
+              <a:rPr lang="en-US" sz="1180" b="0" u="none" strike="noStrike">
+                <a:solidFill>
+                  <a:srgbClr val="162230"/>
+                </a:solidFill>
+                <a:effectLst/>
+                <a:uFillTx/>
+                <a:latin typeface="Calibri"/>
+              </a:rPr>
+              <a:t>Estudiar restricciones OCL sobre el modelo conceptual</a:t>
+            </a:r>
+            <a:endParaRPr lang="es-ES" sz="1180" b="0" u="none" strike="noStrike">
+              <a:solidFill>
+                <a:srgbClr val="000000"/>
+              </a:solidFill>
+              <a:effectLst/>
+              <a:uFillTx/>
+              <a:latin typeface="Arial"/>
+            </a:endParaRPr>
+          </a:p>
+        </p:txBody>
+      </p:sp>
+      <p:sp>
+        <p:nvSpPr>
+          <p:cNvPr id="432" name="Rounded Rectangle 17"/>
+          <p:cNvSpPr/>
+          <p:nvPr/>
+        </p:nvSpPr>
+        <p:spPr>
+          <a:xfrm>
+            <a:off x="6172200" y="3826440"/>
+            <a:ext cx="5348880" cy="685440"/>
+          </a:xfrm>
+          <a:prstGeom prst="roundRect">
+            <a:avLst>
+              <a:gd name="adj" fmla="val 14000"/>
+            </a:avLst>
           </a:prstGeom>
           <a:solidFill>
-            <a:srgbClr val="065A82"/>
+            <a:srgbClr val="F0F4F8"/>
           </a:solidFill>
           <a:ln>
             <a:noFill/>
@@ -27848,120 +28296,38 @@
           <a:fontRef idx="minor"/>
         </p:style>
         <p:txBody>
-          <a:bodyPr lIns="18360" tIns="0" rIns="18360" bIns="0" anchor="ctr">
+          <a:bodyPr lIns="90000" tIns="45000" rIns="90000" bIns="45000" anchor="ctr">
             <a:noAutofit/>
           </a:bodyPr>
           <a:lstStyle/>
           <a:p>
-            <a:pPr algn="ctr" defTabSz="457200">
-              <a:lnSpc>
-                <a:spcPct val="100000"/>
-              </a:lnSpc>
-            </a:pPr>
-            <a:r>
-              <a:rPr lang="en-US" sz="1500" b="1" u="none" strike="noStrike">
-                <a:solidFill>
-                  <a:srgbClr val="FFFFFF"/>
-                </a:solidFill>
-                <a:effectLst/>
-                <a:uFillTx/>
-                <a:latin typeface="Calibri"/>
-              </a:rPr>
-              <a:t>3</a:t>
-            </a:r>
-            <a:endParaRPr lang="es-ES" sz="1500" b="0" u="none" strike="noStrike">
-              <a:solidFill>
-                <a:srgbClr val="FFFFFF"/>
-              </a:solidFill>
-              <a:effectLst/>
-              <a:uFillTx/>
-              <a:latin typeface="Arial"/>
-            </a:endParaRPr>
-          </a:p>
-        </p:txBody>
-      </p:sp>
-      <p:sp>
-        <p:nvSpPr>
-          <p:cNvPr id="403" name="TextBox 12"/>
+            <a:endParaRPr lang="en-US" sz="1800" b="0" u="none" strike="noStrike">
+              <a:solidFill>
+                <a:schemeClr val="lt1"/>
+              </a:solidFill>
+              <a:effectLst/>
+              <a:uFillTx/>
+              <a:latin typeface="Calibri"/>
+            </a:endParaRPr>
+          </a:p>
+        </p:txBody>
+      </p:sp>
+      <p:sp>
+        <p:nvSpPr>
+          <p:cNvPr id="433" name="Oval 18"/>
           <p:cNvSpPr/>
           <p:nvPr/>
         </p:nvSpPr>
         <p:spPr>
           <a:xfrm>
-            <a:off x="6318360" y="2624400"/>
-            <a:ext cx="2280960" cy="822600"/>
-          </a:xfrm>
-          <a:prstGeom prst="rect">
-            <a:avLst/>
-          </a:prstGeom>
-          <a:noFill/>
-          <a:ln w="0">
-            <a:noFill/>
-          </a:ln>
-        </p:spPr>
-        <p:style>
-          <a:lnRef idx="0">
-            <a:scrgbClr r="0" g="0" b="0"/>
-          </a:lnRef>
-          <a:fillRef idx="0">
-            <a:scrgbClr r="0" g="0" b="0"/>
-          </a:fillRef>
-          <a:effectRef idx="0">
-            <a:scrgbClr r="0" g="0" b="0"/>
-          </a:effectRef>
-          <a:fontRef idx="minor"/>
-        </p:style>
-        <p:txBody>
-          <a:bodyPr lIns="0" tIns="0" rIns="0" bIns="0" anchor="t">
-            <a:spAutoFit/>
-          </a:bodyPr>
-          <a:lstStyle/>
-          <a:p>
-            <a:pPr defTabSz="457200">
-              <a:lnSpc>
-                <a:spcPct val="110000"/>
-              </a:lnSpc>
-            </a:pPr>
-            <a:r>
-              <a:rPr lang="en-US" sz="1250" b="1" u="none" strike="noStrike">
-                <a:solidFill>
-                  <a:srgbClr val="11243A"/>
-                </a:solidFill>
-                <a:effectLst/>
-                <a:uFillTx/>
-                <a:latin typeface="Calibri"/>
-              </a:rPr>
-              <a:t>Trazabilidad entre CVN y Open CVN</a:t>
-            </a:r>
-            <a:endParaRPr lang="es-ES" sz="1250" b="0" u="none" strike="noStrike">
-              <a:solidFill>
-                <a:srgbClr val="000000"/>
-              </a:solidFill>
-              <a:effectLst/>
-              <a:uFillTx/>
-              <a:latin typeface="Arial"/>
-            </a:endParaRPr>
-          </a:p>
-        </p:txBody>
-      </p:sp>
-      <p:sp>
-        <p:nvSpPr>
-          <p:cNvPr id="404" name="Rounded Rectangle 13"/>
-          <p:cNvSpPr/>
-          <p:nvPr/>
-        </p:nvSpPr>
-        <p:spPr>
-          <a:xfrm>
-            <a:off x="8910720" y="1874520"/>
-            <a:ext cx="2610360" cy="1691280"/>
-          </a:xfrm>
-          <a:prstGeom prst="roundRect">
-            <a:avLst>
-              <a:gd name="adj" fmla="val 10000"/>
-            </a:avLst>
+            <a:off x="6309360" y="3954600"/>
+            <a:ext cx="420120" cy="420120"/>
+          </a:xfrm>
+          <a:prstGeom prst="ellipse">
+            <a:avLst/>
           </a:prstGeom>
           <a:solidFill>
-            <a:srgbClr val="F0F4F8"/>
+            <a:srgbClr val="1C7293"/>
           </a:solidFill>
           <a:ln>
             <a:noFill/>
@@ -27987,38 +28353,110 @@
           <a:fontRef idx="minor"/>
         </p:style>
         <p:txBody>
-          <a:bodyPr lIns="90000" tIns="45000" rIns="90000" bIns="45000" anchor="ctr">
+          <a:bodyPr lIns="18360" tIns="0" rIns="18360" bIns="0" anchor="ctr">
             <a:noAutofit/>
           </a:bodyPr>
           <a:lstStyle/>
           <a:p>
-            <a:endParaRPr lang="en-US" sz="1800" b="0" u="none" strike="noStrike">
-              <a:solidFill>
-                <a:schemeClr val="lt1"/>
-              </a:solidFill>
-              <a:effectLst/>
-              <a:uFillTx/>
-              <a:latin typeface="Calibri"/>
-            </a:endParaRPr>
-          </a:p>
-        </p:txBody>
-      </p:sp>
-      <p:sp>
-        <p:nvSpPr>
-          <p:cNvPr id="405" name="Oval 14"/>
+            <a:pPr algn="ctr" defTabSz="457200">
+              <a:lnSpc>
+                <a:spcPct val="100000"/>
+              </a:lnSpc>
+            </a:pPr>
+            <a:r>
+              <a:rPr lang="en-US" sz="1300" b="1" dirty="0">
+                <a:solidFill>
+                  <a:srgbClr val="FFFFFF"/>
+                </a:solidFill>
+                <a:latin typeface="Calibri"/>
+              </a:rPr>
+              <a:t>3</a:t>
+            </a:r>
+          </a:p>
+        </p:txBody>
+      </p:sp>
+      <p:sp>
+        <p:nvSpPr>
+          <p:cNvPr id="434" name="TextBox 19"/>
           <p:cNvSpPr/>
           <p:nvPr/>
         </p:nvSpPr>
         <p:spPr>
           <a:xfrm>
-            <a:off x="9075600" y="2039040"/>
-            <a:ext cx="438480" cy="438480"/>
-          </a:xfrm>
-          <a:prstGeom prst="ellipse">
-            <a:avLst/>
+            <a:off x="6830640" y="3826440"/>
+            <a:ext cx="4525920" cy="685440"/>
+          </a:xfrm>
+          <a:prstGeom prst="rect">
+            <a:avLst/>
+          </a:prstGeom>
+          <a:noFill/>
+          <a:ln w="0">
+            <a:noFill/>
+          </a:ln>
+        </p:spPr>
+        <p:style>
+          <a:lnRef idx="0">
+            <a:scrgbClr r="0" g="0" b="0"/>
+          </a:lnRef>
+          <a:fillRef idx="0">
+            <a:scrgbClr r="0" g="0" b="0"/>
+          </a:fillRef>
+          <a:effectRef idx="0">
+            <a:scrgbClr r="0" g="0" b="0"/>
+          </a:effectRef>
+          <a:fontRef idx="minor"/>
+        </p:style>
+        <p:txBody>
+          <a:bodyPr lIns="0" tIns="0" rIns="0" bIns="0" anchor="ctr">
+            <a:spAutoFit/>
+          </a:bodyPr>
+          <a:lstStyle/>
+          <a:p>
+            <a:pPr defTabSz="457200">
+              <a:lnSpc>
+                <a:spcPct val="105000"/>
+              </a:lnSpc>
+            </a:pPr>
+            <a:r>
+              <a:rPr lang="en-US" sz="1180" b="0" u="none" strike="noStrike">
+                <a:solidFill>
+                  <a:srgbClr val="162230"/>
+                </a:solidFill>
+                <a:effectLst/>
+                <a:uFillTx/>
+                <a:latin typeface="Calibri"/>
+              </a:rPr>
+              <a:t>Reducir la dependencia de un motor LaTeX en la generación de PDF</a:t>
+            </a:r>
+            <a:endParaRPr lang="es-ES" sz="1180" b="0" u="none" strike="noStrike">
+              <a:solidFill>
+                <a:srgbClr val="000000"/>
+              </a:solidFill>
+              <a:effectLst/>
+              <a:uFillTx/>
+              <a:latin typeface="Arial"/>
+            </a:endParaRPr>
+          </a:p>
+        </p:txBody>
+      </p:sp>
+      <p:sp>
+        <p:nvSpPr>
+          <p:cNvPr id="435" name="Rounded Rectangle 20"/>
+          <p:cNvSpPr/>
+          <p:nvPr/>
+        </p:nvSpPr>
+        <p:spPr>
+          <a:xfrm>
+            <a:off x="6172200" y="4631400"/>
+            <a:ext cx="5348880" cy="685440"/>
+          </a:xfrm>
+          <a:prstGeom prst="roundRect">
+            <a:avLst>
+              <a:gd name="adj" fmla="val 14000"/>
+            </a:avLst>
           </a:prstGeom>
           <a:solidFill>
-            <a:srgbClr val="065A82"/>
+            <a:srgbClr val="F0F4F8"/>
           </a:solidFill>
           <a:ln>
             <a:noFill/>
@@ -28044,120 +28482,38 @@
           <a:fontRef idx="minor"/>
         </p:style>
         <p:txBody>
-          <a:bodyPr lIns="18360" tIns="0" rIns="18360" bIns="0" anchor="ctr">
+          <a:bodyPr lIns="90000" tIns="45000" rIns="90000" bIns="45000" anchor="ctr">
             <a:noAutofit/>
           </a:bodyPr>
           <a:lstStyle/>
           <a:p>
-            <a:pPr algn="ctr" defTabSz="457200">
-              <a:lnSpc>
-                <a:spcPct val="100000"/>
-              </a:lnSpc>
-            </a:pPr>
-            <a:r>
-              <a:rPr lang="en-US" sz="1500" b="1" u="none" strike="noStrike">
-                <a:solidFill>
-                  <a:srgbClr val="FFFFFF"/>
-                </a:solidFill>
-                <a:effectLst/>
-                <a:uFillTx/>
-                <a:latin typeface="Calibri"/>
-              </a:rPr>
-              <a:t>4</a:t>
-            </a:r>
-            <a:endParaRPr lang="es-ES" sz="1500" b="0" u="none" strike="noStrike">
-              <a:solidFill>
-                <a:srgbClr val="FFFFFF"/>
-              </a:solidFill>
-              <a:effectLst/>
-              <a:uFillTx/>
-              <a:latin typeface="Arial"/>
-            </a:endParaRPr>
-          </a:p>
-        </p:txBody>
-      </p:sp>
-      <p:sp>
-        <p:nvSpPr>
-          <p:cNvPr id="406" name="TextBox 15"/>
+            <a:endParaRPr lang="en-US" sz="1800" b="0" u="none" strike="noStrike">
+              <a:solidFill>
+                <a:schemeClr val="lt1"/>
+              </a:solidFill>
+              <a:effectLst/>
+              <a:uFillTx/>
+              <a:latin typeface="Calibri"/>
+            </a:endParaRPr>
+          </a:p>
+        </p:txBody>
+      </p:sp>
+      <p:sp>
+        <p:nvSpPr>
+          <p:cNvPr id="436" name="Oval 21"/>
           <p:cNvSpPr/>
           <p:nvPr/>
         </p:nvSpPr>
         <p:spPr>
           <a:xfrm>
-            <a:off x="9075600" y="2624400"/>
-            <a:ext cx="2280960" cy="822600"/>
-          </a:xfrm>
-          <a:prstGeom prst="rect">
-            <a:avLst/>
-          </a:prstGeom>
-          <a:noFill/>
-          <a:ln w="0">
-            <a:noFill/>
-          </a:ln>
-        </p:spPr>
-        <p:style>
-          <a:lnRef idx="0">
-            <a:scrgbClr r="0" g="0" b="0"/>
-          </a:lnRef>
-          <a:fillRef idx="0">
-            <a:scrgbClr r="0" g="0" b="0"/>
-          </a:fillRef>
-          <a:effectRef idx="0">
-            <a:scrgbClr r="0" g="0" b="0"/>
-          </a:effectRef>
-          <a:fontRef idx="minor"/>
-        </p:style>
-        <p:txBody>
-          <a:bodyPr lIns="0" tIns="0" rIns="0" bIns="0" anchor="t">
-            <a:spAutoFit/>
-          </a:bodyPr>
-          <a:lstStyle/>
-          <a:p>
-            <a:pPr defTabSz="457200">
-              <a:lnSpc>
-                <a:spcPct val="110000"/>
-              </a:lnSpc>
-            </a:pPr>
-            <a:r>
-              <a:rPr lang="en-US" sz="1250" b="1" u="none" strike="noStrike">
-                <a:solidFill>
-                  <a:srgbClr val="11243A"/>
-                </a:solidFill>
-                <a:effectLst/>
-                <a:uFillTx/>
-                <a:latin typeface="Calibri"/>
-              </a:rPr>
-              <a:t>Formato Open CVN JSON</a:t>
-            </a:r>
-            <a:endParaRPr lang="es-ES" sz="1250" b="0" u="none" strike="noStrike">
-              <a:solidFill>
-                <a:srgbClr val="000000"/>
-              </a:solidFill>
-              <a:effectLst/>
-              <a:uFillTx/>
-              <a:latin typeface="Arial"/>
-            </a:endParaRPr>
-          </a:p>
-        </p:txBody>
-      </p:sp>
-      <p:sp>
-        <p:nvSpPr>
-          <p:cNvPr id="407" name="Rounded Rectangle 16"/>
-          <p:cNvSpPr/>
-          <p:nvPr/>
-        </p:nvSpPr>
-        <p:spPr>
-          <a:xfrm>
-            <a:off x="2018520" y="3749040"/>
-            <a:ext cx="2610360" cy="1691280"/>
-          </a:xfrm>
-          <a:prstGeom prst="roundRect">
-            <a:avLst>
-              <a:gd name="adj" fmla="val 10000"/>
-            </a:avLst>
+            <a:off x="6309360" y="4759200"/>
+            <a:ext cx="420120" cy="420120"/>
+          </a:xfrm>
+          <a:prstGeom prst="ellipse">
+            <a:avLst/>
           </a:prstGeom>
           <a:solidFill>
-            <a:srgbClr val="F0F4F8"/>
+            <a:srgbClr val="1C7293"/>
           </a:solidFill>
           <a:ln>
             <a:noFill/>
@@ -28183,547 +28539,147 @@
           <a:fontRef idx="minor"/>
         </p:style>
         <p:txBody>
-          <a:bodyPr lIns="90000" tIns="45000" rIns="90000" bIns="45000" anchor="ctr">
+          <a:bodyPr lIns="18360" tIns="0" rIns="18360" bIns="0" anchor="ctr">
             <a:noAutofit/>
           </a:bodyPr>
           <a:lstStyle/>
           <a:p>
-            <a:endParaRPr lang="en-US" sz="1800" b="0" u="none" strike="noStrike">
-              <a:solidFill>
-                <a:schemeClr val="lt1"/>
-              </a:solidFill>
-              <a:effectLst/>
-              <a:uFillTx/>
-              <a:latin typeface="Calibri"/>
-            </a:endParaRPr>
-          </a:p>
-        </p:txBody>
-      </p:sp>
-      <p:sp>
-        <p:nvSpPr>
-          <p:cNvPr id="408" name="Oval 17"/>
+            <a:pPr algn="ctr" defTabSz="457200">
+              <a:lnSpc>
+                <a:spcPct val="100000"/>
+              </a:lnSpc>
+            </a:pPr>
+            <a:r>
+              <a:rPr lang="en-US" sz="1300" b="1" dirty="0">
+                <a:solidFill>
+                  <a:srgbClr val="FFFFFF"/>
+                </a:solidFill>
+                <a:latin typeface="Calibri"/>
+              </a:rPr>
+              <a:t>4</a:t>
+            </a:r>
+            <a:endParaRPr lang="es-ES" sz="1300" b="0" u="none" strike="noStrike" dirty="0">
+              <a:solidFill>
+                <a:srgbClr val="FFFFFF"/>
+              </a:solidFill>
+              <a:effectLst/>
+              <a:uFillTx/>
+              <a:latin typeface="Arial"/>
+            </a:endParaRPr>
+          </a:p>
+        </p:txBody>
+      </p:sp>
+      <p:sp>
+        <p:nvSpPr>
+          <p:cNvPr id="437" name="TextBox 22"/>
           <p:cNvSpPr/>
           <p:nvPr/>
         </p:nvSpPr>
         <p:spPr>
           <a:xfrm>
-            <a:off x="2183040" y="3913560"/>
-            <a:ext cx="438480" cy="438480"/>
-          </a:xfrm>
-          <a:prstGeom prst="ellipse">
-            <a:avLst/>
-          </a:prstGeom>
-          <a:solidFill>
-            <a:srgbClr val="1C7293"/>
-          </a:solidFill>
-          <a:ln>
-            <a:noFill/>
-          </a:ln>
-          <a:effectLst>
-            <a:outerShdw blurRad="39960" dist="23040" dir="5400000" rotWithShape="0">
-              <a:srgbClr val="000000">
-                <a:alpha val="35000"/>
-              </a:srgbClr>
-            </a:outerShdw>
-          </a:effectLst>
+            <a:off x="6830640" y="4631400"/>
+            <a:ext cx="4525920" cy="685440"/>
+          </a:xfrm>
+          <a:prstGeom prst="rect">
+            <a:avLst/>
+          </a:prstGeom>
+          <a:noFill/>
+          <a:ln w="0">
+            <a:noFill/>
+          </a:ln>
         </p:spPr>
         <p:style>
-          <a:lnRef idx="1">
-            <a:schemeClr val="accent1"/>
+          <a:lnRef idx="0">
+            <a:scrgbClr r="0" g="0" b="0"/>
           </a:lnRef>
-          <a:fillRef idx="3">
-            <a:schemeClr val="accent1"/>
+          <a:fillRef idx="0">
+            <a:scrgbClr r="0" g="0" b="0"/>
           </a:fillRef>
-          <a:effectRef idx="2">
-            <a:schemeClr val="accent1"/>
+          <a:effectRef idx="0">
+            <a:scrgbClr r="0" g="0" b="0"/>
           </a:effectRef>
           <a:fontRef idx="minor"/>
         </p:style>
         <p:txBody>
-          <a:bodyPr lIns="18360" tIns="0" rIns="18360" bIns="0" anchor="ctr">
-            <a:noAutofit/>
+          <a:bodyPr lIns="0" tIns="0" rIns="0" bIns="0" anchor="ctr">
+            <a:spAutoFit/>
           </a:bodyPr>
           <a:lstStyle/>
           <a:p>
-            <a:pPr algn="ctr" defTabSz="457200">
+            <a:pPr defTabSz="457200">
+              <a:lnSpc>
+                <a:spcPct val="105000"/>
+              </a:lnSpc>
+            </a:pPr>
+            <a:r>
+              <a:rPr lang="en-US" sz="1180" b="0" u="none" strike="noStrike">
+                <a:solidFill>
+                  <a:srgbClr val="162230"/>
+                </a:solidFill>
+                <a:effectLst/>
+                <a:uFillTx/>
+                <a:latin typeface="Calibri"/>
+              </a:rPr>
+              <a:t>Explorar extensiones semánticas (JSON-LD) e integración institucional</a:t>
+            </a:r>
+            <a:endParaRPr lang="es-ES" sz="1180" b="0" u="none" strike="noStrike">
+              <a:solidFill>
+                <a:srgbClr val="000000"/>
+              </a:solidFill>
+              <a:effectLst/>
+              <a:uFillTx/>
+              <a:latin typeface="Arial"/>
+            </a:endParaRPr>
+          </a:p>
+        </p:txBody>
+      </p:sp>
+      <p:sp>
+        <p:nvSpPr>
+          <p:cNvPr id="2" name="Marcador de número de diapositiva 1">
+            <a:extLst>
+              <a:ext uri="{FF2B5EF4-FFF2-40B4-BE49-F238E27FC236}">
+                <a16:creationId xmlns:a16="http://schemas.microsoft.com/office/drawing/2014/main" id="{96C3D7CA-E077-7846-E03D-B12B2C524C77}"/>
+              </a:ext>
+            </a:extLst>
+          </p:cNvPr>
+          <p:cNvSpPr>
+            <a:spLocks noGrp="1"/>
+          </p:cNvSpPr>
+          <p:nvPr>
+            <p:ph type="sldNum" idx="27"/>
+          </p:nvPr>
+        </p:nvSpPr>
+        <p:spPr/>
+        <p:txBody>
+          <a:bodyPr/>
+          <a:lstStyle/>
+          <a:p>
+            <a:pPr indent="0" algn="r" defTabSz="457200">
               <a:lnSpc>
                 <a:spcPct val="100000"/>
               </a:lnSpc>
-            </a:pPr>
-            <a:r>
-              <a:rPr lang="en-US" sz="1500" b="1" u="none" strike="noStrike">
-                <a:solidFill>
-                  <a:srgbClr val="FFFFFF"/>
-                </a:solidFill>
-                <a:effectLst/>
-                <a:uFillTx/>
-                <a:latin typeface="Calibri"/>
-              </a:rPr>
-              <a:t>5</a:t>
-            </a:r>
-            <a:endParaRPr lang="es-ES" sz="1500" b="0" u="none" strike="noStrike">
-              <a:solidFill>
-                <a:srgbClr val="FFFFFF"/>
-              </a:solidFill>
-              <a:effectLst/>
-              <a:uFillTx/>
-              <a:latin typeface="Arial"/>
-            </a:endParaRPr>
-          </a:p>
-        </p:txBody>
-      </p:sp>
-      <p:sp>
-        <p:nvSpPr>
-          <p:cNvPr id="409" name="TextBox 18"/>
-          <p:cNvSpPr/>
-          <p:nvPr/>
-        </p:nvSpPr>
-        <p:spPr>
-          <a:xfrm>
-            <a:off x="2183040" y="4498920"/>
-            <a:ext cx="2280960" cy="822600"/>
-          </a:xfrm>
-          <a:prstGeom prst="rect">
-            <a:avLst/>
-          </a:prstGeom>
-          <a:noFill/>
-          <a:ln w="0">
-            <a:noFill/>
-          </a:ln>
-        </p:spPr>
-        <p:style>
-          <a:lnRef idx="0">
-            <a:scrgbClr r="0" g="0" b="0"/>
-          </a:lnRef>
-          <a:fillRef idx="0">
-            <a:scrgbClr r="0" g="0" b="0"/>
-          </a:fillRef>
-          <a:effectRef idx="0">
-            <a:scrgbClr r="0" g="0" b="0"/>
-          </a:effectRef>
-          <a:fontRef idx="minor"/>
-        </p:style>
-        <p:txBody>
-          <a:bodyPr lIns="0" tIns="0" rIns="0" bIns="0" anchor="t">
-            <a:spAutoFit/>
-          </a:bodyPr>
-          <a:lstStyle/>
-          <a:p>
-            <a:pPr defTabSz="457200">
-              <a:lnSpc>
-                <a:spcPct val="110000"/>
-              </a:lnSpc>
-            </a:pPr>
-            <a:r>
-              <a:rPr lang="en-US" sz="1250" b="1" u="none" strike="noStrike">
-                <a:solidFill>
-                  <a:srgbClr val="11243A"/>
-                </a:solidFill>
-                <a:effectLst/>
-                <a:uFillTx/>
-                <a:latin typeface="Calibri"/>
-              </a:rPr>
-              <a:t>Herramientas de validación y uso</a:t>
-            </a:r>
-            <a:endParaRPr lang="es-ES" sz="1250" b="0" u="none" strike="noStrike">
-              <a:solidFill>
-                <a:srgbClr val="000000"/>
-              </a:solidFill>
-              <a:effectLst/>
-              <a:uFillTx/>
-              <a:latin typeface="Arial"/>
-            </a:endParaRPr>
-          </a:p>
-        </p:txBody>
-      </p:sp>
-      <p:sp>
-        <p:nvSpPr>
-          <p:cNvPr id="410" name="Rounded Rectangle 19"/>
-          <p:cNvSpPr/>
-          <p:nvPr/>
-        </p:nvSpPr>
-        <p:spPr>
-          <a:xfrm>
-            <a:off x="4775400" y="3749040"/>
-            <a:ext cx="2610360" cy="1691280"/>
-          </a:xfrm>
-          <a:prstGeom prst="roundRect">
-            <a:avLst>
-              <a:gd name="adj" fmla="val 10000"/>
-            </a:avLst>
-          </a:prstGeom>
-          <a:solidFill>
-            <a:srgbClr val="F0F4F8"/>
-          </a:solidFill>
-          <a:ln>
-            <a:noFill/>
-          </a:ln>
-          <a:effectLst>
-            <a:outerShdw blurRad="39960" dist="23040" dir="5400000" rotWithShape="0">
-              <a:srgbClr val="000000">
-                <a:alpha val="35000"/>
-              </a:srgbClr>
-            </a:outerShdw>
-          </a:effectLst>
-        </p:spPr>
-        <p:style>
-          <a:lnRef idx="1">
-            <a:schemeClr val="accent1"/>
-          </a:lnRef>
-          <a:fillRef idx="3">
-            <a:schemeClr val="accent1"/>
-          </a:fillRef>
-          <a:effectRef idx="2">
-            <a:schemeClr val="accent1"/>
-          </a:effectRef>
-          <a:fontRef idx="minor"/>
-        </p:style>
-        <p:txBody>
-          <a:bodyPr lIns="90000" tIns="45000" rIns="90000" bIns="45000" anchor="ctr">
-            <a:noAutofit/>
-          </a:bodyPr>
-          <a:lstStyle/>
-          <a:p>
-            <a:endParaRPr lang="en-US" sz="1800" b="0" u="none" strike="noStrike">
-              <a:solidFill>
-                <a:schemeClr val="lt1"/>
-              </a:solidFill>
-              <a:effectLst/>
-              <a:uFillTx/>
-              <a:latin typeface="Calibri"/>
-            </a:endParaRPr>
-          </a:p>
-        </p:txBody>
-      </p:sp>
-      <p:sp>
-        <p:nvSpPr>
-          <p:cNvPr id="411" name="Oval 20"/>
-          <p:cNvSpPr/>
-          <p:nvPr/>
-        </p:nvSpPr>
-        <p:spPr>
-          <a:xfrm>
-            <a:off x="4939920" y="3913560"/>
-            <a:ext cx="438480" cy="438480"/>
-          </a:xfrm>
-          <a:prstGeom prst="ellipse">
-            <a:avLst/>
-          </a:prstGeom>
-          <a:solidFill>
-            <a:srgbClr val="1C7293"/>
-          </a:solidFill>
-          <a:ln>
-            <a:noFill/>
-          </a:ln>
-          <a:effectLst>
-            <a:outerShdw blurRad="39960" dist="23040" dir="5400000" rotWithShape="0">
-              <a:srgbClr val="000000">
-                <a:alpha val="35000"/>
-              </a:srgbClr>
-            </a:outerShdw>
-          </a:effectLst>
-        </p:spPr>
-        <p:style>
-          <a:lnRef idx="1">
-            <a:schemeClr val="accent1"/>
-          </a:lnRef>
-          <a:fillRef idx="3">
-            <a:schemeClr val="accent1"/>
-          </a:fillRef>
-          <a:effectRef idx="2">
-            <a:schemeClr val="accent1"/>
-          </a:effectRef>
-          <a:fontRef idx="minor"/>
-        </p:style>
-        <p:txBody>
-          <a:bodyPr lIns="18360" tIns="0" rIns="18360" bIns="0" anchor="ctr">
-            <a:noAutofit/>
-          </a:bodyPr>
-          <a:lstStyle/>
-          <a:p>
-            <a:pPr algn="ctr" defTabSz="457200">
-              <a:lnSpc>
-                <a:spcPct val="100000"/>
-              </a:lnSpc>
-            </a:pPr>
-            <a:r>
-              <a:rPr lang="en-US" sz="1500" b="1" u="none" strike="noStrike">
-                <a:solidFill>
-                  <a:srgbClr val="FFFFFF"/>
-                </a:solidFill>
-                <a:effectLst/>
-                <a:uFillTx/>
-                <a:latin typeface="Calibri"/>
-              </a:rPr>
-              <a:t>6</a:t>
-            </a:r>
-            <a:endParaRPr lang="es-ES" sz="1500" b="0" u="none" strike="noStrike">
-              <a:solidFill>
-                <a:srgbClr val="FFFFFF"/>
-              </a:solidFill>
-              <a:effectLst/>
-              <a:uFillTx/>
-              <a:latin typeface="Arial"/>
-            </a:endParaRPr>
-          </a:p>
-        </p:txBody>
-      </p:sp>
-      <p:sp>
-        <p:nvSpPr>
-          <p:cNvPr id="412" name="TextBox 21"/>
-          <p:cNvSpPr/>
-          <p:nvPr/>
-        </p:nvSpPr>
-        <p:spPr>
-          <a:xfrm>
-            <a:off x="4939920" y="4498920"/>
-            <a:ext cx="2280960" cy="822600"/>
-          </a:xfrm>
-          <a:prstGeom prst="rect">
-            <a:avLst/>
-          </a:prstGeom>
-          <a:noFill/>
-          <a:ln w="0">
-            <a:noFill/>
-          </a:ln>
-        </p:spPr>
-        <p:style>
-          <a:lnRef idx="0">
-            <a:scrgbClr r="0" g="0" b="0"/>
-          </a:lnRef>
-          <a:fillRef idx="0">
-            <a:scrgbClr r="0" g="0" b="0"/>
-          </a:fillRef>
-          <a:effectRef idx="0">
-            <a:scrgbClr r="0" g="0" b="0"/>
-          </a:effectRef>
-          <a:fontRef idx="minor"/>
-        </p:style>
-        <p:txBody>
-          <a:bodyPr lIns="0" tIns="0" rIns="0" bIns="0" anchor="t">
-            <a:spAutoFit/>
-          </a:bodyPr>
-          <a:lstStyle/>
-          <a:p>
-            <a:pPr defTabSz="457200">
-              <a:lnSpc>
-                <a:spcPct val="110000"/>
-              </a:lnSpc>
-            </a:pPr>
-            <a:r>
-              <a:rPr lang="en-US" sz="1250" b="1" u="none" strike="noStrike">
-                <a:solidFill>
-                  <a:srgbClr val="11243A"/>
-                </a:solidFill>
-                <a:effectLst/>
-                <a:uFillTx/>
-                <a:latin typeface="Calibri"/>
-              </a:rPr>
-              <a:t>Importación determinista y asistida por LLM</a:t>
-            </a:r>
-            <a:endParaRPr lang="es-ES" sz="1250" b="0" u="none" strike="noStrike">
-              <a:solidFill>
-                <a:srgbClr val="000000"/>
-              </a:solidFill>
-              <a:effectLst/>
-              <a:uFillTx/>
-              <a:latin typeface="Arial"/>
-            </a:endParaRPr>
-          </a:p>
-        </p:txBody>
-      </p:sp>
-      <p:sp>
-        <p:nvSpPr>
-          <p:cNvPr id="413" name="Rounded Rectangle 22"/>
-          <p:cNvSpPr/>
-          <p:nvPr/>
-        </p:nvSpPr>
-        <p:spPr>
-          <a:xfrm>
-            <a:off x="7532280" y="3749040"/>
-            <a:ext cx="2610360" cy="1691280"/>
-          </a:xfrm>
-          <a:prstGeom prst="roundRect">
-            <a:avLst>
-              <a:gd name="adj" fmla="val 10000"/>
-            </a:avLst>
-          </a:prstGeom>
-          <a:solidFill>
-            <a:srgbClr val="F0F4F8"/>
-          </a:solidFill>
-          <a:ln>
-            <a:noFill/>
-          </a:ln>
-          <a:effectLst>
-            <a:outerShdw blurRad="39960" dist="23040" dir="5400000" rotWithShape="0">
-              <a:srgbClr val="000000">
-                <a:alpha val="35000"/>
-              </a:srgbClr>
-            </a:outerShdw>
-          </a:effectLst>
-        </p:spPr>
-        <p:style>
-          <a:lnRef idx="1">
-            <a:schemeClr val="accent1"/>
-          </a:lnRef>
-          <a:fillRef idx="3">
-            <a:schemeClr val="accent1"/>
-          </a:fillRef>
-          <a:effectRef idx="2">
-            <a:schemeClr val="accent1"/>
-          </a:effectRef>
-          <a:fontRef idx="minor"/>
-        </p:style>
-        <p:txBody>
-          <a:bodyPr lIns="90000" tIns="45000" rIns="90000" bIns="45000" anchor="ctr">
-            <a:noAutofit/>
-          </a:bodyPr>
-          <a:lstStyle/>
-          <a:p>
-            <a:endParaRPr lang="en-US" sz="1800" b="0" u="none" strike="noStrike">
-              <a:solidFill>
-                <a:schemeClr val="lt1"/>
-              </a:solidFill>
-              <a:effectLst/>
-              <a:uFillTx/>
-              <a:latin typeface="Calibri"/>
-            </a:endParaRPr>
-          </a:p>
-        </p:txBody>
-      </p:sp>
-      <p:sp>
-        <p:nvSpPr>
-          <p:cNvPr id="414" name="Oval 23"/>
-          <p:cNvSpPr/>
-          <p:nvPr/>
-        </p:nvSpPr>
-        <p:spPr>
-          <a:xfrm>
-            <a:off x="7696800" y="3913560"/>
-            <a:ext cx="438480" cy="438480"/>
-          </a:xfrm>
-          <a:prstGeom prst="ellipse">
-            <a:avLst/>
-          </a:prstGeom>
-          <a:solidFill>
-            <a:srgbClr val="1C7293"/>
-          </a:solidFill>
-          <a:ln>
-            <a:noFill/>
-          </a:ln>
-          <a:effectLst>
-            <a:outerShdw blurRad="39960" dist="23040" dir="5400000" rotWithShape="0">
-              <a:srgbClr val="000000">
-                <a:alpha val="35000"/>
-              </a:srgbClr>
-            </a:outerShdw>
-          </a:effectLst>
-        </p:spPr>
-        <p:style>
-          <a:lnRef idx="1">
-            <a:schemeClr val="accent1"/>
-          </a:lnRef>
-          <a:fillRef idx="3">
-            <a:schemeClr val="accent1"/>
-          </a:fillRef>
-          <a:effectRef idx="2">
-            <a:schemeClr val="accent1"/>
-          </a:effectRef>
-          <a:fontRef idx="minor"/>
-        </p:style>
-        <p:txBody>
-          <a:bodyPr lIns="18360" tIns="0" rIns="18360" bIns="0" anchor="ctr">
-            <a:noAutofit/>
-          </a:bodyPr>
-          <a:lstStyle/>
-          <a:p>
-            <a:pPr algn="ctr" defTabSz="457200">
-              <a:lnSpc>
-                <a:spcPct val="100000"/>
-              </a:lnSpc>
-            </a:pPr>
-            <a:r>
-              <a:rPr lang="en-US" sz="1500" b="1" u="none" strike="noStrike">
-                <a:solidFill>
-                  <a:srgbClr val="FFFFFF"/>
-                </a:solidFill>
-                <a:effectLst/>
-                <a:uFillTx/>
-                <a:latin typeface="Calibri"/>
-              </a:rPr>
-              <a:t>7</a:t>
-            </a:r>
-            <a:endParaRPr lang="es-ES" sz="1500" b="0" u="none" strike="noStrike">
-              <a:solidFill>
-                <a:srgbClr val="FFFFFF"/>
-              </a:solidFill>
-              <a:effectLst/>
-              <a:uFillTx/>
-              <a:latin typeface="Arial"/>
-            </a:endParaRPr>
-          </a:p>
-        </p:txBody>
-      </p:sp>
-      <p:sp>
-        <p:nvSpPr>
-          <p:cNvPr id="415" name="TextBox 24"/>
-          <p:cNvSpPr/>
-          <p:nvPr/>
-        </p:nvSpPr>
-        <p:spPr>
-          <a:xfrm>
-            <a:off x="7696800" y="4498920"/>
-            <a:ext cx="2280960" cy="822600"/>
-          </a:xfrm>
-          <a:prstGeom prst="rect">
-            <a:avLst/>
-          </a:prstGeom>
-          <a:noFill/>
-          <a:ln w="0">
-            <a:noFill/>
-          </a:ln>
-        </p:spPr>
-        <p:style>
-          <a:lnRef idx="0">
-            <a:scrgbClr r="0" g="0" b="0"/>
-          </a:lnRef>
-          <a:fillRef idx="0">
-            <a:scrgbClr r="0" g="0" b="0"/>
-          </a:fillRef>
-          <a:effectRef idx="0">
-            <a:scrgbClr r="0" g="0" b="0"/>
-          </a:effectRef>
-          <a:fontRef idx="minor"/>
-        </p:style>
-        <p:txBody>
-          <a:bodyPr lIns="0" tIns="0" rIns="0" bIns="0" anchor="t">
-            <a:spAutoFit/>
-          </a:bodyPr>
-          <a:lstStyle/>
-          <a:p>
-            <a:pPr defTabSz="457200">
-              <a:lnSpc>
-                <a:spcPct val="110000"/>
-              </a:lnSpc>
-            </a:pPr>
-            <a:r>
-              <a:rPr lang="en-US" sz="1250" b="1" u="none" strike="noStrike">
-                <a:solidFill>
-                  <a:srgbClr val="11243A"/>
-                </a:solidFill>
-                <a:effectLst/>
-                <a:uFillTx/>
-                <a:latin typeface="Calibri"/>
-              </a:rPr>
-              <a:t>Verificación automatizada</a:t>
-            </a:r>
-            <a:endParaRPr lang="es-ES" sz="1250" b="0" u="none" strike="noStrike">
-              <a:solidFill>
-                <a:srgbClr val="000000"/>
-              </a:solidFill>
-              <a:effectLst/>
-              <a:uFillTx/>
-              <a:latin typeface="Arial"/>
+              <a:buNone/>
+            </a:pPr>
+            <a:fld id="{E96B40A6-A46F-4A85-AE2F-4CA2D3C05104}" type="slidenum">
+              <a:rPr lang="en-US" sz="1200" b="0" u="none" strike="noStrike" smtClean="0">
+                <a:solidFill>
+                  <a:schemeClr val="dk1">
+                    <a:tint val="75000"/>
+                  </a:schemeClr>
+                </a:solidFill>
+                <a:effectLst/>
+                <a:uFillTx/>
+                <a:latin typeface="Calibri"/>
+              </a:rPr>
+              <a:t>20</a:t>
+            </a:fld>
+            <a:endParaRPr lang="es-ES" sz="1200" b="0" u="none" strike="noStrike">
+              <a:solidFill>
+                <a:srgbClr val="000000"/>
+              </a:solidFill>
+              <a:effectLst/>
+              <a:uFillTx/>
+              <a:latin typeface="Times New Roman"/>
             </a:endParaRPr>
           </a:p>
         </p:txBody>
@@ -28755,7 +28711,7 @@
       </p:grpSpPr>
       <p:sp>
         <p:nvSpPr>
-          <p:cNvPr id="416" name="Rectangle 1"/>
+          <p:cNvPr id="438" name="Rectangle 1"/>
           <p:cNvSpPr/>
           <p:nvPr/>
         </p:nvSpPr>
@@ -28768,7 +28724,7 @@
             <a:avLst/>
           </a:prstGeom>
           <a:solidFill>
-            <a:srgbClr val="FFFFFF"/>
+            <a:srgbClr val="11243A"/>
           </a:solidFill>
           <a:ln>
             <a:noFill/>
@@ -28812,150 +28768,20 @@
       </p:sp>
       <p:sp>
         <p:nvSpPr>
-          <p:cNvPr id="417" name="TextBox 2"/>
+          <p:cNvPr id="439" name="Rectangle 2"/>
           <p:cNvSpPr/>
           <p:nvPr/>
         </p:nvSpPr>
         <p:spPr>
           <a:xfrm>
-            <a:off x="548640" y="384120"/>
-            <a:ext cx="9143640" cy="319680"/>
+            <a:off x="0" y="0"/>
+            <a:ext cx="5120280" cy="182520"/>
           </a:xfrm>
           <a:prstGeom prst="rect">
             <a:avLst/>
           </a:prstGeom>
-          <a:noFill/>
-          <a:ln w="0">
-            <a:noFill/>
-          </a:ln>
-        </p:spPr>
-        <p:style>
-          <a:lnRef idx="0">
-            <a:scrgbClr r="0" g="0" b="0"/>
-          </a:lnRef>
-          <a:fillRef idx="0">
-            <a:scrgbClr r="0" g="0" b="0"/>
-          </a:fillRef>
-          <a:effectRef idx="0">
-            <a:scrgbClr r="0" g="0" b="0"/>
-          </a:effectRef>
-          <a:fontRef idx="minor"/>
-        </p:style>
-        <p:txBody>
-          <a:bodyPr lIns="0" tIns="0" rIns="0" bIns="0" anchor="t">
-            <a:spAutoFit/>
-          </a:bodyPr>
-          <a:lstStyle/>
-          <a:p>
-            <a:pPr defTabSz="457200">
-              <a:lnSpc>
-                <a:spcPct val="100000"/>
-              </a:lnSpc>
-            </a:pPr>
-            <a:r>
-              <a:rPr lang="en-US" sz="1300" b="1" u="none" strike="noStrike">
-                <a:solidFill>
-                  <a:srgbClr val="1C7293"/>
-                </a:solidFill>
-                <a:effectLst/>
-                <a:uFillTx/>
-                <a:latin typeface="Calibri"/>
-              </a:rPr>
-              <a:t>8 · CONCLUSIONES</a:t>
-            </a:r>
-            <a:endParaRPr lang="es-ES" sz="1300" b="0" u="none" strike="noStrike">
-              <a:solidFill>
-                <a:srgbClr val="000000"/>
-              </a:solidFill>
-              <a:effectLst/>
-              <a:uFillTx/>
-              <a:latin typeface="Arial"/>
-            </a:endParaRPr>
-          </a:p>
-        </p:txBody>
-      </p:sp>
-      <p:sp>
-        <p:nvSpPr>
-          <p:cNvPr id="418" name="TextBox 3"/>
-          <p:cNvSpPr/>
-          <p:nvPr/>
-        </p:nvSpPr>
-        <p:spPr>
-          <a:xfrm>
-            <a:off x="548640" y="658440"/>
-            <a:ext cx="11063880" cy="822600"/>
-          </a:xfrm>
-          <a:prstGeom prst="rect">
-            <a:avLst/>
-          </a:prstGeom>
-          <a:noFill/>
-          <a:ln w="0">
-            <a:noFill/>
-          </a:ln>
-        </p:spPr>
-        <p:style>
-          <a:lnRef idx="0">
-            <a:scrgbClr r="0" g="0" b="0"/>
-          </a:lnRef>
-          <a:fillRef idx="0">
-            <a:scrgbClr r="0" g="0" b="0"/>
-          </a:fillRef>
-          <a:effectRef idx="0">
-            <a:scrgbClr r="0" g="0" b="0"/>
-          </a:effectRef>
-          <a:fontRef idx="minor"/>
-        </p:style>
-        <p:txBody>
-          <a:bodyPr lIns="0" tIns="0" rIns="0" bIns="0" anchor="t">
-            <a:spAutoFit/>
-          </a:bodyPr>
-          <a:lstStyle/>
-          <a:p>
-            <a:pPr defTabSz="457200">
-              <a:lnSpc>
-                <a:spcPct val="102000"/>
-              </a:lnSpc>
-            </a:pPr>
-            <a:r>
-              <a:rPr lang="en-US" sz="3000" b="1" u="none" strike="noStrike">
-                <a:solidFill>
-                  <a:srgbClr val="11243A"/>
-                </a:solidFill>
-                <a:effectLst/>
-                <a:uFillTx/>
-                <a:latin typeface="Cambria"/>
-              </a:rPr>
-              <a:t>Conclusión y líneas de trabajo futuro</a:t>
-            </a:r>
-            <a:endParaRPr lang="es-ES" sz="3000" b="0" u="none" strike="noStrike">
-              <a:solidFill>
-                <a:srgbClr val="000000"/>
-              </a:solidFill>
-              <a:effectLst/>
-              <a:uFillTx/>
-              <a:latin typeface="Arial"/>
-            </a:endParaRPr>
-          </a:p>
-        </p:txBody>
-      </p:sp>
-      <p:sp>
-        <p:nvSpPr>
-          <p:cNvPr id="419" name="Rounded Rectangle 4"/>
-          <p:cNvSpPr/>
-          <p:nvPr/>
-        </p:nvSpPr>
-        <p:spPr>
-          <a:xfrm>
-            <a:off x="640080" y="1783080"/>
-            <a:ext cx="5211720" cy="4205880"/>
-          </a:xfrm>
-          <a:prstGeom prst="roundRect">
-            <a:avLst>
-              <a:gd name="adj" fmla="val 9000"/>
-            </a:avLst>
-          </a:prstGeom>
           <a:solidFill>
-            <a:srgbClr val="11243A"/>
+            <a:srgbClr val="E09A3E"/>
           </a:solidFill>
           <a:ln>
             <a:noFill/>
@@ -28999,264 +28825,20 @@
       </p:sp>
       <p:sp>
         <p:nvSpPr>
-          <p:cNvPr id="420" name="TextBox 5"/>
+          <p:cNvPr id="440" name="Rectangle 3"/>
           <p:cNvSpPr/>
           <p:nvPr/>
         </p:nvSpPr>
         <p:spPr>
           <a:xfrm>
-            <a:off x="896040" y="2011680"/>
-            <a:ext cx="4708800" cy="365400"/>
+            <a:off x="0" y="219600"/>
+            <a:ext cx="8595000" cy="182520"/>
           </a:xfrm>
           <a:prstGeom prst="rect">
             <a:avLst/>
           </a:prstGeom>
-          <a:noFill/>
-          <a:ln w="0">
-            <a:noFill/>
-          </a:ln>
-        </p:spPr>
-        <p:style>
-          <a:lnRef idx="0">
-            <a:scrgbClr r="0" g="0" b="0"/>
-          </a:lnRef>
-          <a:fillRef idx="0">
-            <a:scrgbClr r="0" g="0" b="0"/>
-          </a:fillRef>
-          <a:effectRef idx="0">
-            <a:scrgbClr r="0" g="0" b="0"/>
-          </a:effectRef>
-          <a:fontRef idx="minor"/>
-        </p:style>
-        <p:txBody>
-          <a:bodyPr lIns="0" tIns="0" rIns="0" bIns="0" anchor="t">
-            <a:spAutoFit/>
-          </a:bodyPr>
-          <a:lstStyle/>
-          <a:p>
-            <a:pPr defTabSz="457200">
-              <a:lnSpc>
-                <a:spcPct val="100000"/>
-              </a:lnSpc>
-            </a:pPr>
-            <a:r>
-              <a:rPr lang="en-US" sz="1200" b="1" u="none" strike="noStrike">
-                <a:solidFill>
-                  <a:srgbClr val="E09A3E"/>
-                </a:solidFill>
-                <a:effectLst/>
-                <a:uFillTx/>
-                <a:latin typeface="Calibri"/>
-              </a:rPr>
-              <a:t>CONCLUSIÓN</a:t>
-            </a:r>
-            <a:endParaRPr lang="es-ES" sz="1200" b="0" u="none" strike="noStrike">
-              <a:solidFill>
-                <a:srgbClr val="000000"/>
-              </a:solidFill>
-              <a:effectLst/>
-              <a:uFillTx/>
-              <a:latin typeface="Arial"/>
-            </a:endParaRPr>
-          </a:p>
-        </p:txBody>
-      </p:sp>
-      <p:sp>
-        <p:nvSpPr>
-          <p:cNvPr id="421" name="TextBox 6"/>
-          <p:cNvSpPr/>
-          <p:nvPr/>
-        </p:nvSpPr>
-        <p:spPr>
-          <a:xfrm>
-            <a:off x="896040" y="2423160"/>
-            <a:ext cx="4708800" cy="3291480"/>
-          </a:xfrm>
-          <a:prstGeom prst="rect">
-            <a:avLst/>
-          </a:prstGeom>
-          <a:noFill/>
-          <a:ln w="0">
-            <a:noFill/>
-          </a:ln>
-        </p:spPr>
-        <p:style>
-          <a:lnRef idx="0">
-            <a:scrgbClr r="0" g="0" b="0"/>
-          </a:lnRef>
-          <a:fillRef idx="0">
-            <a:scrgbClr r="0" g="0" b="0"/>
-          </a:fillRef>
-          <a:effectRef idx="0">
-            <a:scrgbClr r="0" g="0" b="0"/>
-          </a:effectRef>
-          <a:fontRef idx="minor"/>
-        </p:style>
-        <p:txBody>
-          <a:bodyPr lIns="0" tIns="0" rIns="0" bIns="0" anchor="t">
-            <a:spAutoFit/>
-          </a:bodyPr>
-          <a:lstStyle/>
-          <a:p>
-            <a:pPr defTabSz="457200">
-              <a:lnSpc>
-                <a:spcPct val="122000"/>
-              </a:lnSpc>
-              <a:spcAft>
-                <a:spcPts val="601"/>
-              </a:spcAft>
-            </a:pPr>
-            <a:r>
-              <a:rPr lang="en-US" sz="1450" b="0" i="1" u="none" strike="noStrike">
-                <a:solidFill>
-                  <a:srgbClr val="E9F1F7"/>
-                </a:solidFill>
-                <a:effectLst/>
-                <a:uFillTx/>
-                <a:latin typeface="Cambria"/>
-              </a:rPr>
-              <a:t>Este trabajo demuestra que es posible construir, a partir de CVN, una arquitectura computacional abierta que separa la interoperabilidad estructural del significado curricular, con trazabilidad verificable y garantías reproducibles allí donde el proceso es determinista.</a:t>
-            </a:r>
-            <a:endParaRPr lang="es-ES" sz="1450" b="0" u="none" strike="noStrike">
-              <a:solidFill>
-                <a:srgbClr val="000000"/>
-              </a:solidFill>
-              <a:effectLst/>
-              <a:uFillTx/>
-              <a:latin typeface="Arial"/>
-            </a:endParaRPr>
-          </a:p>
-          <a:p>
-            <a:pPr defTabSz="457200">
-              <a:lnSpc>
-                <a:spcPct val="122000"/>
-              </a:lnSpc>
-              <a:spcAft>
-                <a:spcPts val="601"/>
-              </a:spcAft>
-            </a:pPr>
-            <a:endParaRPr lang="es-ES" sz="1450" b="0" u="none" strike="noStrike">
-              <a:solidFill>
-                <a:srgbClr val="000000"/>
-              </a:solidFill>
-              <a:effectLst/>
-              <a:uFillTx/>
-              <a:latin typeface="Arial"/>
-            </a:endParaRPr>
-          </a:p>
-          <a:p>
-            <a:pPr defTabSz="457200">
-              <a:lnSpc>
-                <a:spcPct val="122000"/>
-              </a:lnSpc>
-              <a:spcAft>
-                <a:spcPts val="601"/>
-              </a:spcAft>
-            </a:pPr>
-            <a:r>
-              <a:rPr lang="en-US" sz="1450" b="0" i="1" u="none" strike="noStrike">
-                <a:solidFill>
-                  <a:srgbClr val="E9F1F7"/>
-                </a:solidFill>
-                <a:effectLst/>
-                <a:uFillTx/>
-                <a:latin typeface="Cambria"/>
-              </a:rPr>
-              <a:t>Esa arquitectura por capas —más que el formato JSON o la herramienta que la demuestran— es la aportación principal de este Trabajo Fin de Grado.</a:t>
-            </a:r>
-            <a:endParaRPr lang="es-ES" sz="1450" b="0" u="none" strike="noStrike">
-              <a:solidFill>
-                <a:srgbClr val="000000"/>
-              </a:solidFill>
-              <a:effectLst/>
-              <a:uFillTx/>
-              <a:latin typeface="Arial"/>
-            </a:endParaRPr>
-          </a:p>
-        </p:txBody>
-      </p:sp>
-      <p:sp>
-        <p:nvSpPr>
-          <p:cNvPr id="422" name="TextBox 7"/>
-          <p:cNvSpPr/>
-          <p:nvPr/>
-        </p:nvSpPr>
-        <p:spPr>
-          <a:xfrm>
-            <a:off x="6172200" y="1783080"/>
-            <a:ext cx="5348880" cy="319680"/>
-          </a:xfrm>
-          <a:prstGeom prst="rect">
-            <a:avLst/>
-          </a:prstGeom>
-          <a:noFill/>
-          <a:ln w="0">
-            <a:noFill/>
-          </a:ln>
-        </p:spPr>
-        <p:style>
-          <a:lnRef idx="0">
-            <a:scrgbClr r="0" g="0" b="0"/>
-          </a:lnRef>
-          <a:fillRef idx="0">
-            <a:scrgbClr r="0" g="0" b="0"/>
-          </a:fillRef>
-          <a:effectRef idx="0">
-            <a:scrgbClr r="0" g="0" b="0"/>
-          </a:effectRef>
-          <a:fontRef idx="minor"/>
-        </p:style>
-        <p:txBody>
-          <a:bodyPr lIns="0" tIns="0" rIns="0" bIns="0" anchor="t">
-            <a:spAutoFit/>
-          </a:bodyPr>
-          <a:lstStyle/>
-          <a:p>
-            <a:pPr defTabSz="457200">
-              <a:lnSpc>
-                <a:spcPct val="100000"/>
-              </a:lnSpc>
-            </a:pPr>
-            <a:r>
-              <a:rPr lang="en-US" sz="1200" b="1" u="none" strike="noStrike">
-                <a:solidFill>
-                  <a:srgbClr val="1C7293"/>
-                </a:solidFill>
-                <a:effectLst/>
-                <a:uFillTx/>
-                <a:latin typeface="Calibri"/>
-              </a:rPr>
-              <a:t>TRABAJO FUTURO</a:t>
-            </a:r>
-            <a:endParaRPr lang="es-ES" sz="1200" b="0" u="none" strike="noStrike">
-              <a:solidFill>
-                <a:srgbClr val="000000"/>
-              </a:solidFill>
-              <a:effectLst/>
-              <a:uFillTx/>
-              <a:latin typeface="Arial"/>
-            </a:endParaRPr>
-          </a:p>
-        </p:txBody>
-      </p:sp>
-      <p:sp>
-        <p:nvSpPr>
-          <p:cNvPr id="423" name="Rounded Rectangle 8"/>
-          <p:cNvSpPr/>
-          <p:nvPr/>
-        </p:nvSpPr>
-        <p:spPr>
-          <a:xfrm>
-            <a:off x="6172200" y="2167200"/>
-            <a:ext cx="5348880" cy="685440"/>
-          </a:xfrm>
-          <a:prstGeom prst="roundRect">
-            <a:avLst>
-              <a:gd name="adj" fmla="val 14000"/>
-            </a:avLst>
-          </a:prstGeom>
           <a:solidFill>
-            <a:srgbClr val="F0F4F8"/>
+            <a:srgbClr val="1C7293"/>
           </a:solidFill>
           <a:ln>
             <a:noFill/>
@@ -29300,20 +28882,20 @@
       </p:sp>
       <p:sp>
         <p:nvSpPr>
-          <p:cNvPr id="424" name="Oval 9"/>
+          <p:cNvPr id="441" name="Rectangle 4"/>
           <p:cNvSpPr/>
           <p:nvPr/>
         </p:nvSpPr>
         <p:spPr>
           <a:xfrm>
-            <a:off x="6309360" y="2295000"/>
-            <a:ext cx="420120" cy="420120"/>
-          </a:xfrm>
-          <a:prstGeom prst="ellipse">
+            <a:off x="0" y="438840"/>
+            <a:ext cx="12191400" cy="182520"/>
+          </a:xfrm>
+          <a:prstGeom prst="rect">
             <a:avLst/>
           </a:prstGeom>
           <a:solidFill>
-            <a:srgbClr val="1C7293"/>
+            <a:srgbClr val="065A82"/>
           </a:solidFill>
           <a:ln>
             <a:noFill/>
@@ -29339,48 +28921,32 @@
           <a:fontRef idx="minor"/>
         </p:style>
         <p:txBody>
-          <a:bodyPr lIns="18360" tIns="0" rIns="18360" bIns="0" anchor="ctr">
+          <a:bodyPr lIns="90000" tIns="45000" rIns="90000" bIns="45000" anchor="ctr">
             <a:noAutofit/>
           </a:bodyPr>
           <a:lstStyle/>
           <a:p>
-            <a:pPr algn="ctr" defTabSz="457200">
-              <a:lnSpc>
-                <a:spcPct val="100000"/>
-              </a:lnSpc>
-            </a:pPr>
-            <a:r>
-              <a:rPr lang="en-US" sz="1300" b="1" u="none" strike="noStrike">
-                <a:solidFill>
-                  <a:srgbClr val="FFFFFF"/>
-                </a:solidFill>
-                <a:effectLst/>
-                <a:uFillTx/>
-                <a:latin typeface="Calibri"/>
-              </a:rPr>
-              <a:t>1</a:t>
-            </a:r>
-            <a:endParaRPr lang="es-ES" sz="1300" b="0" u="none" strike="noStrike">
-              <a:solidFill>
-                <a:srgbClr val="FFFFFF"/>
-              </a:solidFill>
-              <a:effectLst/>
-              <a:uFillTx/>
-              <a:latin typeface="Arial"/>
-            </a:endParaRPr>
-          </a:p>
-        </p:txBody>
-      </p:sp>
-      <p:sp>
-        <p:nvSpPr>
-          <p:cNvPr id="425" name="TextBox 10"/>
+            <a:endParaRPr lang="en-US" sz="1800" b="0" u="none" strike="noStrike">
+              <a:solidFill>
+                <a:schemeClr val="lt1"/>
+              </a:solidFill>
+              <a:effectLst/>
+              <a:uFillTx/>
+              <a:latin typeface="Calibri"/>
+            </a:endParaRPr>
+          </a:p>
+        </p:txBody>
+      </p:sp>
+      <p:sp>
+        <p:nvSpPr>
+          <p:cNvPr id="442" name="TextBox 5"/>
           <p:cNvSpPr/>
           <p:nvPr/>
         </p:nvSpPr>
         <p:spPr>
           <a:xfrm>
-            <a:off x="6830640" y="2167200"/>
-            <a:ext cx="4525920" cy="685440"/>
+            <a:off x="640080" y="2514600"/>
+            <a:ext cx="10881000" cy="677108"/>
           </a:xfrm>
           <a:prstGeom prst="rect">
             <a:avLst/>
@@ -29403,28 +28969,28 @@
           <a:fontRef idx="minor"/>
         </p:style>
         <p:txBody>
-          <a:bodyPr lIns="0" tIns="0" rIns="0" bIns="0" anchor="ctr">
+          <a:bodyPr lIns="0" tIns="0" rIns="0" bIns="0" anchor="t">
             <a:spAutoFit/>
           </a:bodyPr>
           <a:lstStyle/>
           <a:p>
-            <a:pPr defTabSz="457200">
-              <a:lnSpc>
-                <a:spcPct val="105000"/>
-              </a:lnSpc>
-            </a:pPr>
-            <a:r>
-              <a:rPr lang="en-US" sz="1180" b="0" u="none" strike="noStrike">
-                <a:solidFill>
-                  <a:srgbClr val="162230"/>
-                </a:solidFill>
-                <a:effectLst/>
-                <a:uFillTx/>
-                <a:latin typeface="Calibri"/>
-              </a:rPr>
-              <a:t>Completar el mapeo semántico de importación XML con currículos reales</a:t>
-            </a:r>
-            <a:endParaRPr lang="es-ES" sz="1180" b="0" u="none" strike="noStrike">
+            <a:pPr algn="ctr" defTabSz="457200">
+              <a:lnSpc>
+                <a:spcPct val="100000"/>
+              </a:lnSpc>
+            </a:pPr>
+            <a:r>
+              <a:rPr lang="en-US" sz="4400" b="1" u="none" strike="noStrike" dirty="0">
+                <a:solidFill>
+                  <a:srgbClr val="FFFFFF"/>
+                </a:solidFill>
+                <a:effectLst/>
+                <a:uFillTx/>
+                <a:latin typeface="Cambria"/>
+              </a:rPr>
+              <a:t>FIN</a:t>
+            </a:r>
+            <a:endParaRPr lang="es-ES" sz="4400" b="0" u="none" strike="noStrike" dirty="0">
               <a:solidFill>
                 <a:srgbClr val="000000"/>
               </a:solidFill>
@@ -29437,1073 +29003,100 @@
       </p:sp>
       <p:sp>
         <p:nvSpPr>
-          <p:cNvPr id="426" name="Rounded Rectangle 11"/>
+          <p:cNvPr id="443" name="TextBox 6"/>
           <p:cNvSpPr/>
           <p:nvPr/>
         </p:nvSpPr>
         <p:spPr>
           <a:xfrm>
-            <a:off x="6172200" y="2971800"/>
-            <a:ext cx="5348880" cy="685440"/>
-          </a:xfrm>
-          <a:prstGeom prst="roundRect">
-            <a:avLst>
-              <a:gd name="adj" fmla="val 14000"/>
-            </a:avLst>
-          </a:prstGeom>
-          <a:solidFill>
-            <a:srgbClr val="F0F4F8"/>
-          </a:solidFill>
-          <a:ln>
-            <a:noFill/>
-          </a:ln>
-          <a:effectLst>
-            <a:outerShdw blurRad="39960" dist="23040" dir="5400000" rotWithShape="0">
-              <a:srgbClr val="000000">
-                <a:alpha val="35000"/>
-              </a:srgbClr>
-            </a:outerShdw>
-          </a:effectLst>
+            <a:off x="640080" y="3520440"/>
+            <a:ext cx="10881000" cy="548280"/>
+          </a:xfrm>
+          <a:prstGeom prst="rect">
+            <a:avLst/>
+          </a:prstGeom>
+          <a:noFill/>
+          <a:ln w="0">
+            <a:noFill/>
+          </a:ln>
         </p:spPr>
         <p:style>
-          <a:lnRef idx="1">
-            <a:schemeClr val="accent1"/>
+          <a:lnRef idx="0">
+            <a:scrgbClr r="0" g="0" b="0"/>
           </a:lnRef>
-          <a:fillRef idx="3">
-            <a:schemeClr val="accent1"/>
+          <a:fillRef idx="0">
+            <a:scrgbClr r="0" g="0" b="0"/>
           </a:fillRef>
-          <a:effectRef idx="2">
-            <a:schemeClr val="accent1"/>
+          <a:effectRef idx="0">
+            <a:scrgbClr r="0" g="0" b="0"/>
           </a:effectRef>
           <a:fontRef idx="minor"/>
         </p:style>
         <p:txBody>
-          <a:bodyPr lIns="90000" tIns="45000" rIns="90000" bIns="45000" anchor="ctr">
-            <a:noAutofit/>
+          <a:bodyPr lIns="0" tIns="0" rIns="0" bIns="0" anchor="t">
+            <a:spAutoFit/>
           </a:bodyPr>
           <a:lstStyle/>
           <a:p>
-            <a:endParaRPr lang="en-US" sz="1800" b="0" u="none" strike="noStrike">
-              <a:solidFill>
-                <a:schemeClr val="lt1"/>
-              </a:solidFill>
-              <a:effectLst/>
-              <a:uFillTx/>
-              <a:latin typeface="Calibri"/>
-            </a:endParaRPr>
-          </a:p>
-        </p:txBody>
-      </p:sp>
-      <p:sp>
-        <p:nvSpPr>
-          <p:cNvPr id="427" name="Oval 12"/>
+            <a:pPr algn="ctr" defTabSz="457200">
+              <a:lnSpc>
+                <a:spcPct val="100000"/>
+              </a:lnSpc>
+            </a:pPr>
+            <a:r>
+              <a:rPr lang="en-US" sz="1800" b="0" i="1" u="none" strike="noStrike">
+                <a:solidFill>
+                  <a:srgbClr val="E9F1F7"/>
+                </a:solidFill>
+                <a:effectLst/>
+                <a:uFillTx/>
+                <a:latin typeface="Calibri"/>
+              </a:rPr>
+              <a:t>Quedo a su disposición para las preguntas del tribunal</a:t>
+            </a:r>
+            <a:endParaRPr lang="es-ES" sz="1800" b="0" u="none" strike="noStrike">
+              <a:solidFill>
+                <a:srgbClr val="000000"/>
+              </a:solidFill>
+              <a:effectLst/>
+              <a:uFillTx/>
+              <a:latin typeface="Arial"/>
+            </a:endParaRPr>
+          </a:p>
+        </p:txBody>
+      </p:sp>
+      <p:sp>
+        <p:nvSpPr>
+          <p:cNvPr id="444" name="TextBox 7"/>
           <p:cNvSpPr/>
           <p:nvPr/>
         </p:nvSpPr>
         <p:spPr>
           <a:xfrm>
-            <a:off x="6309360" y="3099960"/>
-            <a:ext cx="420120" cy="420120"/>
-          </a:xfrm>
-          <a:prstGeom prst="ellipse">
-            <a:avLst/>
-          </a:prstGeom>
-          <a:solidFill>
-            <a:srgbClr val="1C7293"/>
-          </a:solidFill>
-          <a:ln>
-            <a:noFill/>
-          </a:ln>
-          <a:effectLst>
-            <a:outerShdw blurRad="39960" dist="23040" dir="5400000" rotWithShape="0">
-              <a:srgbClr val="000000">
-                <a:alpha val="35000"/>
-              </a:srgbClr>
-            </a:outerShdw>
-          </a:effectLst>
+            <a:off x="640080" y="6263640"/>
+            <a:ext cx="10881000" cy="365400"/>
+          </a:xfrm>
+          <a:prstGeom prst="rect">
+            <a:avLst/>
+          </a:prstGeom>
+          <a:noFill/>
+          <a:ln w="0">
+            <a:noFill/>
+          </a:ln>
         </p:spPr>
         <p:style>
-          <a:lnRef idx="1">
-            <a:schemeClr val="accent1"/>
+          <a:lnRef idx="0">
+            <a:scrgbClr r="0" g="0" b="0"/>
           </a:lnRef>
-          <a:fillRef idx="3">
-            <a:schemeClr val="accent1"/>
+          <a:fillRef idx="0">
+            <a:scrgbClr r="0" g="0" b="0"/>
           </a:fillRef>
-          <a:effectRef idx="2">
-            <a:schemeClr val="accent1"/>
+          <a:effectRef idx="0">
+            <a:scrgbClr r="0" g="0" b="0"/>
           </a:effectRef>
           <a:fontRef idx="minor"/>
         </p:style>
         <p:txBody>
-          <a:bodyPr lIns="18360" tIns="0" rIns="18360" bIns="0" anchor="ctr">
-            <a:noAutofit/>
-          </a:bodyPr>
-          <a:lstStyle/>
-          <a:p>
-            <a:pPr algn="ctr" defTabSz="457200">
-              <a:lnSpc>
-                <a:spcPct val="100000"/>
-              </a:lnSpc>
-            </a:pPr>
-            <a:r>
-              <a:rPr lang="en-US" sz="1300" b="1" u="none" strike="noStrike">
-                <a:solidFill>
-                  <a:srgbClr val="FFFFFF"/>
-                </a:solidFill>
-                <a:effectLst/>
-                <a:uFillTx/>
-                <a:latin typeface="Calibri"/>
-              </a:rPr>
-              <a:t>2</a:t>
-            </a:r>
-            <a:endParaRPr lang="es-ES" sz="1300" b="0" u="none" strike="noStrike">
-              <a:solidFill>
-                <a:srgbClr val="FFFFFF"/>
-              </a:solidFill>
-              <a:effectLst/>
-              <a:uFillTx/>
-              <a:latin typeface="Arial"/>
-            </a:endParaRPr>
-          </a:p>
-        </p:txBody>
-      </p:sp>
-      <p:sp>
-        <p:nvSpPr>
-          <p:cNvPr id="428" name="TextBox 13"/>
-          <p:cNvSpPr/>
-          <p:nvPr/>
-        </p:nvSpPr>
-        <p:spPr>
-          <a:xfrm>
-            <a:off x="6830640" y="2971800"/>
-            <a:ext cx="4525920" cy="685440"/>
-          </a:xfrm>
-          <a:prstGeom prst="rect">
-            <a:avLst/>
-          </a:prstGeom>
-          <a:noFill/>
-          <a:ln w="0">
-            <a:noFill/>
-          </a:ln>
-        </p:spPr>
-        <p:style>
-          <a:lnRef idx="0">
-            <a:scrgbClr r="0" g="0" b="0"/>
-          </a:lnRef>
-          <a:fillRef idx="0">
-            <a:scrgbClr r="0" g="0" b="0"/>
-          </a:fillRef>
-          <a:effectRef idx="0">
-            <a:scrgbClr r="0" g="0" b="0"/>
-          </a:effectRef>
-          <a:fontRef idx="minor"/>
-        </p:style>
-        <p:txBody>
-          <a:bodyPr lIns="0" tIns="0" rIns="0" bIns="0" anchor="ctr">
-            <a:spAutoFit/>
-          </a:bodyPr>
-          <a:lstStyle/>
-          <a:p>
-            <a:pPr defTabSz="457200">
-              <a:lnSpc>
-                <a:spcPct val="105000"/>
-              </a:lnSpc>
-            </a:pPr>
-            <a:r>
-              <a:rPr lang="en-US" sz="1180" b="0" u="none" strike="noStrike">
-                <a:solidFill>
-                  <a:srgbClr val="162230"/>
-                </a:solidFill>
-                <a:effectLst/>
-                <a:uFillTx/>
-                <a:latin typeface="Calibri"/>
-              </a:rPr>
-              <a:t>Ampliar las validaciones de dominio fuera de la capa estructural generada</a:t>
-            </a:r>
-            <a:endParaRPr lang="es-ES" sz="1180" b="0" u="none" strike="noStrike">
-              <a:solidFill>
-                <a:srgbClr val="000000"/>
-              </a:solidFill>
-              <a:effectLst/>
-              <a:uFillTx/>
-              <a:latin typeface="Arial"/>
-            </a:endParaRPr>
-          </a:p>
-        </p:txBody>
-      </p:sp>
-      <p:sp>
-        <p:nvSpPr>
-          <p:cNvPr id="429" name="Rounded Rectangle 14"/>
-          <p:cNvSpPr/>
-          <p:nvPr/>
-        </p:nvSpPr>
-        <p:spPr>
-          <a:xfrm>
-            <a:off x="6172200" y="3776400"/>
-            <a:ext cx="5348880" cy="685440"/>
-          </a:xfrm>
-          <a:prstGeom prst="roundRect">
-            <a:avLst>
-              <a:gd name="adj" fmla="val 14000"/>
-            </a:avLst>
-          </a:prstGeom>
-          <a:solidFill>
-            <a:srgbClr val="F0F4F8"/>
-          </a:solidFill>
-          <a:ln>
-            <a:noFill/>
-          </a:ln>
-          <a:effectLst>
-            <a:outerShdw blurRad="39960" dist="23040" dir="5400000" rotWithShape="0">
-              <a:srgbClr val="000000">
-                <a:alpha val="35000"/>
-              </a:srgbClr>
-            </a:outerShdw>
-          </a:effectLst>
-        </p:spPr>
-        <p:style>
-          <a:lnRef idx="1">
-            <a:schemeClr val="accent1"/>
-          </a:lnRef>
-          <a:fillRef idx="3">
-            <a:schemeClr val="accent1"/>
-          </a:fillRef>
-          <a:effectRef idx="2">
-            <a:schemeClr val="accent1"/>
-          </a:effectRef>
-          <a:fontRef idx="minor"/>
-        </p:style>
-        <p:txBody>
-          <a:bodyPr lIns="90000" tIns="45000" rIns="90000" bIns="45000" anchor="ctr">
-            <a:noAutofit/>
-          </a:bodyPr>
-          <a:lstStyle/>
-          <a:p>
-            <a:endParaRPr lang="en-US" sz="1800" b="0" u="none" strike="noStrike">
-              <a:solidFill>
-                <a:schemeClr val="lt1"/>
-              </a:solidFill>
-              <a:effectLst/>
-              <a:uFillTx/>
-              <a:latin typeface="Calibri"/>
-            </a:endParaRPr>
-          </a:p>
-        </p:txBody>
-      </p:sp>
-      <p:sp>
-        <p:nvSpPr>
-          <p:cNvPr id="430" name="Oval 15"/>
-          <p:cNvSpPr/>
-          <p:nvPr/>
-        </p:nvSpPr>
-        <p:spPr>
-          <a:xfrm>
-            <a:off x="6309360" y="3904560"/>
-            <a:ext cx="420120" cy="420120"/>
-          </a:xfrm>
-          <a:prstGeom prst="ellipse">
-            <a:avLst/>
-          </a:prstGeom>
-          <a:solidFill>
-            <a:srgbClr val="1C7293"/>
-          </a:solidFill>
-          <a:ln>
-            <a:noFill/>
-          </a:ln>
-          <a:effectLst>
-            <a:outerShdw blurRad="39960" dist="23040" dir="5400000" rotWithShape="0">
-              <a:srgbClr val="000000">
-                <a:alpha val="35000"/>
-              </a:srgbClr>
-            </a:outerShdw>
-          </a:effectLst>
-        </p:spPr>
-        <p:style>
-          <a:lnRef idx="1">
-            <a:schemeClr val="accent1"/>
-          </a:lnRef>
-          <a:fillRef idx="3">
-            <a:schemeClr val="accent1"/>
-          </a:fillRef>
-          <a:effectRef idx="2">
-            <a:schemeClr val="accent1"/>
-          </a:effectRef>
-          <a:fontRef idx="minor"/>
-        </p:style>
-        <p:txBody>
-          <a:bodyPr lIns="18360" tIns="0" rIns="18360" bIns="0" anchor="ctr">
-            <a:noAutofit/>
-          </a:bodyPr>
-          <a:lstStyle/>
-          <a:p>
-            <a:pPr algn="ctr" defTabSz="457200">
-              <a:lnSpc>
-                <a:spcPct val="100000"/>
-              </a:lnSpc>
-            </a:pPr>
-            <a:r>
-              <a:rPr lang="en-US" sz="1300" b="1" u="none" strike="noStrike">
-                <a:solidFill>
-                  <a:srgbClr val="FFFFFF"/>
-                </a:solidFill>
-                <a:effectLst/>
-                <a:uFillTx/>
-                <a:latin typeface="Calibri"/>
-              </a:rPr>
-              <a:t>3</a:t>
-            </a:r>
-            <a:endParaRPr lang="es-ES" sz="1300" b="0" u="none" strike="noStrike">
-              <a:solidFill>
-                <a:srgbClr val="FFFFFF"/>
-              </a:solidFill>
-              <a:effectLst/>
-              <a:uFillTx/>
-              <a:latin typeface="Arial"/>
-            </a:endParaRPr>
-          </a:p>
-        </p:txBody>
-      </p:sp>
-      <p:sp>
-        <p:nvSpPr>
-          <p:cNvPr id="431" name="TextBox 16"/>
-          <p:cNvSpPr/>
-          <p:nvPr/>
-        </p:nvSpPr>
-        <p:spPr>
-          <a:xfrm>
-            <a:off x="6830640" y="3776400"/>
-            <a:ext cx="4525920" cy="685440"/>
-          </a:xfrm>
-          <a:prstGeom prst="rect">
-            <a:avLst/>
-          </a:prstGeom>
-          <a:noFill/>
-          <a:ln w="0">
-            <a:noFill/>
-          </a:ln>
-        </p:spPr>
-        <p:style>
-          <a:lnRef idx="0">
-            <a:scrgbClr r="0" g="0" b="0"/>
-          </a:lnRef>
-          <a:fillRef idx="0">
-            <a:scrgbClr r="0" g="0" b="0"/>
-          </a:fillRef>
-          <a:effectRef idx="0">
-            <a:scrgbClr r="0" g="0" b="0"/>
-          </a:effectRef>
-          <a:fontRef idx="minor"/>
-        </p:style>
-        <p:txBody>
-          <a:bodyPr lIns="0" tIns="0" rIns="0" bIns="0" anchor="ctr">
-            <a:spAutoFit/>
-          </a:bodyPr>
-          <a:lstStyle/>
-          <a:p>
-            <a:pPr defTabSz="457200">
-              <a:lnSpc>
-                <a:spcPct val="105000"/>
-              </a:lnSpc>
-            </a:pPr>
-            <a:r>
-              <a:rPr lang="en-US" sz="1180" b="0" u="none" strike="noStrike">
-                <a:solidFill>
-                  <a:srgbClr val="162230"/>
-                </a:solidFill>
-                <a:effectLst/>
-                <a:uFillTx/>
-                <a:latin typeface="Calibri"/>
-              </a:rPr>
-              <a:t>Estudiar restricciones OCL sobre el modelo conceptual</a:t>
-            </a:r>
-            <a:endParaRPr lang="es-ES" sz="1180" b="0" u="none" strike="noStrike">
-              <a:solidFill>
-                <a:srgbClr val="000000"/>
-              </a:solidFill>
-              <a:effectLst/>
-              <a:uFillTx/>
-              <a:latin typeface="Arial"/>
-            </a:endParaRPr>
-          </a:p>
-        </p:txBody>
-      </p:sp>
-      <p:sp>
-        <p:nvSpPr>
-          <p:cNvPr id="432" name="Rounded Rectangle 17"/>
-          <p:cNvSpPr/>
-          <p:nvPr/>
-        </p:nvSpPr>
-        <p:spPr>
-          <a:xfrm>
-            <a:off x="6172200" y="4581000"/>
-            <a:ext cx="5348880" cy="685440"/>
-          </a:xfrm>
-          <a:prstGeom prst="roundRect">
-            <a:avLst>
-              <a:gd name="adj" fmla="val 14000"/>
-            </a:avLst>
-          </a:prstGeom>
-          <a:solidFill>
-            <a:srgbClr val="F0F4F8"/>
-          </a:solidFill>
-          <a:ln>
-            <a:noFill/>
-          </a:ln>
-          <a:effectLst>
-            <a:outerShdw blurRad="39960" dist="23040" dir="5400000" rotWithShape="0">
-              <a:srgbClr val="000000">
-                <a:alpha val="35000"/>
-              </a:srgbClr>
-            </a:outerShdw>
-          </a:effectLst>
-        </p:spPr>
-        <p:style>
-          <a:lnRef idx="1">
-            <a:schemeClr val="accent1"/>
-          </a:lnRef>
-          <a:fillRef idx="3">
-            <a:schemeClr val="accent1"/>
-          </a:fillRef>
-          <a:effectRef idx="2">
-            <a:schemeClr val="accent1"/>
-          </a:effectRef>
-          <a:fontRef idx="minor"/>
-        </p:style>
-        <p:txBody>
-          <a:bodyPr lIns="90000" tIns="45000" rIns="90000" bIns="45000" anchor="ctr">
-            <a:noAutofit/>
-          </a:bodyPr>
-          <a:lstStyle/>
-          <a:p>
-            <a:endParaRPr lang="en-US" sz="1800" b="0" u="none" strike="noStrike">
-              <a:solidFill>
-                <a:schemeClr val="lt1"/>
-              </a:solidFill>
-              <a:effectLst/>
-              <a:uFillTx/>
-              <a:latin typeface="Calibri"/>
-            </a:endParaRPr>
-          </a:p>
-        </p:txBody>
-      </p:sp>
-      <p:sp>
-        <p:nvSpPr>
-          <p:cNvPr id="433" name="Oval 18"/>
-          <p:cNvSpPr/>
-          <p:nvPr/>
-        </p:nvSpPr>
-        <p:spPr>
-          <a:xfrm>
-            <a:off x="6309360" y="4709160"/>
-            <a:ext cx="420120" cy="420120"/>
-          </a:xfrm>
-          <a:prstGeom prst="ellipse">
-            <a:avLst/>
-          </a:prstGeom>
-          <a:solidFill>
-            <a:srgbClr val="1C7293"/>
-          </a:solidFill>
-          <a:ln>
-            <a:noFill/>
-          </a:ln>
-          <a:effectLst>
-            <a:outerShdw blurRad="39960" dist="23040" dir="5400000" rotWithShape="0">
-              <a:srgbClr val="000000">
-                <a:alpha val="35000"/>
-              </a:srgbClr>
-            </a:outerShdw>
-          </a:effectLst>
-        </p:spPr>
-        <p:style>
-          <a:lnRef idx="1">
-            <a:schemeClr val="accent1"/>
-          </a:lnRef>
-          <a:fillRef idx="3">
-            <a:schemeClr val="accent1"/>
-          </a:fillRef>
-          <a:effectRef idx="2">
-            <a:schemeClr val="accent1"/>
-          </a:effectRef>
-          <a:fontRef idx="minor"/>
-        </p:style>
-        <p:txBody>
-          <a:bodyPr lIns="18360" tIns="0" rIns="18360" bIns="0" anchor="ctr">
-            <a:noAutofit/>
-          </a:bodyPr>
-          <a:lstStyle/>
-          <a:p>
-            <a:pPr algn="ctr" defTabSz="457200">
-              <a:lnSpc>
-                <a:spcPct val="100000"/>
-              </a:lnSpc>
-            </a:pPr>
-            <a:r>
-              <a:rPr lang="en-US" sz="1300" b="1" u="none" strike="noStrike">
-                <a:solidFill>
-                  <a:srgbClr val="FFFFFF"/>
-                </a:solidFill>
-                <a:effectLst/>
-                <a:uFillTx/>
-                <a:latin typeface="Calibri"/>
-              </a:rPr>
-              <a:t>4</a:t>
-            </a:r>
-            <a:endParaRPr lang="es-ES" sz="1300" b="0" u="none" strike="noStrike">
-              <a:solidFill>
-                <a:srgbClr val="FFFFFF"/>
-              </a:solidFill>
-              <a:effectLst/>
-              <a:uFillTx/>
-              <a:latin typeface="Arial"/>
-            </a:endParaRPr>
-          </a:p>
-        </p:txBody>
-      </p:sp>
-      <p:sp>
-        <p:nvSpPr>
-          <p:cNvPr id="434" name="TextBox 19"/>
-          <p:cNvSpPr/>
-          <p:nvPr/>
-        </p:nvSpPr>
-        <p:spPr>
-          <a:xfrm>
-            <a:off x="6830640" y="4581000"/>
-            <a:ext cx="4525920" cy="685440"/>
-          </a:xfrm>
-          <a:prstGeom prst="rect">
-            <a:avLst/>
-          </a:prstGeom>
-          <a:noFill/>
-          <a:ln w="0">
-            <a:noFill/>
-          </a:ln>
-        </p:spPr>
-        <p:style>
-          <a:lnRef idx="0">
-            <a:scrgbClr r="0" g="0" b="0"/>
-          </a:lnRef>
-          <a:fillRef idx="0">
-            <a:scrgbClr r="0" g="0" b="0"/>
-          </a:fillRef>
-          <a:effectRef idx="0">
-            <a:scrgbClr r="0" g="0" b="0"/>
-          </a:effectRef>
-          <a:fontRef idx="minor"/>
-        </p:style>
-        <p:txBody>
-          <a:bodyPr lIns="0" tIns="0" rIns="0" bIns="0" anchor="ctr">
-            <a:spAutoFit/>
-          </a:bodyPr>
-          <a:lstStyle/>
-          <a:p>
-            <a:pPr defTabSz="457200">
-              <a:lnSpc>
-                <a:spcPct val="105000"/>
-              </a:lnSpc>
-            </a:pPr>
-            <a:r>
-              <a:rPr lang="en-US" sz="1180" b="0" u="none" strike="noStrike">
-                <a:solidFill>
-                  <a:srgbClr val="162230"/>
-                </a:solidFill>
-                <a:effectLst/>
-                <a:uFillTx/>
-                <a:latin typeface="Calibri"/>
-              </a:rPr>
-              <a:t>Reducir la dependencia de un motor LaTeX en la generación de PDF</a:t>
-            </a:r>
-            <a:endParaRPr lang="es-ES" sz="1180" b="0" u="none" strike="noStrike">
-              <a:solidFill>
-                <a:srgbClr val="000000"/>
-              </a:solidFill>
-              <a:effectLst/>
-              <a:uFillTx/>
-              <a:latin typeface="Arial"/>
-            </a:endParaRPr>
-          </a:p>
-        </p:txBody>
-      </p:sp>
-      <p:sp>
-        <p:nvSpPr>
-          <p:cNvPr id="435" name="Rounded Rectangle 20"/>
-          <p:cNvSpPr/>
-          <p:nvPr/>
-        </p:nvSpPr>
-        <p:spPr>
-          <a:xfrm>
-            <a:off x="6172200" y="5385960"/>
-            <a:ext cx="5348880" cy="685440"/>
-          </a:xfrm>
-          <a:prstGeom prst="roundRect">
-            <a:avLst>
-              <a:gd name="adj" fmla="val 14000"/>
-            </a:avLst>
-          </a:prstGeom>
-          <a:solidFill>
-            <a:srgbClr val="F0F4F8"/>
-          </a:solidFill>
-          <a:ln>
-            <a:noFill/>
-          </a:ln>
-          <a:effectLst>
-            <a:outerShdw blurRad="39960" dist="23040" dir="5400000" rotWithShape="0">
-              <a:srgbClr val="000000">
-                <a:alpha val="35000"/>
-              </a:srgbClr>
-            </a:outerShdw>
-          </a:effectLst>
-        </p:spPr>
-        <p:style>
-          <a:lnRef idx="1">
-            <a:schemeClr val="accent1"/>
-          </a:lnRef>
-          <a:fillRef idx="3">
-            <a:schemeClr val="accent1"/>
-          </a:fillRef>
-          <a:effectRef idx="2">
-            <a:schemeClr val="accent1"/>
-          </a:effectRef>
-          <a:fontRef idx="minor"/>
-        </p:style>
-        <p:txBody>
-          <a:bodyPr lIns="90000" tIns="45000" rIns="90000" bIns="45000" anchor="ctr">
-            <a:noAutofit/>
-          </a:bodyPr>
-          <a:lstStyle/>
-          <a:p>
-            <a:endParaRPr lang="en-US" sz="1800" b="0" u="none" strike="noStrike">
-              <a:solidFill>
-                <a:schemeClr val="lt1"/>
-              </a:solidFill>
-              <a:effectLst/>
-              <a:uFillTx/>
-              <a:latin typeface="Calibri"/>
-            </a:endParaRPr>
-          </a:p>
-        </p:txBody>
-      </p:sp>
-      <p:sp>
-        <p:nvSpPr>
-          <p:cNvPr id="436" name="Oval 21"/>
-          <p:cNvSpPr/>
-          <p:nvPr/>
-        </p:nvSpPr>
-        <p:spPr>
-          <a:xfrm>
-            <a:off x="6309360" y="5513760"/>
-            <a:ext cx="420120" cy="420120"/>
-          </a:xfrm>
-          <a:prstGeom prst="ellipse">
-            <a:avLst/>
-          </a:prstGeom>
-          <a:solidFill>
-            <a:srgbClr val="1C7293"/>
-          </a:solidFill>
-          <a:ln>
-            <a:noFill/>
-          </a:ln>
-          <a:effectLst>
-            <a:outerShdw blurRad="39960" dist="23040" dir="5400000" rotWithShape="0">
-              <a:srgbClr val="000000">
-                <a:alpha val="35000"/>
-              </a:srgbClr>
-            </a:outerShdw>
-          </a:effectLst>
-        </p:spPr>
-        <p:style>
-          <a:lnRef idx="1">
-            <a:schemeClr val="accent1"/>
-          </a:lnRef>
-          <a:fillRef idx="3">
-            <a:schemeClr val="accent1"/>
-          </a:fillRef>
-          <a:effectRef idx="2">
-            <a:schemeClr val="accent1"/>
-          </a:effectRef>
-          <a:fontRef idx="minor"/>
-        </p:style>
-        <p:txBody>
-          <a:bodyPr lIns="18360" tIns="0" rIns="18360" bIns="0" anchor="ctr">
-            <a:noAutofit/>
-          </a:bodyPr>
-          <a:lstStyle/>
-          <a:p>
-            <a:pPr algn="ctr" defTabSz="457200">
-              <a:lnSpc>
-                <a:spcPct val="100000"/>
-              </a:lnSpc>
-            </a:pPr>
-            <a:r>
-              <a:rPr lang="en-US" sz="1300" b="1" u="none" strike="noStrike">
-                <a:solidFill>
-                  <a:srgbClr val="FFFFFF"/>
-                </a:solidFill>
-                <a:effectLst/>
-                <a:uFillTx/>
-                <a:latin typeface="Calibri"/>
-              </a:rPr>
-              <a:t>5</a:t>
-            </a:r>
-            <a:endParaRPr lang="es-ES" sz="1300" b="0" u="none" strike="noStrike">
-              <a:solidFill>
-                <a:srgbClr val="FFFFFF"/>
-              </a:solidFill>
-              <a:effectLst/>
-              <a:uFillTx/>
-              <a:latin typeface="Arial"/>
-            </a:endParaRPr>
-          </a:p>
-        </p:txBody>
-      </p:sp>
-      <p:sp>
-        <p:nvSpPr>
-          <p:cNvPr id="437" name="TextBox 22"/>
-          <p:cNvSpPr/>
-          <p:nvPr/>
-        </p:nvSpPr>
-        <p:spPr>
-          <a:xfrm>
-            <a:off x="6830640" y="5385960"/>
-            <a:ext cx="4525920" cy="685440"/>
-          </a:xfrm>
-          <a:prstGeom prst="rect">
-            <a:avLst/>
-          </a:prstGeom>
-          <a:noFill/>
-          <a:ln w="0">
-            <a:noFill/>
-          </a:ln>
-        </p:spPr>
-        <p:style>
-          <a:lnRef idx="0">
-            <a:scrgbClr r="0" g="0" b="0"/>
-          </a:lnRef>
-          <a:fillRef idx="0">
-            <a:scrgbClr r="0" g="0" b="0"/>
-          </a:fillRef>
-          <a:effectRef idx="0">
-            <a:scrgbClr r="0" g="0" b="0"/>
-          </a:effectRef>
-          <a:fontRef idx="minor"/>
-        </p:style>
-        <p:txBody>
-          <a:bodyPr lIns="0" tIns="0" rIns="0" bIns="0" anchor="ctr">
-            <a:spAutoFit/>
-          </a:bodyPr>
-          <a:lstStyle/>
-          <a:p>
-            <a:pPr defTabSz="457200">
-              <a:lnSpc>
-                <a:spcPct val="105000"/>
-              </a:lnSpc>
-            </a:pPr>
-            <a:r>
-              <a:rPr lang="en-US" sz="1180" b="0" u="none" strike="noStrike">
-                <a:solidFill>
-                  <a:srgbClr val="162230"/>
-                </a:solidFill>
-                <a:effectLst/>
-                <a:uFillTx/>
-                <a:latin typeface="Calibri"/>
-              </a:rPr>
-              <a:t>Explorar extensiones semánticas (JSON-LD) e integración institucional</a:t>
-            </a:r>
-            <a:endParaRPr lang="es-ES" sz="1180" b="0" u="none" strike="noStrike">
-              <a:solidFill>
-                <a:srgbClr val="000000"/>
-              </a:solidFill>
-              <a:effectLst/>
-              <a:uFillTx/>
-              <a:latin typeface="Arial"/>
-            </a:endParaRPr>
-          </a:p>
-        </p:txBody>
-      </p:sp>
-    </p:spTree>
-  </p:cSld>
-  <p:clrMapOvr>
-    <a:masterClrMapping/>
-  </p:clrMapOvr>
-</p:sld>
-</file>
-
-<file path=ppt/slides/slide22.xml><?xml version="1.0" encoding="utf-8"?>
-<p:sld xmlns:a="http://schemas.openxmlformats.org/drawingml/2006/main" xmlns:r="http://schemas.openxmlformats.org/officeDocument/2006/relationships" xmlns:p="http://schemas.openxmlformats.org/presentationml/2006/main">
-  <p:cSld>
-    <p:spTree>
-      <p:nvGrpSpPr>
-        <p:cNvPr id="1" name=""/>
-        <p:cNvGrpSpPr/>
-        <p:nvPr/>
-      </p:nvGrpSpPr>
-      <p:grpSpPr>
-        <a:xfrm>
-          <a:off x="0" y="0"/>
-          <a:ext cx="0" cy="0"/>
-          <a:chOff x="0" y="0"/>
-          <a:chExt cx="0" cy="0"/>
-        </a:xfrm>
-      </p:grpSpPr>
-      <p:sp>
-        <p:nvSpPr>
-          <p:cNvPr id="438" name="Rectangle 1"/>
-          <p:cNvSpPr/>
-          <p:nvPr/>
-        </p:nvSpPr>
-        <p:spPr>
-          <a:xfrm>
-            <a:off x="0" y="0"/>
-            <a:ext cx="12191400" cy="6857640"/>
-          </a:xfrm>
-          <a:prstGeom prst="rect">
-            <a:avLst/>
-          </a:prstGeom>
-          <a:solidFill>
-            <a:srgbClr val="11243A"/>
-          </a:solidFill>
-          <a:ln>
-            <a:noFill/>
-          </a:ln>
-          <a:effectLst>
-            <a:outerShdw blurRad="39960" dist="23040" dir="5400000" rotWithShape="0">
-              <a:srgbClr val="000000">
-                <a:alpha val="35000"/>
-              </a:srgbClr>
-            </a:outerShdw>
-          </a:effectLst>
-        </p:spPr>
-        <p:style>
-          <a:lnRef idx="1">
-            <a:schemeClr val="accent1"/>
-          </a:lnRef>
-          <a:fillRef idx="3">
-            <a:schemeClr val="accent1"/>
-          </a:fillRef>
-          <a:effectRef idx="2">
-            <a:schemeClr val="accent1"/>
-          </a:effectRef>
-          <a:fontRef idx="minor"/>
-        </p:style>
-        <p:txBody>
-          <a:bodyPr lIns="90000" tIns="45000" rIns="90000" bIns="45000" anchor="ctr">
-            <a:noAutofit/>
-          </a:bodyPr>
-          <a:lstStyle/>
-          <a:p>
-            <a:endParaRPr lang="en-US" sz="1800" b="0" u="none" strike="noStrike">
-              <a:solidFill>
-                <a:schemeClr val="lt1"/>
-              </a:solidFill>
-              <a:effectLst/>
-              <a:uFillTx/>
-              <a:latin typeface="Calibri"/>
-            </a:endParaRPr>
-          </a:p>
-        </p:txBody>
-      </p:sp>
-      <p:sp>
-        <p:nvSpPr>
-          <p:cNvPr id="439" name="Rectangle 2"/>
-          <p:cNvSpPr/>
-          <p:nvPr/>
-        </p:nvSpPr>
-        <p:spPr>
-          <a:xfrm>
-            <a:off x="0" y="0"/>
-            <a:ext cx="5120280" cy="182520"/>
-          </a:xfrm>
-          <a:prstGeom prst="rect">
-            <a:avLst/>
-          </a:prstGeom>
-          <a:solidFill>
-            <a:srgbClr val="E09A3E"/>
-          </a:solidFill>
-          <a:ln>
-            <a:noFill/>
-          </a:ln>
-          <a:effectLst>
-            <a:outerShdw blurRad="39960" dist="23040" dir="5400000" rotWithShape="0">
-              <a:srgbClr val="000000">
-                <a:alpha val="35000"/>
-              </a:srgbClr>
-            </a:outerShdw>
-          </a:effectLst>
-        </p:spPr>
-        <p:style>
-          <a:lnRef idx="1">
-            <a:schemeClr val="accent1"/>
-          </a:lnRef>
-          <a:fillRef idx="3">
-            <a:schemeClr val="accent1"/>
-          </a:fillRef>
-          <a:effectRef idx="2">
-            <a:schemeClr val="accent1"/>
-          </a:effectRef>
-          <a:fontRef idx="minor"/>
-        </p:style>
-        <p:txBody>
-          <a:bodyPr lIns="90000" tIns="45000" rIns="90000" bIns="45000" anchor="ctr">
-            <a:noAutofit/>
-          </a:bodyPr>
-          <a:lstStyle/>
-          <a:p>
-            <a:endParaRPr lang="en-US" sz="1800" b="0" u="none" strike="noStrike">
-              <a:solidFill>
-                <a:schemeClr val="lt1"/>
-              </a:solidFill>
-              <a:effectLst/>
-              <a:uFillTx/>
-              <a:latin typeface="Calibri"/>
-            </a:endParaRPr>
-          </a:p>
-        </p:txBody>
-      </p:sp>
-      <p:sp>
-        <p:nvSpPr>
-          <p:cNvPr id="440" name="Rectangle 3"/>
-          <p:cNvSpPr/>
-          <p:nvPr/>
-        </p:nvSpPr>
-        <p:spPr>
-          <a:xfrm>
-            <a:off x="0" y="219600"/>
-            <a:ext cx="8595000" cy="182520"/>
-          </a:xfrm>
-          <a:prstGeom prst="rect">
-            <a:avLst/>
-          </a:prstGeom>
-          <a:solidFill>
-            <a:srgbClr val="1C7293"/>
-          </a:solidFill>
-          <a:ln>
-            <a:noFill/>
-          </a:ln>
-          <a:effectLst>
-            <a:outerShdw blurRad="39960" dist="23040" dir="5400000" rotWithShape="0">
-              <a:srgbClr val="000000">
-                <a:alpha val="35000"/>
-              </a:srgbClr>
-            </a:outerShdw>
-          </a:effectLst>
-        </p:spPr>
-        <p:style>
-          <a:lnRef idx="1">
-            <a:schemeClr val="accent1"/>
-          </a:lnRef>
-          <a:fillRef idx="3">
-            <a:schemeClr val="accent1"/>
-          </a:fillRef>
-          <a:effectRef idx="2">
-            <a:schemeClr val="accent1"/>
-          </a:effectRef>
-          <a:fontRef idx="minor"/>
-        </p:style>
-        <p:txBody>
-          <a:bodyPr lIns="90000" tIns="45000" rIns="90000" bIns="45000" anchor="ctr">
-            <a:noAutofit/>
-          </a:bodyPr>
-          <a:lstStyle/>
-          <a:p>
-            <a:endParaRPr lang="en-US" sz="1800" b="0" u="none" strike="noStrike">
-              <a:solidFill>
-                <a:schemeClr val="lt1"/>
-              </a:solidFill>
-              <a:effectLst/>
-              <a:uFillTx/>
-              <a:latin typeface="Calibri"/>
-            </a:endParaRPr>
-          </a:p>
-        </p:txBody>
-      </p:sp>
-      <p:sp>
-        <p:nvSpPr>
-          <p:cNvPr id="441" name="Rectangle 4"/>
-          <p:cNvSpPr/>
-          <p:nvPr/>
-        </p:nvSpPr>
-        <p:spPr>
-          <a:xfrm>
-            <a:off x="0" y="438840"/>
-            <a:ext cx="12191400" cy="182520"/>
-          </a:xfrm>
-          <a:prstGeom prst="rect">
-            <a:avLst/>
-          </a:prstGeom>
-          <a:solidFill>
-            <a:srgbClr val="065A82"/>
-          </a:solidFill>
-          <a:ln>
-            <a:noFill/>
-          </a:ln>
-          <a:effectLst>
-            <a:outerShdw blurRad="39960" dist="23040" dir="5400000" rotWithShape="0">
-              <a:srgbClr val="000000">
-                <a:alpha val="35000"/>
-              </a:srgbClr>
-            </a:outerShdw>
-          </a:effectLst>
-        </p:spPr>
-        <p:style>
-          <a:lnRef idx="1">
-            <a:schemeClr val="accent1"/>
-          </a:lnRef>
-          <a:fillRef idx="3">
-            <a:schemeClr val="accent1"/>
-          </a:fillRef>
-          <a:effectRef idx="2">
-            <a:schemeClr val="accent1"/>
-          </a:effectRef>
-          <a:fontRef idx="minor"/>
-        </p:style>
-        <p:txBody>
-          <a:bodyPr lIns="90000" tIns="45000" rIns="90000" bIns="45000" anchor="ctr">
-            <a:noAutofit/>
-          </a:bodyPr>
-          <a:lstStyle/>
-          <a:p>
-            <a:endParaRPr lang="en-US" sz="1800" b="0" u="none" strike="noStrike">
-              <a:solidFill>
-                <a:schemeClr val="lt1"/>
-              </a:solidFill>
-              <a:effectLst/>
-              <a:uFillTx/>
-              <a:latin typeface="Calibri"/>
-            </a:endParaRPr>
-          </a:p>
-        </p:txBody>
-      </p:sp>
-      <p:sp>
-        <p:nvSpPr>
-          <p:cNvPr id="442" name="TextBox 5"/>
-          <p:cNvSpPr/>
-          <p:nvPr/>
-        </p:nvSpPr>
-        <p:spPr>
-          <a:xfrm>
-            <a:off x="640080" y="2514600"/>
-            <a:ext cx="10881000" cy="1005480"/>
-          </a:xfrm>
-          <a:prstGeom prst="rect">
-            <a:avLst/>
-          </a:prstGeom>
-          <a:noFill/>
-          <a:ln w="0">
-            <a:noFill/>
-          </a:ln>
-        </p:spPr>
-        <p:style>
-          <a:lnRef idx="0">
-            <a:scrgbClr r="0" g="0" b="0"/>
-          </a:lnRef>
-          <a:fillRef idx="0">
-            <a:scrgbClr r="0" g="0" b="0"/>
-          </a:fillRef>
-          <a:effectRef idx="0">
-            <a:scrgbClr r="0" g="0" b="0"/>
-          </a:effectRef>
-          <a:fontRef idx="minor"/>
-        </p:style>
-        <p:txBody>
           <a:bodyPr lIns="0" tIns="0" rIns="0" bIns="0" anchor="t">
             <a:spAutoFit/>
           </a:bodyPr>
@@ -30515,17 +29108,17 @@
               </a:lnSpc>
             </a:pPr>
             <a:r>
-              <a:rPr lang="en-US" sz="4400" b="1" u="none" strike="noStrike">
-                <a:solidFill>
-                  <a:srgbClr val="FFFFFF"/>
-                </a:solidFill>
-                <a:effectLst/>
-                <a:uFillTx/>
-                <a:latin typeface="Cambria"/>
-              </a:rPr>
-              <a:t>Gracias por su atención</a:t>
-            </a:r>
-            <a:endParaRPr lang="es-ES" sz="4400" b="0" u="none" strike="noStrike">
+              <a:rPr lang="en-US" sz="1100" b="0" u="none" strike="noStrike">
+                <a:solidFill>
+                  <a:srgbClr val="A9BFD1"/>
+                </a:solidFill>
+                <a:effectLst/>
+                <a:uFillTx/>
+                <a:latin typeface="Calibri"/>
+              </a:rPr>
+              <a:t>Carlos Martínez Jaén · Open CVN · ESIIAB, Universidad de Castilla-La Mancha</a:t>
+            </a:r>
+            <a:endParaRPr lang="es-ES" sz="1100" b="0" u="none" strike="noStrike">
               <a:solidFill>
                 <a:srgbClr val="000000"/>
               </a:solidFill>
@@ -30538,128 +29131,51 @@
       </p:sp>
       <p:sp>
         <p:nvSpPr>
-          <p:cNvPr id="443" name="TextBox 6"/>
-          <p:cNvSpPr/>
-          <p:nvPr/>
-        </p:nvSpPr>
-        <p:spPr>
-          <a:xfrm>
-            <a:off x="640080" y="3520440"/>
-            <a:ext cx="10881000" cy="548280"/>
-          </a:xfrm>
-          <a:prstGeom prst="rect">
-            <a:avLst/>
-          </a:prstGeom>
-          <a:noFill/>
-          <a:ln w="0">
-            <a:noFill/>
-          </a:ln>
-        </p:spPr>
-        <p:style>
-          <a:lnRef idx="0">
-            <a:scrgbClr r="0" g="0" b="0"/>
-          </a:lnRef>
-          <a:fillRef idx="0">
-            <a:scrgbClr r="0" g="0" b="0"/>
-          </a:fillRef>
-          <a:effectRef idx="0">
-            <a:scrgbClr r="0" g="0" b="0"/>
-          </a:effectRef>
-          <a:fontRef idx="minor"/>
-        </p:style>
-        <p:txBody>
-          <a:bodyPr lIns="0" tIns="0" rIns="0" bIns="0" anchor="t">
-            <a:spAutoFit/>
-          </a:bodyPr>
+          <p:cNvPr id="2" name="Marcador de número de diapositiva 1">
+            <a:extLst>
+              <a:ext uri="{FF2B5EF4-FFF2-40B4-BE49-F238E27FC236}">
+                <a16:creationId xmlns:a16="http://schemas.microsoft.com/office/drawing/2014/main" id="{F2A581EB-C665-7C9B-51F6-5AD17F5B2A1B}"/>
+              </a:ext>
+            </a:extLst>
+          </p:cNvPr>
+          <p:cNvSpPr>
+            <a:spLocks noGrp="1"/>
+          </p:cNvSpPr>
+          <p:nvPr>
+            <p:ph type="sldNum" idx="27"/>
+          </p:nvPr>
+        </p:nvSpPr>
+        <p:spPr/>
+        <p:txBody>
+          <a:bodyPr/>
           <a:lstStyle/>
           <a:p>
-            <a:pPr algn="ctr" defTabSz="457200">
+            <a:pPr indent="0" algn="r" defTabSz="457200">
               <a:lnSpc>
                 <a:spcPct val="100000"/>
               </a:lnSpc>
-            </a:pPr>
-            <a:r>
-              <a:rPr lang="en-US" sz="1800" b="0" i="1" u="none" strike="noStrike">
-                <a:solidFill>
-                  <a:srgbClr val="E9F1F7"/>
-                </a:solidFill>
-                <a:effectLst/>
-                <a:uFillTx/>
-                <a:latin typeface="Calibri"/>
-              </a:rPr>
-              <a:t>Quedo a su disposición para las preguntas del tribunal</a:t>
-            </a:r>
-            <a:endParaRPr lang="es-ES" sz="1800" b="0" u="none" strike="noStrike">
-              <a:solidFill>
-                <a:srgbClr val="000000"/>
-              </a:solidFill>
-              <a:effectLst/>
-              <a:uFillTx/>
-              <a:latin typeface="Arial"/>
-            </a:endParaRPr>
-          </a:p>
-        </p:txBody>
-      </p:sp>
-      <p:sp>
-        <p:nvSpPr>
-          <p:cNvPr id="444" name="TextBox 7"/>
-          <p:cNvSpPr/>
-          <p:nvPr/>
-        </p:nvSpPr>
-        <p:spPr>
-          <a:xfrm>
-            <a:off x="640080" y="6263640"/>
-            <a:ext cx="10881000" cy="365400"/>
-          </a:xfrm>
-          <a:prstGeom prst="rect">
-            <a:avLst/>
-          </a:prstGeom>
-          <a:noFill/>
-          <a:ln w="0">
-            <a:noFill/>
-          </a:ln>
-        </p:spPr>
-        <p:style>
-          <a:lnRef idx="0">
-            <a:scrgbClr r="0" g="0" b="0"/>
-          </a:lnRef>
-          <a:fillRef idx="0">
-            <a:scrgbClr r="0" g="0" b="0"/>
-          </a:fillRef>
-          <a:effectRef idx="0">
-            <a:scrgbClr r="0" g="0" b="0"/>
-          </a:effectRef>
-          <a:fontRef idx="minor"/>
-        </p:style>
-        <p:txBody>
-          <a:bodyPr lIns="0" tIns="0" rIns="0" bIns="0" anchor="t">
-            <a:spAutoFit/>
-          </a:bodyPr>
-          <a:lstStyle/>
-          <a:p>
-            <a:pPr algn="ctr" defTabSz="457200">
-              <a:lnSpc>
-                <a:spcPct val="100000"/>
-              </a:lnSpc>
-            </a:pPr>
-            <a:r>
-              <a:rPr lang="en-US" sz="1100" b="0" u="none" strike="noStrike">
-                <a:solidFill>
-                  <a:srgbClr val="A9BFD1"/>
-                </a:solidFill>
-                <a:effectLst/>
-                <a:uFillTx/>
-                <a:latin typeface="Calibri"/>
-              </a:rPr>
-              <a:t>Carlos Martínez Jaén · Open CVN · ESIIAB, Universidad de Castilla-La Mancha</a:t>
-            </a:r>
-            <a:endParaRPr lang="es-ES" sz="1100" b="0" u="none" strike="noStrike">
-              <a:solidFill>
-                <a:srgbClr val="000000"/>
-              </a:solidFill>
-              <a:effectLst/>
-              <a:uFillTx/>
-              <a:latin typeface="Arial"/>
+              <a:buNone/>
+            </a:pPr>
+            <a:fld id="{E96B40A6-A46F-4A85-AE2F-4CA2D3C05104}" type="slidenum">
+              <a:rPr lang="en-US" sz="1200" b="0" u="none" strike="noStrike" smtClean="0">
+                <a:solidFill>
+                  <a:schemeClr val="dk1">
+                    <a:tint val="75000"/>
+                  </a:schemeClr>
+                </a:solidFill>
+                <a:effectLst/>
+                <a:uFillTx/>
+                <a:latin typeface="Calibri"/>
+              </a:rPr>
+              <a:t>21</a:t>
+            </a:fld>
+            <a:endParaRPr lang="es-ES" sz="1200" b="0" u="none" strike="noStrike">
+              <a:solidFill>
+                <a:srgbClr val="000000"/>
+              </a:solidFill>
+              <a:effectLst/>
+              <a:uFillTx/>
+              <a:latin typeface="Times New Roman"/>
             </a:endParaRPr>
           </a:p>
         </p:txBody>
@@ -31301,6 +29817,57 @@
           </a:p>
         </p:txBody>
       </p:sp>
+      <p:sp>
+        <p:nvSpPr>
+          <p:cNvPr id="2" name="Marcador de número de diapositiva 1">
+            <a:extLst>
+              <a:ext uri="{FF2B5EF4-FFF2-40B4-BE49-F238E27FC236}">
+                <a16:creationId xmlns:a16="http://schemas.microsoft.com/office/drawing/2014/main" id="{9BB99639-C939-5BB5-CBFE-4DE10EE48021}"/>
+              </a:ext>
+            </a:extLst>
+          </p:cNvPr>
+          <p:cNvSpPr>
+            <a:spLocks noGrp="1"/>
+          </p:cNvSpPr>
+          <p:nvPr>
+            <p:ph type="sldNum" idx="27"/>
+          </p:nvPr>
+        </p:nvSpPr>
+        <p:spPr/>
+        <p:txBody>
+          <a:bodyPr/>
+          <a:lstStyle/>
+          <a:p>
+            <a:pPr indent="0" algn="r" defTabSz="457200">
+              <a:lnSpc>
+                <a:spcPct val="100000"/>
+              </a:lnSpc>
+              <a:buNone/>
+            </a:pPr>
+            <a:fld id="{E96B40A6-A46F-4A85-AE2F-4CA2D3C05104}" type="slidenum">
+              <a:rPr lang="en-US" sz="1200" b="0" u="none" strike="noStrike" smtClean="0">
+                <a:solidFill>
+                  <a:schemeClr val="dk1">
+                    <a:tint val="75000"/>
+                  </a:schemeClr>
+                </a:solidFill>
+                <a:effectLst/>
+                <a:uFillTx/>
+                <a:latin typeface="Calibri"/>
+              </a:rPr>
+              <a:t>3</a:t>
+            </a:fld>
+            <a:endParaRPr lang="es-ES" sz="1200" b="0" u="none" strike="noStrike">
+              <a:solidFill>
+                <a:srgbClr val="000000"/>
+              </a:solidFill>
+              <a:effectLst/>
+              <a:uFillTx/>
+              <a:latin typeface="Times New Roman"/>
+            </a:endParaRPr>
+          </a:p>
+        </p:txBody>
+      </p:sp>
     </p:spTree>
   </p:cSld>
   <p:clrMapOvr>
@@ -32868,6 +31435,57 @@
           </a:p>
         </p:txBody>
       </p:sp>
+      <p:sp>
+        <p:nvSpPr>
+          <p:cNvPr id="2" name="Marcador de número de diapositiva 1">
+            <a:extLst>
+              <a:ext uri="{FF2B5EF4-FFF2-40B4-BE49-F238E27FC236}">
+                <a16:creationId xmlns:a16="http://schemas.microsoft.com/office/drawing/2014/main" id="{3BF3AC9E-8652-2F64-A30F-24BE1D280654}"/>
+              </a:ext>
+            </a:extLst>
+          </p:cNvPr>
+          <p:cNvSpPr>
+            <a:spLocks noGrp="1"/>
+          </p:cNvSpPr>
+          <p:nvPr>
+            <p:ph type="sldNum" idx="27"/>
+          </p:nvPr>
+        </p:nvSpPr>
+        <p:spPr/>
+        <p:txBody>
+          <a:bodyPr/>
+          <a:lstStyle/>
+          <a:p>
+            <a:pPr indent="0" algn="r" defTabSz="457200">
+              <a:lnSpc>
+                <a:spcPct val="100000"/>
+              </a:lnSpc>
+              <a:buNone/>
+            </a:pPr>
+            <a:fld id="{E96B40A6-A46F-4A85-AE2F-4CA2D3C05104}" type="slidenum">
+              <a:rPr lang="en-US" sz="1200" b="0" u="none" strike="noStrike" smtClean="0">
+                <a:solidFill>
+                  <a:schemeClr val="dk1">
+                    <a:tint val="75000"/>
+                  </a:schemeClr>
+                </a:solidFill>
+                <a:effectLst/>
+                <a:uFillTx/>
+                <a:latin typeface="Calibri"/>
+              </a:rPr>
+              <a:t>4</a:t>
+            </a:fld>
+            <a:endParaRPr lang="es-ES" sz="1200" b="0" u="none" strike="noStrike">
+              <a:solidFill>
+                <a:srgbClr val="000000"/>
+              </a:solidFill>
+              <a:effectLst/>
+              <a:uFillTx/>
+              <a:latin typeface="Times New Roman"/>
+            </a:endParaRPr>
+          </a:p>
+        </p:txBody>
+      </p:sp>
     </p:spTree>
   </p:cSld>
   <p:clrMapOvr>
@@ -34741,6 +33359,57 @@
               <a:effectLst/>
               <a:uFillTx/>
               <a:latin typeface="Arial"/>
+            </a:endParaRPr>
+          </a:p>
+        </p:txBody>
+      </p:sp>
+      <p:sp>
+        <p:nvSpPr>
+          <p:cNvPr id="2" name="Marcador de número de diapositiva 1">
+            <a:extLst>
+              <a:ext uri="{FF2B5EF4-FFF2-40B4-BE49-F238E27FC236}">
+                <a16:creationId xmlns:a16="http://schemas.microsoft.com/office/drawing/2014/main" id="{83760F9B-C42D-060F-9006-5D17DA5B669A}"/>
+              </a:ext>
+            </a:extLst>
+          </p:cNvPr>
+          <p:cNvSpPr>
+            <a:spLocks noGrp="1"/>
+          </p:cNvSpPr>
+          <p:nvPr>
+            <p:ph type="sldNum" idx="27"/>
+          </p:nvPr>
+        </p:nvSpPr>
+        <p:spPr/>
+        <p:txBody>
+          <a:bodyPr/>
+          <a:lstStyle/>
+          <a:p>
+            <a:pPr indent="0" algn="r" defTabSz="457200">
+              <a:lnSpc>
+                <a:spcPct val="100000"/>
+              </a:lnSpc>
+              <a:buNone/>
+            </a:pPr>
+            <a:fld id="{E96B40A6-A46F-4A85-AE2F-4CA2D3C05104}" type="slidenum">
+              <a:rPr lang="en-US" sz="1200" b="0" u="none" strike="noStrike" smtClean="0">
+                <a:solidFill>
+                  <a:schemeClr val="dk1">
+                    <a:tint val="75000"/>
+                  </a:schemeClr>
+                </a:solidFill>
+                <a:effectLst/>
+                <a:uFillTx/>
+                <a:latin typeface="Calibri"/>
+              </a:rPr>
+              <a:t>5</a:t>
+            </a:fld>
+            <a:endParaRPr lang="es-ES" sz="1200" b="0" u="none" strike="noStrike">
+              <a:solidFill>
+                <a:srgbClr val="000000"/>
+              </a:solidFill>
+              <a:effectLst/>
+              <a:uFillTx/>
+              <a:latin typeface="Times New Roman"/>
             </a:endParaRPr>
           </a:p>
         </p:txBody>
@@ -35698,6 +34367,57 @@
           </a:p>
         </p:txBody>
       </p:sp>
+      <p:sp>
+        <p:nvSpPr>
+          <p:cNvPr id="2" name="Marcador de número de diapositiva 1">
+            <a:extLst>
+              <a:ext uri="{FF2B5EF4-FFF2-40B4-BE49-F238E27FC236}">
+                <a16:creationId xmlns:a16="http://schemas.microsoft.com/office/drawing/2014/main" id="{BAAB5AD8-09E0-DF93-40D8-C6665F003893}"/>
+              </a:ext>
+            </a:extLst>
+          </p:cNvPr>
+          <p:cNvSpPr>
+            <a:spLocks noGrp="1"/>
+          </p:cNvSpPr>
+          <p:nvPr>
+            <p:ph type="sldNum" idx="27"/>
+          </p:nvPr>
+        </p:nvSpPr>
+        <p:spPr/>
+        <p:txBody>
+          <a:bodyPr/>
+          <a:lstStyle/>
+          <a:p>
+            <a:pPr indent="0" algn="r" defTabSz="457200">
+              <a:lnSpc>
+                <a:spcPct val="100000"/>
+              </a:lnSpc>
+              <a:buNone/>
+            </a:pPr>
+            <a:fld id="{E96B40A6-A46F-4A85-AE2F-4CA2D3C05104}" type="slidenum">
+              <a:rPr lang="en-US" sz="1200" b="0" u="none" strike="noStrike" smtClean="0">
+                <a:solidFill>
+                  <a:schemeClr val="dk1">
+                    <a:tint val="75000"/>
+                  </a:schemeClr>
+                </a:solidFill>
+                <a:effectLst/>
+                <a:uFillTx/>
+                <a:latin typeface="Calibri"/>
+              </a:rPr>
+              <a:t>6</a:t>
+            </a:fld>
+            <a:endParaRPr lang="es-ES" sz="1200" b="0" u="none" strike="noStrike">
+              <a:solidFill>
+                <a:srgbClr val="000000"/>
+              </a:solidFill>
+              <a:effectLst/>
+              <a:uFillTx/>
+              <a:latin typeface="Times New Roman"/>
+            </a:endParaRPr>
+          </a:p>
+        </p:txBody>
+      </p:sp>
     </p:spTree>
   </p:cSld>
   <p:clrMapOvr>
@@ -36867,6 +35587,57 @@
           </a:p>
         </p:txBody>
       </p:sp>
+      <p:sp>
+        <p:nvSpPr>
+          <p:cNvPr id="2" name="Marcador de número de diapositiva 1">
+            <a:extLst>
+              <a:ext uri="{FF2B5EF4-FFF2-40B4-BE49-F238E27FC236}">
+                <a16:creationId xmlns:a16="http://schemas.microsoft.com/office/drawing/2014/main" id="{6C2E1327-8E37-CE7C-847C-3B21073B0EE3}"/>
+              </a:ext>
+            </a:extLst>
+          </p:cNvPr>
+          <p:cNvSpPr>
+            <a:spLocks noGrp="1"/>
+          </p:cNvSpPr>
+          <p:nvPr>
+            <p:ph type="sldNum" idx="27"/>
+          </p:nvPr>
+        </p:nvSpPr>
+        <p:spPr/>
+        <p:txBody>
+          <a:bodyPr/>
+          <a:lstStyle/>
+          <a:p>
+            <a:pPr indent="0" algn="r" defTabSz="457200">
+              <a:lnSpc>
+                <a:spcPct val="100000"/>
+              </a:lnSpc>
+              <a:buNone/>
+            </a:pPr>
+            <a:fld id="{E96B40A6-A46F-4A85-AE2F-4CA2D3C05104}" type="slidenum">
+              <a:rPr lang="en-US" sz="1200" b="0" u="none" strike="noStrike" smtClean="0">
+                <a:solidFill>
+                  <a:schemeClr val="dk1">
+                    <a:tint val="75000"/>
+                  </a:schemeClr>
+                </a:solidFill>
+                <a:effectLst/>
+                <a:uFillTx/>
+                <a:latin typeface="Calibri"/>
+              </a:rPr>
+              <a:t>7</a:t>
+            </a:fld>
+            <a:endParaRPr lang="es-ES" sz="1200" b="0" u="none" strike="noStrike">
+              <a:solidFill>
+                <a:srgbClr val="000000"/>
+              </a:solidFill>
+              <a:effectLst/>
+              <a:uFillTx/>
+              <a:latin typeface="Times New Roman"/>
+            </a:endParaRPr>
+          </a:p>
+        </p:txBody>
+      </p:sp>
     </p:spTree>
   </p:cSld>
   <p:clrMapOvr>
@@ -39493,6 +38264,57 @@
           </a:p>
         </p:txBody>
       </p:sp>
+      <p:sp>
+        <p:nvSpPr>
+          <p:cNvPr id="2" name="Marcador de número de diapositiva 1">
+            <a:extLst>
+              <a:ext uri="{FF2B5EF4-FFF2-40B4-BE49-F238E27FC236}">
+                <a16:creationId xmlns:a16="http://schemas.microsoft.com/office/drawing/2014/main" id="{A1925AB8-3FBA-5918-C0F2-14E7FB394EBE}"/>
+              </a:ext>
+            </a:extLst>
+          </p:cNvPr>
+          <p:cNvSpPr>
+            <a:spLocks noGrp="1"/>
+          </p:cNvSpPr>
+          <p:nvPr>
+            <p:ph type="sldNum" idx="27"/>
+          </p:nvPr>
+        </p:nvSpPr>
+        <p:spPr/>
+        <p:txBody>
+          <a:bodyPr/>
+          <a:lstStyle/>
+          <a:p>
+            <a:pPr indent="0" algn="r" defTabSz="457200">
+              <a:lnSpc>
+                <a:spcPct val="100000"/>
+              </a:lnSpc>
+              <a:buNone/>
+            </a:pPr>
+            <a:fld id="{E96B40A6-A46F-4A85-AE2F-4CA2D3C05104}" type="slidenum">
+              <a:rPr lang="en-US" sz="1200" b="0" u="none" strike="noStrike" smtClean="0">
+                <a:solidFill>
+                  <a:schemeClr val="dk1">
+                    <a:tint val="75000"/>
+                  </a:schemeClr>
+                </a:solidFill>
+                <a:effectLst/>
+                <a:uFillTx/>
+                <a:latin typeface="Calibri"/>
+              </a:rPr>
+              <a:t>8</a:t>
+            </a:fld>
+            <a:endParaRPr lang="es-ES" sz="1200" b="0" u="none" strike="noStrike">
+              <a:solidFill>
+                <a:srgbClr val="000000"/>
+              </a:solidFill>
+              <a:effectLst/>
+              <a:uFillTx/>
+              <a:latin typeface="Times New Roman"/>
+            </a:endParaRPr>
+          </a:p>
+        </p:txBody>
+      </p:sp>
     </p:spTree>
   </p:cSld>
   <p:clrMapOvr>
@@ -40707,6 +39529,57 @@
               <a:effectLst/>
               <a:uFillTx/>
               <a:latin typeface="Arial"/>
+            </a:endParaRPr>
+          </a:p>
+        </p:txBody>
+      </p:sp>
+      <p:sp>
+        <p:nvSpPr>
+          <p:cNvPr id="2" name="Marcador de número de diapositiva 1">
+            <a:extLst>
+              <a:ext uri="{FF2B5EF4-FFF2-40B4-BE49-F238E27FC236}">
+                <a16:creationId xmlns:a16="http://schemas.microsoft.com/office/drawing/2014/main" id="{FB431E32-87AD-F4AA-DC18-571690A93E4F}"/>
+              </a:ext>
+            </a:extLst>
+          </p:cNvPr>
+          <p:cNvSpPr>
+            <a:spLocks noGrp="1"/>
+          </p:cNvSpPr>
+          <p:nvPr>
+            <p:ph type="sldNum" idx="27"/>
+          </p:nvPr>
+        </p:nvSpPr>
+        <p:spPr/>
+        <p:txBody>
+          <a:bodyPr/>
+          <a:lstStyle/>
+          <a:p>
+            <a:pPr indent="0" algn="r" defTabSz="457200">
+              <a:lnSpc>
+                <a:spcPct val="100000"/>
+              </a:lnSpc>
+              <a:buNone/>
+            </a:pPr>
+            <a:fld id="{E96B40A6-A46F-4A85-AE2F-4CA2D3C05104}" type="slidenum">
+              <a:rPr lang="en-US" sz="1200" b="0" u="none" strike="noStrike" smtClean="0">
+                <a:solidFill>
+                  <a:schemeClr val="dk1">
+                    <a:tint val="75000"/>
+                  </a:schemeClr>
+                </a:solidFill>
+                <a:effectLst/>
+                <a:uFillTx/>
+                <a:latin typeface="Calibri"/>
+              </a:rPr>
+              <a:t>9</a:t>
+            </a:fld>
+            <a:endParaRPr lang="es-ES" sz="1200" b="0" u="none" strike="noStrike">
+              <a:solidFill>
+                <a:srgbClr val="000000"/>
+              </a:solidFill>
+              <a:effectLst/>
+              <a:uFillTx/>
+              <a:latin typeface="Times New Roman"/>
             </a:endParaRPr>
           </a:p>
         </p:txBody>
